--- a/vignettes/articles/figs_jdr/sdbuildR_paper.pptx
+++ b/vignettes/articles/figs_jdr/sdbuildR_paper.pptx
@@ -6,11 +6,13 @@
   </p:sldMasterIdLst>
   <p:sldIdLst>
     <p:sldId id="259" r:id="rId2"/>
-    <p:sldId id="262" r:id="rId3"/>
-    <p:sldId id="260" r:id="rId4"/>
-    <p:sldId id="261" r:id="rId5"/>
-    <p:sldId id="264" r:id="rId6"/>
-    <p:sldId id="263" r:id="rId7"/>
+    <p:sldId id="266" r:id="rId3"/>
+    <p:sldId id="265" r:id="rId4"/>
+    <p:sldId id="260" r:id="rId5"/>
+    <p:sldId id="261" r:id="rId6"/>
+    <p:sldId id="264" r:id="rId7"/>
+    <p:sldId id="262" r:id="rId8"/>
+    <p:sldId id="263" r:id="rId9"/>
   </p:sldIdLst>
   <p:sldSz cx="12192000" cy="6858000"/>
   <p:notesSz cx="6858000" cy="9144000"/>
@@ -4390,7 +4392,7 @@
         <p:cNvPr id="1" name="">
           <a:extLst>
             <a:ext uri="{FF2B5EF4-FFF2-40B4-BE49-F238E27FC236}">
-              <a16:creationId xmlns:a16="http://schemas.microsoft.com/office/drawing/2014/main" id="{F9224F5F-4D70-EC07-0CAF-A42DC922FDEB}"/>
+              <a16:creationId xmlns:a16="http://schemas.microsoft.com/office/drawing/2014/main" id="{B1CEA088-ACD2-6FA8-822B-06C8B28F934F}"/>
             </a:ext>
           </a:extLst>
         </p:cNvPr>
@@ -4410,7 +4412,7 @@
           <p:cNvPr id="40" name="TextBox 39">
             <a:extLst>
               <a:ext uri="{FF2B5EF4-FFF2-40B4-BE49-F238E27FC236}">
-                <a16:creationId xmlns:a16="http://schemas.microsoft.com/office/drawing/2014/main" id="{3CB5C776-7F4A-BFAF-FF6F-80F2D54E7EA5}"/>
+                <a16:creationId xmlns:a16="http://schemas.microsoft.com/office/drawing/2014/main" id="{B0802F4F-AAA6-EFD9-D25B-CE073F894CD4}"/>
               </a:ext>
             </a:extLst>
           </p:cNvPr>
@@ -4419,7 +4421,7 @@
         </p:nvSpPr>
         <p:spPr>
           <a:xfrm>
-            <a:off x="1464536" y="1138361"/>
+            <a:off x="1509120" y="2133787"/>
             <a:ext cx="400595" cy="584775"/>
           </a:xfrm>
           <a:prstGeom prst="rect">
@@ -4438,9 +4440,9 @@
                 <a:solidFill>
                   <a:srgbClr val="09B0AC"/>
                 </a:solidFill>
-                <a:latin typeface="Lato Light" panose="020F0502020204030203" pitchFamily="34" charset="0"/>
+                <a:latin typeface="Times New Roman" panose="02020603050405020304" pitchFamily="18" charset="0"/>
                 <a:ea typeface="Lato Light" panose="020F0502020204030203" pitchFamily="34" charset="0"/>
-                <a:cs typeface="Lato Light" panose="020F0502020204030203" pitchFamily="34" charset="0"/>
+                <a:cs typeface="Times New Roman" panose="02020603050405020304" pitchFamily="18" charset="0"/>
               </a:rPr>
               <a:t>+</a:t>
             </a:r>
@@ -4448,19 +4450,19 @@
               <a:solidFill>
                 <a:srgbClr val="09B0AC"/>
               </a:solidFill>
-              <a:latin typeface="Lato Light" panose="020F0502020204030203" pitchFamily="34" charset="0"/>
+              <a:latin typeface="Times New Roman" panose="02020603050405020304" pitchFamily="18" charset="0"/>
               <a:ea typeface="Lato Light" panose="020F0502020204030203" pitchFamily="34" charset="0"/>
-              <a:cs typeface="Lato Light" panose="020F0502020204030203" pitchFamily="34" charset="0"/>
+              <a:cs typeface="Times New Roman" panose="02020603050405020304" pitchFamily="18" charset="0"/>
             </a:endParaRPr>
           </a:p>
         </p:txBody>
       </p:sp>
       <p:sp>
         <p:nvSpPr>
-          <p:cNvPr id="23" name="Left Bracket 22">
-            <a:extLst>
-              <a:ext uri="{FF2B5EF4-FFF2-40B4-BE49-F238E27FC236}">
-                <a16:creationId xmlns:a16="http://schemas.microsoft.com/office/drawing/2014/main" id="{A4A34787-DBC0-59F1-B401-96B698775CD5}"/>
+          <p:cNvPr id="30" name="Left Bracket 29">
+            <a:extLst>
+              <a:ext uri="{FF2B5EF4-FFF2-40B4-BE49-F238E27FC236}">
+                <a16:creationId xmlns:a16="http://schemas.microsoft.com/office/drawing/2014/main" id="{2A01EA83-5E15-75C7-DCE5-E45F048915A4}"/>
               </a:ext>
             </a:extLst>
           </p:cNvPr>
@@ -4468,16 +4470,595 @@
           <p:nvPr/>
         </p:nvSpPr>
         <p:spPr>
+          <a:xfrm rot="5400000" flipH="1">
+            <a:off x="2233489" y="2681566"/>
+            <a:ext cx="185708" cy="1180325"/>
+          </a:xfrm>
+          <a:custGeom>
+            <a:avLst/>
+            <a:gdLst>
+              <a:gd name="csX0" fmla="*/ 185708 w 185708"/>
+              <a:gd name="csY0" fmla="*/ 1180325 h 1180325"/>
+              <a:gd name="csX1" fmla="*/ 0 w 185708"/>
+              <a:gd name="csY1" fmla="*/ 590162 h 1180325"/>
+              <a:gd name="csX2" fmla="*/ 0 w 185708"/>
+              <a:gd name="csY2" fmla="*/ 590163 h 1180325"/>
+              <a:gd name="csX3" fmla="*/ 185708 w 185708"/>
+              <a:gd name="csY3" fmla="*/ 0 h 1180325"/>
+              <a:gd name="csX4" fmla="*/ 185708 w 185708"/>
+              <a:gd name="csY4" fmla="*/ 1180325 h 1180325"/>
+              <a:gd name="csX0" fmla="*/ 185708 w 185708"/>
+              <a:gd name="csY0" fmla="*/ 1180325 h 1180325"/>
+              <a:gd name="csX1" fmla="*/ 0 w 185708"/>
+              <a:gd name="csY1" fmla="*/ 590162 h 1180325"/>
+              <a:gd name="csX2" fmla="*/ 0 w 185708"/>
+              <a:gd name="csY2" fmla="*/ 590163 h 1180325"/>
+              <a:gd name="csX3" fmla="*/ 185708 w 185708"/>
+              <a:gd name="csY3" fmla="*/ 0 h 1180325"/>
+              <a:gd name="csX0" fmla="*/ 185708 w 185708"/>
+              <a:gd name="csY0" fmla="*/ 1180325 h 1180325"/>
+              <a:gd name="csX1" fmla="*/ 0 w 185708"/>
+              <a:gd name="csY1" fmla="*/ 590162 h 1180325"/>
+              <a:gd name="csX2" fmla="*/ 0 w 185708"/>
+              <a:gd name="csY2" fmla="*/ 590163 h 1180325"/>
+              <a:gd name="csX3" fmla="*/ 185708 w 185708"/>
+              <a:gd name="csY3" fmla="*/ 0 h 1180325"/>
+              <a:gd name="csX4" fmla="*/ 185708 w 185708"/>
+              <a:gd name="csY4" fmla="*/ 1180325 h 1180325"/>
+              <a:gd name="csX0" fmla="*/ 154286 w 185708"/>
+              <a:gd name="csY0" fmla="*/ 1180325 h 1180325"/>
+              <a:gd name="csX1" fmla="*/ 0 w 185708"/>
+              <a:gd name="csY1" fmla="*/ 590162 h 1180325"/>
+              <a:gd name="csX2" fmla="*/ 0 w 185708"/>
+              <a:gd name="csY2" fmla="*/ 590163 h 1180325"/>
+              <a:gd name="csX3" fmla="*/ 185708 w 185708"/>
+              <a:gd name="csY3" fmla="*/ 0 h 1180325"/>
+              <a:gd name="csX0" fmla="*/ 185708 w 185708"/>
+              <a:gd name="csY0" fmla="*/ 1180325 h 1180325"/>
+              <a:gd name="csX1" fmla="*/ 0 w 185708"/>
+              <a:gd name="csY1" fmla="*/ 590162 h 1180325"/>
+              <a:gd name="csX2" fmla="*/ 0 w 185708"/>
+              <a:gd name="csY2" fmla="*/ 590163 h 1180325"/>
+              <a:gd name="csX3" fmla="*/ 185708 w 185708"/>
+              <a:gd name="csY3" fmla="*/ 0 h 1180325"/>
+              <a:gd name="csX4" fmla="*/ 185708 w 185708"/>
+              <a:gd name="csY4" fmla="*/ 1180325 h 1180325"/>
+              <a:gd name="csX0" fmla="*/ 154286 w 185708"/>
+              <a:gd name="csY0" fmla="*/ 1180325 h 1180325"/>
+              <a:gd name="csX1" fmla="*/ 0 w 185708"/>
+              <a:gd name="csY1" fmla="*/ 590162 h 1180325"/>
+              <a:gd name="csX2" fmla="*/ 0 w 185708"/>
+              <a:gd name="csY2" fmla="*/ 590163 h 1180325"/>
+              <a:gd name="csX3" fmla="*/ 185708 w 185708"/>
+              <a:gd name="csY3" fmla="*/ 0 h 1180325"/>
+            </a:gdLst>
+            <a:ahLst/>
+            <a:cxnLst>
+              <a:cxn ang="0">
+                <a:pos x="csX0" y="csY0"/>
+              </a:cxn>
+              <a:cxn ang="0">
+                <a:pos x="csX1" y="csY1"/>
+              </a:cxn>
+              <a:cxn ang="0">
+                <a:pos x="csX2" y="csY2"/>
+              </a:cxn>
+              <a:cxn ang="0">
+                <a:pos x="csX3" y="csY3"/>
+              </a:cxn>
+            </a:cxnLst>
+            <a:rect l="l" t="t" r="r" b="b"/>
+            <a:pathLst>
+              <a:path w="185708" h="1180325" stroke="0" extrusionOk="0">
+                <a:moveTo>
+                  <a:pt x="185708" y="1180325"/>
+                </a:moveTo>
+                <a:cubicBezTo>
+                  <a:pt x="83144" y="1180325"/>
+                  <a:pt x="0" y="916100"/>
+                  <a:pt x="0" y="590162"/>
+                </a:cubicBezTo>
+                <a:lnTo>
+                  <a:pt x="0" y="590163"/>
+                </a:lnTo>
+                <a:cubicBezTo>
+                  <a:pt x="0" y="264225"/>
+                  <a:pt x="83144" y="0"/>
+                  <a:pt x="185708" y="0"/>
+                </a:cubicBezTo>
+                <a:lnTo>
+                  <a:pt x="185708" y="1180325"/>
+                </a:lnTo>
+                <a:close/>
+              </a:path>
+              <a:path w="185708" h="1180325" fill="none">
+                <a:moveTo>
+                  <a:pt x="154286" y="1180325"/>
+                </a:moveTo>
+                <a:cubicBezTo>
+                  <a:pt x="67433" y="1126906"/>
+                  <a:pt x="0" y="916100"/>
+                  <a:pt x="0" y="590162"/>
+                </a:cubicBezTo>
+                <a:lnTo>
+                  <a:pt x="0" y="590163"/>
+                </a:lnTo>
+                <a:cubicBezTo>
+                  <a:pt x="0" y="264225"/>
+                  <a:pt x="83144" y="0"/>
+                  <a:pt x="185708" y="0"/>
+                </a:cubicBezTo>
+              </a:path>
+            </a:pathLst>
+          </a:custGeom>
+          <a:ln w="38100">
+            <a:solidFill>
+              <a:srgbClr val="7D0112"/>
+            </a:solidFill>
+          </a:ln>
+          <a:effectLst/>
+        </p:spPr>
+        <p:style>
+          <a:lnRef idx="2">
+            <a:schemeClr val="accent1"/>
+          </a:lnRef>
+          <a:fillRef idx="0">
+            <a:schemeClr val="accent1"/>
+          </a:fillRef>
+          <a:effectRef idx="1">
+            <a:schemeClr val="accent1"/>
+          </a:effectRef>
+          <a:fontRef idx="minor">
+            <a:schemeClr val="tx1"/>
+          </a:fontRef>
+        </p:style>
+        <p:txBody>
+          <a:bodyPr rtlCol="0" anchor="ctr"/>
+          <a:lstStyle/>
+          <a:p>
+            <a:pPr algn="ctr"/>
+            <a:endParaRPr lang="en-NL" dirty="0"/>
+          </a:p>
+        </p:txBody>
+      </p:sp>
+      <p:sp>
+        <p:nvSpPr>
+          <p:cNvPr id="39" name="TextBox 38">
+            <a:extLst>
+              <a:ext uri="{FF2B5EF4-FFF2-40B4-BE49-F238E27FC236}">
+                <a16:creationId xmlns:a16="http://schemas.microsoft.com/office/drawing/2014/main" id="{4AE21BE3-D050-2C3C-F124-FD58DEB571A6}"/>
+              </a:ext>
+            </a:extLst>
+          </p:cNvPr>
+          <p:cNvSpPr txBox="1"/>
+          <p:nvPr/>
+        </p:nvSpPr>
+        <p:spPr>
           <a:xfrm>
-            <a:off x="398153" y="1411800"/>
-            <a:ext cx="283911" cy="975247"/>
-          </a:xfrm>
-          <a:prstGeom prst="leftBracket">
-            <a:avLst>
-              <a:gd name="adj" fmla="val 220331"/>
-            </a:avLst>
+            <a:off x="48421" y="1042047"/>
+            <a:ext cx="400595" cy="584775"/>
+          </a:xfrm>
+          <a:prstGeom prst="rect">
+            <a:avLst/>
           </a:prstGeom>
-          <a:ln>
+          <a:noFill/>
+        </p:spPr>
+        <p:txBody>
+          <a:bodyPr wrap="square" rtlCol="0">
+            <a:spAutoFit/>
+          </a:bodyPr>
+          <a:lstStyle/>
+          <a:p>
+            <a:r>
+              <a:rPr lang="en-US" sz="3200" dirty="0">
+                <a:solidFill>
+                  <a:srgbClr val="09B0AC"/>
+                </a:solidFill>
+                <a:latin typeface="Times New Roman" panose="02020603050405020304" pitchFamily="18" charset="0"/>
+                <a:ea typeface="Lato Light" panose="020F0502020204030203" pitchFamily="34" charset="0"/>
+                <a:cs typeface="Times New Roman" panose="02020603050405020304" pitchFamily="18" charset="0"/>
+              </a:rPr>
+              <a:t>+</a:t>
+            </a:r>
+            <a:endParaRPr lang="en-NL" sz="3200" dirty="0">
+              <a:solidFill>
+                <a:srgbClr val="09B0AC"/>
+              </a:solidFill>
+              <a:latin typeface="Times New Roman" panose="02020603050405020304" pitchFamily="18" charset="0"/>
+              <a:ea typeface="Lato Light" panose="020F0502020204030203" pitchFamily="34" charset="0"/>
+              <a:cs typeface="Times New Roman" panose="02020603050405020304" pitchFamily="18" charset="0"/>
+            </a:endParaRPr>
+          </a:p>
+        </p:txBody>
+      </p:sp>
+      <p:sp>
+        <p:nvSpPr>
+          <p:cNvPr id="41" name="TextBox 40">
+            <a:extLst>
+              <a:ext uri="{FF2B5EF4-FFF2-40B4-BE49-F238E27FC236}">
+                <a16:creationId xmlns:a16="http://schemas.microsoft.com/office/drawing/2014/main" id="{32F04F76-C2AB-3E0C-03F3-FCCBBA2D5152}"/>
+              </a:ext>
+            </a:extLst>
+          </p:cNvPr>
+          <p:cNvSpPr txBox="1"/>
+          <p:nvPr/>
+        </p:nvSpPr>
+        <p:spPr>
+          <a:xfrm>
+            <a:off x="1676709" y="653195"/>
+            <a:ext cx="465102" cy="584775"/>
+          </a:xfrm>
+          <a:prstGeom prst="rect">
+            <a:avLst/>
+          </a:prstGeom>
+          <a:noFill/>
+          <a:effectLst/>
+        </p:spPr>
+        <p:txBody>
+          <a:bodyPr wrap="square" rtlCol="0">
+            <a:spAutoFit/>
+          </a:bodyPr>
+          <a:lstStyle/>
+          <a:p>
+            <a:r>
+              <a:rPr lang="en-NL" b="1" dirty="0">
+                <a:solidFill>
+                  <a:srgbClr val="7D0112"/>
+                </a:solidFill>
+                <a:latin typeface="Times New Roman" panose="02020603050405020304" pitchFamily="18" charset="0"/>
+                <a:ea typeface="Lato" panose="020F0502020204030203" pitchFamily="34" charset="0"/>
+                <a:cs typeface="Times New Roman" panose="02020603050405020304" pitchFamily="18" charset="0"/>
+              </a:rPr>
+              <a:t>—</a:t>
+            </a:r>
+            <a:r>
+              <a:rPr lang="en-US" sz="3200" dirty="0">
+                <a:solidFill>
+                  <a:srgbClr val="7D0112"/>
+                </a:solidFill>
+                <a:latin typeface="Times New Roman" panose="02020603050405020304" pitchFamily="18" charset="0"/>
+                <a:ea typeface="Lato Light" panose="020F0502020204030203" pitchFamily="34" charset="0"/>
+                <a:cs typeface="Times New Roman" panose="02020603050405020304" pitchFamily="18" charset="0"/>
+              </a:rPr>
+              <a:t> </a:t>
+            </a:r>
+            <a:endParaRPr lang="en-NL" sz="3200" dirty="0">
+              <a:solidFill>
+                <a:srgbClr val="7D0112"/>
+              </a:solidFill>
+              <a:latin typeface="Times New Roman" panose="02020603050405020304" pitchFamily="18" charset="0"/>
+              <a:ea typeface="Lato Light" panose="020F0502020204030203" pitchFamily="34" charset="0"/>
+              <a:cs typeface="Times New Roman" panose="02020603050405020304" pitchFamily="18" charset="0"/>
+            </a:endParaRPr>
+          </a:p>
+        </p:txBody>
+      </p:sp>
+      <p:sp>
+        <p:nvSpPr>
+          <p:cNvPr id="46" name="TextBox 45">
+            <a:extLst>
+              <a:ext uri="{FF2B5EF4-FFF2-40B4-BE49-F238E27FC236}">
+                <a16:creationId xmlns:a16="http://schemas.microsoft.com/office/drawing/2014/main" id="{29E30D39-5DE4-7966-EE09-A29EF56CAEFC}"/>
+              </a:ext>
+            </a:extLst>
+          </p:cNvPr>
+          <p:cNvSpPr txBox="1"/>
+          <p:nvPr/>
+        </p:nvSpPr>
+        <p:spPr>
+          <a:xfrm>
+            <a:off x="942615" y="4322849"/>
+            <a:ext cx="400595" cy="584775"/>
+          </a:xfrm>
+          <a:prstGeom prst="rect">
+            <a:avLst/>
+          </a:prstGeom>
+          <a:noFill/>
+        </p:spPr>
+        <p:txBody>
+          <a:bodyPr wrap="square" rtlCol="0">
+            <a:spAutoFit/>
+          </a:bodyPr>
+          <a:lstStyle/>
+          <a:p>
+            <a:r>
+              <a:rPr lang="en-US" sz="3200" dirty="0">
+                <a:solidFill>
+                  <a:srgbClr val="09B0AC"/>
+                </a:solidFill>
+                <a:latin typeface="Times New Roman" panose="02020603050405020304" pitchFamily="18" charset="0"/>
+                <a:ea typeface="Lato Light" panose="020F0502020204030203" pitchFamily="34" charset="0"/>
+                <a:cs typeface="Times New Roman" panose="02020603050405020304" pitchFamily="18" charset="0"/>
+              </a:rPr>
+              <a:t>+</a:t>
+            </a:r>
+            <a:endParaRPr lang="en-NL" sz="3200" dirty="0">
+              <a:solidFill>
+                <a:srgbClr val="09B0AC"/>
+              </a:solidFill>
+              <a:latin typeface="Times New Roman" panose="02020603050405020304" pitchFamily="18" charset="0"/>
+              <a:ea typeface="Lato Light" panose="020F0502020204030203" pitchFamily="34" charset="0"/>
+              <a:cs typeface="Times New Roman" panose="02020603050405020304" pitchFamily="18" charset="0"/>
+            </a:endParaRPr>
+          </a:p>
+        </p:txBody>
+      </p:sp>
+      <p:sp>
+        <p:nvSpPr>
+          <p:cNvPr id="48" name="TextBox 47">
+            <a:extLst>
+              <a:ext uri="{FF2B5EF4-FFF2-40B4-BE49-F238E27FC236}">
+                <a16:creationId xmlns:a16="http://schemas.microsoft.com/office/drawing/2014/main" id="{B631A6A8-4C96-2EB9-FACB-85D686E245A3}"/>
+              </a:ext>
+            </a:extLst>
+          </p:cNvPr>
+          <p:cNvSpPr txBox="1"/>
+          <p:nvPr/>
+        </p:nvSpPr>
+        <p:spPr>
+          <a:xfrm>
+            <a:off x="2361668" y="823170"/>
+            <a:ext cx="465102" cy="369332"/>
+          </a:xfrm>
+          <a:prstGeom prst="rect">
+            <a:avLst/>
+          </a:prstGeom>
+          <a:noFill/>
+        </p:spPr>
+        <p:txBody>
+          <a:bodyPr wrap="square" rtlCol="0">
+            <a:spAutoFit/>
+          </a:bodyPr>
+          <a:lstStyle/>
+          <a:p>
+            <a:r>
+              <a:rPr lang="en-NL" b="1" dirty="0">
+                <a:solidFill>
+                  <a:srgbClr val="09B0AC"/>
+                </a:solidFill>
+                <a:latin typeface="Times New Roman" panose="02020603050405020304" pitchFamily="18" charset="0"/>
+                <a:ea typeface="Lato" panose="020F0502020204030203" pitchFamily="34" charset="0"/>
+                <a:cs typeface="Times New Roman" panose="02020603050405020304" pitchFamily="18" charset="0"/>
+              </a:rPr>
+              <a:t>—</a:t>
+            </a:r>
+            <a:r>
+              <a:rPr lang="en-US" b="1" dirty="0">
+                <a:solidFill>
+                  <a:srgbClr val="7D0112"/>
+                </a:solidFill>
+                <a:latin typeface="Times New Roman" panose="02020603050405020304" pitchFamily="18" charset="0"/>
+                <a:ea typeface="Lato Light" panose="020F0502020204030203" pitchFamily="34" charset="0"/>
+                <a:cs typeface="Times New Roman" panose="02020603050405020304" pitchFamily="18" charset="0"/>
+              </a:rPr>
+              <a:t> </a:t>
+            </a:r>
+            <a:endParaRPr lang="en-NL" b="1" dirty="0">
+              <a:solidFill>
+                <a:srgbClr val="7D0112"/>
+              </a:solidFill>
+              <a:latin typeface="Times New Roman" panose="02020603050405020304" pitchFamily="18" charset="0"/>
+              <a:ea typeface="Lato Light" panose="020F0502020204030203" pitchFamily="34" charset="0"/>
+              <a:cs typeface="Times New Roman" panose="02020603050405020304" pitchFamily="18" charset="0"/>
+            </a:endParaRPr>
+          </a:p>
+        </p:txBody>
+      </p:sp>
+      <p:sp>
+        <p:nvSpPr>
+          <p:cNvPr id="49" name="TextBox 48">
+            <a:extLst>
+              <a:ext uri="{FF2B5EF4-FFF2-40B4-BE49-F238E27FC236}">
+                <a16:creationId xmlns:a16="http://schemas.microsoft.com/office/drawing/2014/main" id="{D0BB1DBD-CBCA-F96C-71FE-BD901822B161}"/>
+              </a:ext>
+            </a:extLst>
+          </p:cNvPr>
+          <p:cNvSpPr txBox="1"/>
+          <p:nvPr/>
+        </p:nvSpPr>
+        <p:spPr>
+          <a:xfrm>
+            <a:off x="3158204" y="4395576"/>
+            <a:ext cx="465102" cy="369332"/>
+          </a:xfrm>
+          <a:prstGeom prst="rect">
+            <a:avLst/>
+          </a:prstGeom>
+          <a:noFill/>
+        </p:spPr>
+        <p:txBody>
+          <a:bodyPr wrap="square" rtlCol="0">
+            <a:spAutoFit/>
+          </a:bodyPr>
+          <a:lstStyle/>
+          <a:p>
+            <a:r>
+              <a:rPr lang="en-NL" b="1" dirty="0">
+                <a:solidFill>
+                  <a:srgbClr val="7D0112"/>
+                </a:solidFill>
+                <a:latin typeface="Times New Roman" panose="02020603050405020304" pitchFamily="18" charset="0"/>
+                <a:ea typeface="Lato" panose="020F0502020204030203" pitchFamily="34" charset="0"/>
+                <a:cs typeface="Times New Roman" panose="02020603050405020304" pitchFamily="18" charset="0"/>
+              </a:rPr>
+              <a:t>—</a:t>
+            </a:r>
+            <a:r>
+              <a:rPr lang="en-US" b="1" dirty="0">
+                <a:solidFill>
+                  <a:srgbClr val="7D0112"/>
+                </a:solidFill>
+                <a:latin typeface="Times New Roman" panose="02020603050405020304" pitchFamily="18" charset="0"/>
+                <a:ea typeface="Lato" panose="020F0502020204030203" pitchFamily="34" charset="0"/>
+                <a:cs typeface="Times New Roman" panose="02020603050405020304" pitchFamily="18" charset="0"/>
+              </a:rPr>
+              <a:t> </a:t>
+            </a:r>
+            <a:endParaRPr lang="en-NL" b="1" dirty="0">
+              <a:solidFill>
+                <a:srgbClr val="7D0112"/>
+              </a:solidFill>
+              <a:latin typeface="Times New Roman" panose="02020603050405020304" pitchFamily="18" charset="0"/>
+              <a:ea typeface="Lato" panose="020F0502020204030203" pitchFamily="34" charset="0"/>
+              <a:cs typeface="Times New Roman" panose="02020603050405020304" pitchFamily="18" charset="0"/>
+            </a:endParaRPr>
+          </a:p>
+        </p:txBody>
+      </p:sp>
+      <p:sp>
+        <p:nvSpPr>
+          <p:cNvPr id="50" name="TextBox 49">
+            <a:extLst>
+              <a:ext uri="{FF2B5EF4-FFF2-40B4-BE49-F238E27FC236}">
+                <a16:creationId xmlns:a16="http://schemas.microsoft.com/office/drawing/2014/main" id="{4A27592D-4F37-C7CD-5B9B-A8F81BE6C525}"/>
+              </a:ext>
+            </a:extLst>
+          </p:cNvPr>
+          <p:cNvSpPr txBox="1"/>
+          <p:nvPr/>
+        </p:nvSpPr>
+        <p:spPr>
+          <a:xfrm>
+            <a:off x="1821314" y="2880759"/>
+            <a:ext cx="465102" cy="369332"/>
+          </a:xfrm>
+          <a:prstGeom prst="rect">
+            <a:avLst/>
+          </a:prstGeom>
+          <a:noFill/>
+        </p:spPr>
+        <p:txBody>
+          <a:bodyPr wrap="square" rtlCol="0">
+            <a:spAutoFit/>
+          </a:bodyPr>
+          <a:lstStyle/>
+          <a:p>
+            <a:r>
+              <a:rPr lang="en-NL" b="1" dirty="0">
+                <a:solidFill>
+                  <a:srgbClr val="7D0112"/>
+                </a:solidFill>
+                <a:latin typeface="Times New Roman" panose="02020603050405020304" pitchFamily="18" charset="0"/>
+                <a:ea typeface="Lato" panose="020F0502020204030203" pitchFamily="34" charset="0"/>
+                <a:cs typeface="Times New Roman" panose="02020603050405020304" pitchFamily="18" charset="0"/>
+              </a:rPr>
+              <a:t>—</a:t>
+            </a:r>
+            <a:r>
+              <a:rPr lang="en-US" b="1" dirty="0">
+                <a:solidFill>
+                  <a:srgbClr val="7D0112"/>
+                </a:solidFill>
+                <a:latin typeface="Times New Roman" panose="02020603050405020304" pitchFamily="18" charset="0"/>
+                <a:ea typeface="Lato Light" panose="020F0502020204030203" pitchFamily="34" charset="0"/>
+                <a:cs typeface="Times New Roman" panose="02020603050405020304" pitchFamily="18" charset="0"/>
+              </a:rPr>
+              <a:t> </a:t>
+            </a:r>
+            <a:endParaRPr lang="en-NL" b="1" dirty="0">
+              <a:solidFill>
+                <a:srgbClr val="7D0112"/>
+              </a:solidFill>
+              <a:latin typeface="Times New Roman" panose="02020603050405020304" pitchFamily="18" charset="0"/>
+              <a:ea typeface="Lato Light" panose="020F0502020204030203" pitchFamily="34" charset="0"/>
+              <a:cs typeface="Times New Roman" panose="02020603050405020304" pitchFamily="18" charset="0"/>
+            </a:endParaRPr>
+          </a:p>
+        </p:txBody>
+      </p:sp>
+      <p:sp>
+        <p:nvSpPr>
+          <p:cNvPr id="86" name="Oval 85">
+            <a:extLst>
+              <a:ext uri="{FF2B5EF4-FFF2-40B4-BE49-F238E27FC236}">
+                <a16:creationId xmlns:a16="http://schemas.microsoft.com/office/drawing/2014/main" id="{A118B4BC-957D-F307-CB90-D593746D8C0E}"/>
+              </a:ext>
+            </a:extLst>
+          </p:cNvPr>
+          <p:cNvSpPr>
+            <a:spLocks noChangeAspect="1"/>
+          </p:cNvSpPr>
+          <p:nvPr/>
+        </p:nvSpPr>
+        <p:spPr>
+          <a:xfrm>
+            <a:off x="2790544" y="2319810"/>
+            <a:ext cx="1380565" cy="1380565"/>
+          </a:xfrm>
+          <a:prstGeom prst="ellipse">
+            <a:avLst/>
+          </a:prstGeom>
+          <a:solidFill>
+            <a:srgbClr val="7D0112"/>
+          </a:solidFill>
+          <a:ln w="19050">
+            <a:solidFill>
+              <a:srgbClr val="7D0112"/>
+            </a:solidFill>
+          </a:ln>
+          <a:effectLst/>
+        </p:spPr>
+        <p:style>
+          <a:lnRef idx="1">
+            <a:schemeClr val="accent1"/>
+          </a:lnRef>
+          <a:fillRef idx="3">
+            <a:schemeClr val="accent1"/>
+          </a:fillRef>
+          <a:effectRef idx="2">
+            <a:schemeClr val="accent1"/>
+          </a:effectRef>
+          <a:fontRef idx="minor">
+            <a:schemeClr val="lt1"/>
+          </a:fontRef>
+        </p:style>
+        <p:txBody>
+          <a:bodyPr wrap="none" lIns="0" tIns="0" rIns="0" bIns="0" rtlCol="0" anchor="ctr"/>
+          <a:lstStyle/>
+          <a:p>
+            <a:pPr algn="ctr"/>
+            <a:r>
+              <a:rPr lang="en-US" dirty="0">
+                <a:latin typeface="Lato" panose="020F0502020204030203" pitchFamily="34" charset="0"/>
+                <a:ea typeface="Lato" panose="020F0502020204030203" pitchFamily="34" charset="0"/>
+                <a:cs typeface="Lato" panose="020F0502020204030203" pitchFamily="34" charset="0"/>
+              </a:rPr>
+              <a:t>Exhaustion</a:t>
+            </a:r>
+            <a:endParaRPr lang="en-NL" dirty="0">
+              <a:latin typeface="Lato" panose="020F0502020204030203" pitchFamily="34" charset="0"/>
+              <a:ea typeface="Lato" panose="020F0502020204030203" pitchFamily="34" charset="0"/>
+              <a:cs typeface="Lato" panose="020F0502020204030203" pitchFamily="34" charset="0"/>
+            </a:endParaRPr>
+          </a:p>
+        </p:txBody>
+      </p:sp>
+      <p:sp>
+        <p:nvSpPr>
+          <p:cNvPr id="32" name="Oval 31">
+            <a:extLst>
+              <a:ext uri="{FF2B5EF4-FFF2-40B4-BE49-F238E27FC236}">
+                <a16:creationId xmlns:a16="http://schemas.microsoft.com/office/drawing/2014/main" id="{21BEF77C-2B18-F78D-86DE-56C268A54CE7}"/>
+              </a:ext>
+            </a:extLst>
+          </p:cNvPr>
+          <p:cNvSpPr>
+            <a:spLocks noChangeAspect="1"/>
+          </p:cNvSpPr>
+          <p:nvPr/>
+        </p:nvSpPr>
+        <p:spPr>
+          <a:xfrm>
+            <a:off x="307559" y="117482"/>
+            <a:ext cx="1380565" cy="1380565"/>
+          </a:xfrm>
+          <a:prstGeom prst="ellipse">
+            <a:avLst/>
+          </a:prstGeom>
+          <a:solidFill>
+            <a:srgbClr val="09B0AC"/>
+          </a:solidFill>
+          <a:ln w="19050">
             <a:solidFill>
               <a:srgbClr val="09B0AC"/>
             </a:solidFill>
@@ -4485,6 +5066,460 @@
           <a:effectLst/>
         </p:spPr>
         <p:style>
+          <a:lnRef idx="1">
+            <a:schemeClr val="accent1"/>
+          </a:lnRef>
+          <a:fillRef idx="3">
+            <a:schemeClr val="accent1"/>
+          </a:fillRef>
+          <a:effectRef idx="2">
+            <a:schemeClr val="accent1"/>
+          </a:effectRef>
+          <a:fontRef idx="minor">
+            <a:schemeClr val="lt1"/>
+          </a:fontRef>
+        </p:style>
+        <p:txBody>
+          <a:bodyPr wrap="none" lIns="0" tIns="0" rIns="0" bIns="0" rtlCol="0" anchor="ctr"/>
+          <a:lstStyle/>
+          <a:p>
+            <a:pPr algn="ctr"/>
+            <a:r>
+              <a:rPr lang="en-US" dirty="0">
+                <a:latin typeface="Lato" panose="020F0502020204030203" pitchFamily="34" charset="0"/>
+                <a:ea typeface="Lato" panose="020F0502020204030203" pitchFamily="34" charset="0"/>
+                <a:cs typeface="Lato" panose="020F0502020204030203" pitchFamily="34" charset="0"/>
+              </a:rPr>
+              <a:t>Job </a:t>
+            </a:r>
+            <a:br>
+              <a:rPr lang="en-US" dirty="0">
+                <a:latin typeface="Lato" panose="020F0502020204030203" pitchFamily="34" charset="0"/>
+                <a:ea typeface="Lato" panose="020F0502020204030203" pitchFamily="34" charset="0"/>
+                <a:cs typeface="Lato" panose="020F0502020204030203" pitchFamily="34" charset="0"/>
+              </a:rPr>
+            </a:br>
+            <a:r>
+              <a:rPr lang="en-US" dirty="0">
+                <a:latin typeface="Lato" panose="020F0502020204030203" pitchFamily="34" charset="0"/>
+                <a:ea typeface="Lato" panose="020F0502020204030203" pitchFamily="34" charset="0"/>
+                <a:cs typeface="Lato" panose="020F0502020204030203" pitchFamily="34" charset="0"/>
+              </a:rPr>
+              <a:t>Resources</a:t>
+            </a:r>
+            <a:endParaRPr lang="en-NL" dirty="0">
+              <a:latin typeface="Lato" panose="020F0502020204030203" pitchFamily="34" charset="0"/>
+              <a:ea typeface="Lato" panose="020F0502020204030203" pitchFamily="34" charset="0"/>
+              <a:cs typeface="Lato" panose="020F0502020204030203" pitchFamily="34" charset="0"/>
+            </a:endParaRPr>
+          </a:p>
+        </p:txBody>
+      </p:sp>
+      <p:sp>
+        <p:nvSpPr>
+          <p:cNvPr id="33" name="Oval 32">
+            <a:extLst>
+              <a:ext uri="{FF2B5EF4-FFF2-40B4-BE49-F238E27FC236}">
+                <a16:creationId xmlns:a16="http://schemas.microsoft.com/office/drawing/2014/main" id="{51B46A30-7E3C-EC23-855F-BA0592FE99D8}"/>
+              </a:ext>
+            </a:extLst>
+          </p:cNvPr>
+          <p:cNvSpPr>
+            <a:spLocks noChangeAspect="1"/>
+          </p:cNvSpPr>
+          <p:nvPr/>
+        </p:nvSpPr>
+        <p:spPr>
+          <a:xfrm>
+            <a:off x="307559" y="2319811"/>
+            <a:ext cx="1380565" cy="1380565"/>
+          </a:xfrm>
+          <a:prstGeom prst="ellipse">
+            <a:avLst/>
+          </a:prstGeom>
+          <a:solidFill>
+            <a:srgbClr val="09B0AC"/>
+          </a:solidFill>
+          <a:ln w="19050">
+            <a:solidFill>
+              <a:srgbClr val="09B0AC"/>
+            </a:solidFill>
+          </a:ln>
+          <a:effectLst/>
+        </p:spPr>
+        <p:style>
+          <a:lnRef idx="1">
+            <a:schemeClr val="accent1"/>
+          </a:lnRef>
+          <a:fillRef idx="3">
+            <a:schemeClr val="accent1"/>
+          </a:fillRef>
+          <a:effectRef idx="2">
+            <a:schemeClr val="accent1"/>
+          </a:effectRef>
+          <a:fontRef idx="minor">
+            <a:schemeClr val="lt1"/>
+          </a:fontRef>
+        </p:style>
+        <p:txBody>
+          <a:bodyPr wrap="none" lIns="0" tIns="0" rIns="0" bIns="0" rtlCol="0" anchor="ctr"/>
+          <a:lstStyle/>
+          <a:p>
+            <a:pPr algn="ctr"/>
+            <a:r>
+              <a:rPr lang="en-US" dirty="0">
+                <a:latin typeface="Lato" panose="020F0502020204030203" pitchFamily="34" charset="0"/>
+                <a:ea typeface="Lato" panose="020F0502020204030203" pitchFamily="34" charset="0"/>
+                <a:cs typeface="Lato" panose="020F0502020204030203" pitchFamily="34" charset="0"/>
+              </a:rPr>
+              <a:t>Work</a:t>
+            </a:r>
+            <a:br>
+              <a:rPr lang="en-US" dirty="0">
+                <a:latin typeface="Lato" panose="020F0502020204030203" pitchFamily="34" charset="0"/>
+                <a:ea typeface="Lato" panose="020F0502020204030203" pitchFamily="34" charset="0"/>
+                <a:cs typeface="Lato" panose="020F0502020204030203" pitchFamily="34" charset="0"/>
+              </a:rPr>
+            </a:br>
+            <a:r>
+              <a:rPr lang="en-US" dirty="0">
+                <a:latin typeface="Lato" panose="020F0502020204030203" pitchFamily="34" charset="0"/>
+                <a:ea typeface="Lato" panose="020F0502020204030203" pitchFamily="34" charset="0"/>
+                <a:cs typeface="Lato" panose="020F0502020204030203" pitchFamily="34" charset="0"/>
+              </a:rPr>
+              <a:t>Engagement</a:t>
+            </a:r>
+            <a:endParaRPr lang="en-NL" dirty="0">
+              <a:latin typeface="Lato" panose="020F0502020204030203" pitchFamily="34" charset="0"/>
+              <a:ea typeface="Lato" panose="020F0502020204030203" pitchFamily="34" charset="0"/>
+              <a:cs typeface="Lato" panose="020F0502020204030203" pitchFamily="34" charset="0"/>
+            </a:endParaRPr>
+          </a:p>
+        </p:txBody>
+      </p:sp>
+      <p:sp>
+        <p:nvSpPr>
+          <p:cNvPr id="31" name="Oval 30">
+            <a:extLst>
+              <a:ext uri="{FF2B5EF4-FFF2-40B4-BE49-F238E27FC236}">
+                <a16:creationId xmlns:a16="http://schemas.microsoft.com/office/drawing/2014/main" id="{06148423-EEE7-5FCF-72F8-ADFE4280F6D1}"/>
+              </a:ext>
+            </a:extLst>
+          </p:cNvPr>
+          <p:cNvSpPr>
+            <a:spLocks noChangeAspect="1"/>
+          </p:cNvSpPr>
+          <p:nvPr/>
+        </p:nvSpPr>
+        <p:spPr>
+          <a:xfrm>
+            <a:off x="1533116" y="4016076"/>
+            <a:ext cx="1380565" cy="1380565"/>
+          </a:xfrm>
+          <a:prstGeom prst="ellipse">
+            <a:avLst/>
+          </a:prstGeom>
+          <a:solidFill>
+            <a:srgbClr val="B4771A"/>
+          </a:solidFill>
+          <a:ln w="19050">
+            <a:solidFill>
+              <a:srgbClr val="B4771A"/>
+            </a:solidFill>
+          </a:ln>
+          <a:effectLst/>
+        </p:spPr>
+        <p:style>
+          <a:lnRef idx="1">
+            <a:schemeClr val="accent1"/>
+          </a:lnRef>
+          <a:fillRef idx="3">
+            <a:schemeClr val="accent1"/>
+          </a:fillRef>
+          <a:effectRef idx="2">
+            <a:schemeClr val="accent1"/>
+          </a:effectRef>
+          <a:fontRef idx="minor">
+            <a:schemeClr val="lt1"/>
+          </a:fontRef>
+        </p:style>
+        <p:txBody>
+          <a:bodyPr wrap="none" lIns="0" tIns="0" rIns="0" bIns="0" rtlCol="0" anchor="ctr"/>
+          <a:lstStyle/>
+          <a:p>
+            <a:pPr algn="ctr"/>
+            <a:r>
+              <a:rPr lang="en-US" sz="1700" dirty="0">
+                <a:latin typeface="Lato" panose="020F0502020204030203" pitchFamily="34" charset="0"/>
+                <a:ea typeface="Lato" panose="020F0502020204030203" pitchFamily="34" charset="0"/>
+                <a:cs typeface="Lato" panose="020F0502020204030203" pitchFamily="34" charset="0"/>
+              </a:rPr>
+              <a:t>Job </a:t>
+            </a:r>
+            <a:br>
+              <a:rPr lang="en-US" sz="1700" dirty="0">
+                <a:latin typeface="Lato" panose="020F0502020204030203" pitchFamily="34" charset="0"/>
+                <a:ea typeface="Lato" panose="020F0502020204030203" pitchFamily="34" charset="0"/>
+                <a:cs typeface="Lato" panose="020F0502020204030203" pitchFamily="34" charset="0"/>
+              </a:rPr>
+            </a:br>
+            <a:r>
+              <a:rPr lang="en-US" sz="1700" dirty="0">
+                <a:latin typeface="Lato" panose="020F0502020204030203" pitchFamily="34" charset="0"/>
+                <a:ea typeface="Lato" panose="020F0502020204030203" pitchFamily="34" charset="0"/>
+                <a:cs typeface="Lato" panose="020F0502020204030203" pitchFamily="34" charset="0"/>
+              </a:rPr>
+              <a:t>Performance</a:t>
+            </a:r>
+            <a:endParaRPr lang="en-NL" sz="1700" dirty="0">
+              <a:latin typeface="Lato" panose="020F0502020204030203" pitchFamily="34" charset="0"/>
+              <a:ea typeface="Lato" panose="020F0502020204030203" pitchFamily="34" charset="0"/>
+              <a:cs typeface="Lato" panose="020F0502020204030203" pitchFamily="34" charset="0"/>
+            </a:endParaRPr>
+          </a:p>
+        </p:txBody>
+      </p:sp>
+      <p:sp>
+        <p:nvSpPr>
+          <p:cNvPr id="85" name="Oval 84">
+            <a:extLst>
+              <a:ext uri="{FF2B5EF4-FFF2-40B4-BE49-F238E27FC236}">
+                <a16:creationId xmlns:a16="http://schemas.microsoft.com/office/drawing/2014/main" id="{25E88CBE-5D77-C892-1F48-0540D1E4C625}"/>
+              </a:ext>
+            </a:extLst>
+          </p:cNvPr>
+          <p:cNvSpPr>
+            <a:spLocks noChangeAspect="1"/>
+          </p:cNvSpPr>
+          <p:nvPr/>
+        </p:nvSpPr>
+        <p:spPr>
+          <a:xfrm>
+            <a:off x="2790544" y="117481"/>
+            <a:ext cx="1380565" cy="1380565"/>
+          </a:xfrm>
+          <a:prstGeom prst="ellipse">
+            <a:avLst/>
+          </a:prstGeom>
+          <a:solidFill>
+            <a:srgbClr val="7D0112"/>
+          </a:solidFill>
+          <a:ln w="19050">
+            <a:solidFill>
+              <a:srgbClr val="7D0112"/>
+            </a:solidFill>
+          </a:ln>
+          <a:effectLst/>
+        </p:spPr>
+        <p:style>
+          <a:lnRef idx="1">
+            <a:schemeClr val="accent1"/>
+          </a:lnRef>
+          <a:fillRef idx="3">
+            <a:schemeClr val="accent1"/>
+          </a:fillRef>
+          <a:effectRef idx="2">
+            <a:schemeClr val="accent1"/>
+          </a:effectRef>
+          <a:fontRef idx="minor">
+            <a:schemeClr val="lt1"/>
+          </a:fontRef>
+        </p:style>
+        <p:txBody>
+          <a:bodyPr wrap="none" lIns="0" tIns="0" rIns="0" bIns="0" rtlCol="0" anchor="ctr"/>
+          <a:lstStyle/>
+          <a:p>
+            <a:pPr algn="ctr"/>
+            <a:r>
+              <a:rPr lang="en-US" dirty="0">
+                <a:latin typeface="Lato" panose="020F0502020204030203" pitchFamily="34" charset="0"/>
+                <a:ea typeface="Lato" panose="020F0502020204030203" pitchFamily="34" charset="0"/>
+                <a:cs typeface="Lato" panose="020F0502020204030203" pitchFamily="34" charset="0"/>
+              </a:rPr>
+              <a:t>Job </a:t>
+            </a:r>
+            <a:br>
+              <a:rPr lang="en-US" dirty="0">
+                <a:latin typeface="Lato" panose="020F0502020204030203" pitchFamily="34" charset="0"/>
+                <a:ea typeface="Lato" panose="020F0502020204030203" pitchFamily="34" charset="0"/>
+                <a:cs typeface="Lato" panose="020F0502020204030203" pitchFamily="34" charset="0"/>
+              </a:rPr>
+            </a:br>
+            <a:r>
+              <a:rPr lang="en-US" dirty="0">
+                <a:latin typeface="Lato" panose="020F0502020204030203" pitchFamily="34" charset="0"/>
+                <a:ea typeface="Lato" panose="020F0502020204030203" pitchFamily="34" charset="0"/>
+                <a:cs typeface="Lato" panose="020F0502020204030203" pitchFamily="34" charset="0"/>
+              </a:rPr>
+              <a:t>Demands</a:t>
+            </a:r>
+            <a:endParaRPr lang="en-NL" dirty="0">
+              <a:latin typeface="Lato" panose="020F0502020204030203" pitchFamily="34" charset="0"/>
+              <a:ea typeface="Lato" panose="020F0502020204030203" pitchFamily="34" charset="0"/>
+              <a:cs typeface="Lato" panose="020F0502020204030203" pitchFamily="34" charset="0"/>
+            </a:endParaRPr>
+          </a:p>
+        </p:txBody>
+      </p:sp>
+      <p:grpSp>
+        <p:nvGrpSpPr>
+          <p:cNvPr id="22" name="Group 21">
+            <a:extLst>
+              <a:ext uri="{FF2B5EF4-FFF2-40B4-BE49-F238E27FC236}">
+                <a16:creationId xmlns:a16="http://schemas.microsoft.com/office/drawing/2014/main" id="{75A75EE7-4856-5412-0014-72EA83E98DC2}"/>
+              </a:ext>
+            </a:extLst>
+          </p:cNvPr>
+          <p:cNvGrpSpPr/>
+          <p:nvPr/>
+        </p:nvGrpSpPr>
+        <p:grpSpPr>
+          <a:xfrm rot="21132167">
+            <a:off x="391426" y="1420115"/>
+            <a:ext cx="296920" cy="1149278"/>
+            <a:chOff x="350330" y="1430389"/>
+            <a:chExt cx="296920" cy="1149278"/>
+          </a:xfrm>
+        </p:grpSpPr>
+        <p:sp>
+          <p:nvSpPr>
+            <p:cNvPr id="17" name="Left Bracket 16">
+              <a:extLst>
+                <a:ext uri="{FF2B5EF4-FFF2-40B4-BE49-F238E27FC236}">
+                  <a16:creationId xmlns:a16="http://schemas.microsoft.com/office/drawing/2014/main" id="{24B63393-5BB0-4CA8-EBEA-A21D067D1C74}"/>
+                </a:ext>
+              </a:extLst>
+            </p:cNvPr>
+            <p:cNvSpPr/>
+            <p:nvPr/>
+          </p:nvSpPr>
+          <p:spPr>
+            <a:xfrm rot="10748084" flipH="1" flipV="1">
+              <a:off x="350330" y="1503584"/>
+              <a:ext cx="226366" cy="1076083"/>
+            </a:xfrm>
+            <a:prstGeom prst="leftBracket">
+              <a:avLst>
+                <a:gd name="adj" fmla="val 237687"/>
+              </a:avLst>
+            </a:prstGeom>
+            <a:ln w="38100">
+              <a:solidFill>
+                <a:srgbClr val="09B0AC"/>
+              </a:solidFill>
+            </a:ln>
+            <a:effectLst/>
+          </p:spPr>
+          <p:style>
+            <a:lnRef idx="2">
+              <a:schemeClr val="accent1"/>
+            </a:lnRef>
+            <a:fillRef idx="0">
+              <a:schemeClr val="accent1"/>
+            </a:fillRef>
+            <a:effectRef idx="1">
+              <a:schemeClr val="accent1"/>
+            </a:effectRef>
+            <a:fontRef idx="minor">
+              <a:schemeClr val="tx1"/>
+            </a:fontRef>
+          </p:style>
+          <p:txBody>
+            <a:bodyPr rtlCol="0" anchor="ctr"/>
+            <a:lstStyle/>
+            <a:p>
+              <a:pPr algn="ctr"/>
+              <a:endParaRPr lang="en-NL" dirty="0"/>
+            </a:p>
+          </p:txBody>
+        </p:sp>
+        <p:sp>
+          <p:nvSpPr>
+            <p:cNvPr id="18" name="Isosceles Triangle 17">
+              <a:extLst>
+                <a:ext uri="{FF2B5EF4-FFF2-40B4-BE49-F238E27FC236}">
+                  <a16:creationId xmlns:a16="http://schemas.microsoft.com/office/drawing/2014/main" id="{1E1EF9F5-3FE7-7AC3-19F4-D1C78E3C2667}"/>
+                </a:ext>
+              </a:extLst>
+            </p:cNvPr>
+            <p:cNvSpPr>
+              <a:spLocks noChangeAspect="1"/>
+            </p:cNvSpPr>
+            <p:nvPr/>
+          </p:nvSpPr>
+          <p:spPr>
+            <a:xfrm rot="20933621" flipV="1">
+              <a:off x="439405" y="1430389"/>
+              <a:ext cx="207845" cy="187056"/>
+            </a:xfrm>
+            <a:prstGeom prst="triangle">
+              <a:avLst/>
+            </a:prstGeom>
+            <a:solidFill>
+              <a:srgbClr val="09B0AC"/>
+            </a:solidFill>
+            <a:ln>
+              <a:solidFill>
+                <a:srgbClr val="09B0AC"/>
+              </a:solidFill>
+            </a:ln>
+            <a:effectLst/>
+          </p:spPr>
+          <p:style>
+            <a:lnRef idx="1">
+              <a:schemeClr val="accent1"/>
+            </a:lnRef>
+            <a:fillRef idx="3">
+              <a:schemeClr val="accent1"/>
+            </a:fillRef>
+            <a:effectRef idx="2">
+              <a:schemeClr val="accent1"/>
+            </a:effectRef>
+            <a:fontRef idx="minor">
+              <a:schemeClr val="lt1"/>
+            </a:fontRef>
+          </p:style>
+          <p:txBody>
+            <a:bodyPr rtlCol="0" anchor="ctr"/>
+            <a:lstStyle/>
+            <a:p>
+              <a:pPr algn="ctr"/>
+              <a:endParaRPr lang="en-NL"/>
+            </a:p>
+          </p:txBody>
+        </p:sp>
+      </p:grpSp>
+      <p:sp>
+        <p:nvSpPr>
+          <p:cNvPr id="19" name="Left Bracket 18">
+            <a:extLst>
+              <a:ext uri="{FF2B5EF4-FFF2-40B4-BE49-F238E27FC236}">
+                <a16:creationId xmlns:a16="http://schemas.microsoft.com/office/drawing/2014/main" id="{F7B5ACB2-8E04-834F-8FA0-D3F2EEC024A9}"/>
+              </a:ext>
+            </a:extLst>
+          </p:cNvPr>
+          <p:cNvSpPr/>
+          <p:nvPr/>
+        </p:nvSpPr>
+        <p:spPr>
+          <a:xfrm rot="21012888" flipH="1">
+            <a:off x="1354117" y="1226393"/>
+            <a:ext cx="226366" cy="1076083"/>
+          </a:xfrm>
+          <a:prstGeom prst="leftBracket">
+            <a:avLst>
+              <a:gd name="adj" fmla="val 237687"/>
+            </a:avLst>
+          </a:prstGeom>
+          <a:noFill/>
+          <a:ln w="38100">
+            <a:solidFill>
+              <a:srgbClr val="09B0AC"/>
+            </a:solidFill>
+          </a:ln>
+          <a:effectLst/>
+        </p:spPr>
+        <p:style>
           <a:lnRef idx="2">
             <a:schemeClr val="accent1"/>
           </a:lnRef>
@@ -4503,390 +5538,28 @@
           <a:lstStyle/>
           <a:p>
             <a:pPr algn="ctr"/>
-            <a:endParaRPr lang="en-NL"/>
-          </a:p>
-        </p:txBody>
-      </p:sp>
-      <p:sp>
-        <p:nvSpPr>
-          <p:cNvPr id="24" name="Left Bracket 23">
-            <a:extLst>
-              <a:ext uri="{FF2B5EF4-FFF2-40B4-BE49-F238E27FC236}">
-                <a16:creationId xmlns:a16="http://schemas.microsoft.com/office/drawing/2014/main" id="{18EEE740-8318-A693-CA5D-4698C43E445C}"/>
-              </a:ext>
-            </a:extLst>
-          </p:cNvPr>
-          <p:cNvSpPr/>
-          <p:nvPr/>
-        </p:nvSpPr>
-        <p:spPr>
-          <a:xfrm flipH="1">
-            <a:off x="1380022" y="1442085"/>
-            <a:ext cx="226076" cy="1011400"/>
-          </a:xfrm>
-          <a:prstGeom prst="leftBracket">
-            <a:avLst>
-              <a:gd name="adj" fmla="val 220331"/>
-            </a:avLst>
-          </a:prstGeom>
-          <a:ln>
-            <a:solidFill>
-              <a:srgbClr val="09B0AC"/>
-            </a:solidFill>
-          </a:ln>
-          <a:effectLst/>
-        </p:spPr>
-        <p:style>
-          <a:lnRef idx="2">
-            <a:schemeClr val="accent1"/>
-          </a:lnRef>
-          <a:fillRef idx="0">
-            <a:schemeClr val="accent1"/>
-          </a:fillRef>
-          <a:effectRef idx="1">
-            <a:schemeClr val="accent1"/>
-          </a:effectRef>
-          <a:fontRef idx="minor">
-            <a:schemeClr val="tx1"/>
-          </a:fontRef>
-        </p:style>
-        <p:txBody>
-          <a:bodyPr rtlCol="0" anchor="ctr"/>
-          <a:lstStyle/>
-          <a:p>
-            <a:pPr algn="ctr"/>
-            <a:endParaRPr lang="en-NL"/>
-          </a:p>
-        </p:txBody>
-      </p:sp>
-      <p:sp>
-        <p:nvSpPr>
-          <p:cNvPr id="25" name="Left Bracket 24">
-            <a:extLst>
-              <a:ext uri="{FF2B5EF4-FFF2-40B4-BE49-F238E27FC236}">
-                <a16:creationId xmlns:a16="http://schemas.microsoft.com/office/drawing/2014/main" id="{079DC83A-E04C-5176-34D4-56D524DF9641}"/>
-              </a:ext>
-            </a:extLst>
-          </p:cNvPr>
-          <p:cNvSpPr/>
-          <p:nvPr/>
-        </p:nvSpPr>
-        <p:spPr>
-          <a:xfrm rot="19411434" flipH="1">
-            <a:off x="2132585" y="869438"/>
-            <a:ext cx="244078" cy="2272592"/>
-          </a:xfrm>
-          <a:prstGeom prst="leftBracket">
-            <a:avLst>
-              <a:gd name="adj" fmla="val 364580"/>
-            </a:avLst>
-          </a:prstGeom>
-          <a:ln>
-            <a:solidFill>
-              <a:srgbClr val="7D0112"/>
-            </a:solidFill>
-          </a:ln>
-          <a:effectLst/>
-        </p:spPr>
-        <p:style>
-          <a:lnRef idx="2">
-            <a:schemeClr val="accent1"/>
-          </a:lnRef>
-          <a:fillRef idx="0">
-            <a:schemeClr val="accent1"/>
-          </a:fillRef>
-          <a:effectRef idx="1">
-            <a:schemeClr val="accent1"/>
-          </a:effectRef>
-          <a:fontRef idx="minor">
-            <a:schemeClr val="tx1"/>
-          </a:fontRef>
-        </p:style>
-        <p:txBody>
-          <a:bodyPr rtlCol="0" anchor="ctr"/>
-          <a:lstStyle/>
-          <a:p>
-            <a:pPr algn="ctr"/>
-            <a:endParaRPr lang="en-NL"/>
-          </a:p>
-        </p:txBody>
-      </p:sp>
-      <p:sp>
-        <p:nvSpPr>
-          <p:cNvPr id="26" name="Left Bracket 25">
-            <a:extLst>
-              <a:ext uri="{FF2B5EF4-FFF2-40B4-BE49-F238E27FC236}">
-                <a16:creationId xmlns:a16="http://schemas.microsoft.com/office/drawing/2014/main" id="{D1629CCA-F76A-32A4-064D-904BBEC70BA0}"/>
-              </a:ext>
-            </a:extLst>
-          </p:cNvPr>
-          <p:cNvSpPr/>
-          <p:nvPr/>
-        </p:nvSpPr>
-        <p:spPr>
-          <a:xfrm>
-            <a:off x="2871773" y="1411800"/>
-            <a:ext cx="307491" cy="994197"/>
-          </a:xfrm>
-          <a:prstGeom prst="leftBracket">
-            <a:avLst>
-              <a:gd name="adj" fmla="val 220331"/>
-            </a:avLst>
-          </a:prstGeom>
-          <a:ln>
-            <a:solidFill>
-              <a:srgbClr val="7D0112"/>
-            </a:solidFill>
-          </a:ln>
-          <a:effectLst/>
-        </p:spPr>
-        <p:style>
-          <a:lnRef idx="2">
-            <a:schemeClr val="accent1"/>
-          </a:lnRef>
-          <a:fillRef idx="0">
-            <a:schemeClr val="accent1"/>
-          </a:fillRef>
-          <a:effectRef idx="1">
-            <a:schemeClr val="accent1"/>
-          </a:effectRef>
-          <a:fontRef idx="minor">
-            <a:schemeClr val="tx1"/>
-          </a:fontRef>
-        </p:style>
-        <p:txBody>
-          <a:bodyPr rtlCol="0" anchor="ctr"/>
-          <a:lstStyle/>
-          <a:p>
-            <a:pPr algn="ctr"/>
-            <a:endParaRPr lang="en-NL"/>
-          </a:p>
-        </p:txBody>
-      </p:sp>
-      <p:sp>
-        <p:nvSpPr>
-          <p:cNvPr id="27" name="Left Bracket 26">
-            <a:extLst>
-              <a:ext uri="{FF2B5EF4-FFF2-40B4-BE49-F238E27FC236}">
-                <a16:creationId xmlns:a16="http://schemas.microsoft.com/office/drawing/2014/main" id="{DF228722-4D4D-0452-5F98-8A52D14DDF51}"/>
-              </a:ext>
-            </a:extLst>
-          </p:cNvPr>
-          <p:cNvSpPr/>
-          <p:nvPr/>
-        </p:nvSpPr>
-        <p:spPr>
-          <a:xfrm flipH="1">
-            <a:off x="3805230" y="1430749"/>
-            <a:ext cx="268974" cy="975247"/>
-          </a:xfrm>
-          <a:prstGeom prst="leftBracket">
-            <a:avLst>
-              <a:gd name="adj" fmla="val 220331"/>
-            </a:avLst>
-          </a:prstGeom>
-          <a:ln>
-            <a:solidFill>
-              <a:srgbClr val="7D0112"/>
-            </a:solidFill>
-          </a:ln>
-          <a:effectLst/>
-        </p:spPr>
-        <p:style>
-          <a:lnRef idx="2">
-            <a:schemeClr val="accent1"/>
-          </a:lnRef>
-          <a:fillRef idx="0">
-            <a:schemeClr val="accent1"/>
-          </a:fillRef>
-          <a:effectRef idx="1">
-            <a:schemeClr val="accent1"/>
-          </a:effectRef>
-          <a:fontRef idx="minor">
-            <a:schemeClr val="tx1"/>
-          </a:fontRef>
-        </p:style>
-        <p:txBody>
-          <a:bodyPr rtlCol="0" anchor="ctr"/>
-          <a:lstStyle/>
-          <a:p>
-            <a:pPr algn="ctr"/>
-            <a:endParaRPr lang="en-NL"/>
-          </a:p>
-        </p:txBody>
-      </p:sp>
-      <p:sp>
-        <p:nvSpPr>
-          <p:cNvPr id="30" name="Left Bracket 29">
-            <a:extLst>
-              <a:ext uri="{FF2B5EF4-FFF2-40B4-BE49-F238E27FC236}">
-                <a16:creationId xmlns:a16="http://schemas.microsoft.com/office/drawing/2014/main" id="{DFC44DDE-982D-48CC-074E-FEDFDFC5A2DF}"/>
-              </a:ext>
-            </a:extLst>
-          </p:cNvPr>
-          <p:cNvSpPr/>
-          <p:nvPr/>
-        </p:nvSpPr>
-        <p:spPr>
-          <a:xfrm rot="5400000" flipH="1">
-            <a:off x="2233489" y="2681566"/>
-            <a:ext cx="185708" cy="1180325"/>
-          </a:xfrm>
-          <a:prstGeom prst="leftBracket">
-            <a:avLst>
-              <a:gd name="adj" fmla="val 317791"/>
-            </a:avLst>
-          </a:prstGeom>
-          <a:ln>
-            <a:solidFill>
-              <a:srgbClr val="7D0112"/>
-            </a:solidFill>
-          </a:ln>
-          <a:effectLst/>
-        </p:spPr>
-        <p:style>
-          <a:lnRef idx="2">
-            <a:schemeClr val="accent1"/>
-          </a:lnRef>
-          <a:fillRef idx="0">
-            <a:schemeClr val="accent1"/>
-          </a:fillRef>
-          <a:effectRef idx="1">
-            <a:schemeClr val="accent1"/>
-          </a:effectRef>
-          <a:fontRef idx="minor">
-            <a:schemeClr val="tx1"/>
-          </a:fontRef>
-        </p:style>
-        <p:txBody>
-          <a:bodyPr rtlCol="0" anchor="ctr"/>
-          <a:lstStyle/>
-          <a:p>
-            <a:pPr algn="ctr"/>
             <a:endParaRPr lang="en-NL" dirty="0"/>
           </a:p>
         </p:txBody>
       </p:sp>
       <p:sp>
         <p:nvSpPr>
-          <p:cNvPr id="35" name="Left Bracket 34">
-            <a:extLst>
-              <a:ext uri="{FF2B5EF4-FFF2-40B4-BE49-F238E27FC236}">
-                <a16:creationId xmlns:a16="http://schemas.microsoft.com/office/drawing/2014/main" id="{D4CCF95F-A719-ADB6-4F64-416EF486E55D}"/>
-              </a:ext>
-            </a:extLst>
-          </p:cNvPr>
-          <p:cNvSpPr/>
-          <p:nvPr/>
-        </p:nvSpPr>
-        <p:spPr>
-          <a:xfrm rot="19896630">
-            <a:off x="1083577" y="3639047"/>
-            <a:ext cx="322790" cy="975247"/>
-          </a:xfrm>
-          <a:prstGeom prst="leftBracket">
-            <a:avLst>
-              <a:gd name="adj" fmla="val 242773"/>
-            </a:avLst>
-          </a:prstGeom>
-          <a:ln>
-            <a:solidFill>
-              <a:srgbClr val="09B0AC"/>
-            </a:solidFill>
-          </a:ln>
-          <a:effectLst/>
-        </p:spPr>
-        <p:style>
-          <a:lnRef idx="2">
-            <a:schemeClr val="accent1"/>
-          </a:lnRef>
-          <a:fillRef idx="0">
-            <a:schemeClr val="accent1"/>
-          </a:fillRef>
-          <a:effectRef idx="1">
-            <a:schemeClr val="accent1"/>
-          </a:effectRef>
-          <a:fontRef idx="minor">
-            <a:schemeClr val="tx1"/>
-          </a:fontRef>
-        </p:style>
-        <p:txBody>
-          <a:bodyPr rtlCol="0" anchor="ctr"/>
-          <a:lstStyle/>
-          <a:p>
-            <a:pPr algn="ctr"/>
-            <a:endParaRPr lang="en-NL"/>
-          </a:p>
-        </p:txBody>
-      </p:sp>
-      <p:sp>
-        <p:nvSpPr>
-          <p:cNvPr id="38" name="Left Bracket 37">
-            <a:extLst>
-              <a:ext uri="{FF2B5EF4-FFF2-40B4-BE49-F238E27FC236}">
-                <a16:creationId xmlns:a16="http://schemas.microsoft.com/office/drawing/2014/main" id="{920A1FC4-45AA-1703-DEE5-B7367A7D1472}"/>
-              </a:ext>
-            </a:extLst>
-          </p:cNvPr>
-          <p:cNvSpPr/>
-          <p:nvPr/>
-        </p:nvSpPr>
-        <p:spPr>
-          <a:xfrm rot="2188566">
-            <a:off x="2110701" y="831733"/>
-            <a:ext cx="244078" cy="2254284"/>
-          </a:xfrm>
-          <a:prstGeom prst="leftBracket">
-            <a:avLst>
-              <a:gd name="adj" fmla="val 364580"/>
-            </a:avLst>
-          </a:prstGeom>
-          <a:ln>
-            <a:solidFill>
-              <a:srgbClr val="09B0AC"/>
-            </a:solidFill>
-          </a:ln>
-          <a:effectLst/>
-        </p:spPr>
-        <p:style>
-          <a:lnRef idx="2">
-            <a:schemeClr val="accent1"/>
-          </a:lnRef>
-          <a:fillRef idx="0">
-            <a:schemeClr val="accent1"/>
-          </a:fillRef>
-          <a:effectRef idx="1">
-            <a:schemeClr val="accent1"/>
-          </a:effectRef>
-          <a:fontRef idx="minor">
-            <a:schemeClr val="tx1"/>
-          </a:fontRef>
-        </p:style>
-        <p:txBody>
-          <a:bodyPr rtlCol="0" anchor="ctr"/>
-          <a:lstStyle/>
-          <a:p>
-            <a:pPr algn="ctr"/>
-            <a:endParaRPr lang="en-NL"/>
-          </a:p>
-        </p:txBody>
-      </p:sp>
-      <p:sp>
-        <p:nvSpPr>
-          <p:cNvPr id="7" name="Isosceles Triangle 6">
-            <a:extLst>
-              <a:ext uri="{FF2B5EF4-FFF2-40B4-BE49-F238E27FC236}">
-                <a16:creationId xmlns:a16="http://schemas.microsoft.com/office/drawing/2014/main" id="{F9D42AB0-81CA-469C-6F25-6C107BBB34CF}"/>
-              </a:ext>
-            </a:extLst>
-          </p:cNvPr>
-          <p:cNvSpPr/>
-          <p:nvPr/>
-        </p:nvSpPr>
-        <p:spPr>
-          <a:xfrm rot="18001017">
-            <a:off x="1326690" y="1377264"/>
-            <a:ext cx="149415" cy="134471"/>
+          <p:cNvPr id="20" name="Isosceles Triangle 19">
+            <a:extLst>
+              <a:ext uri="{FF2B5EF4-FFF2-40B4-BE49-F238E27FC236}">
+                <a16:creationId xmlns:a16="http://schemas.microsoft.com/office/drawing/2014/main" id="{E6D10A85-D3C8-85E3-FD97-1B63E9132FCF}"/>
+              </a:ext>
+            </a:extLst>
+          </p:cNvPr>
+          <p:cNvSpPr>
+            <a:spLocks noChangeAspect="1"/>
+          </p:cNvSpPr>
+          <p:nvPr/>
+        </p:nvSpPr>
+        <p:spPr>
+          <a:xfrm rot="13346289">
+            <a:off x="1340980" y="2265949"/>
+            <a:ext cx="207845" cy="187057"/>
           </a:xfrm>
           <a:prstGeom prst="triangle">
             <a:avLst/>
@@ -4926,10 +5599,10 @@
       </p:sp>
       <p:sp>
         <p:nvSpPr>
-          <p:cNvPr id="10" name="Isosceles Triangle 9">
-            <a:extLst>
-              <a:ext uri="{FF2B5EF4-FFF2-40B4-BE49-F238E27FC236}">
-                <a16:creationId xmlns:a16="http://schemas.microsoft.com/office/drawing/2014/main" id="{BEF19BBE-0C09-6531-5D0F-8F81B59828E8}"/>
+          <p:cNvPr id="42" name="Left Bracket 41">
+            <a:extLst>
+              <a:ext uri="{FF2B5EF4-FFF2-40B4-BE49-F238E27FC236}">
+                <a16:creationId xmlns:a16="http://schemas.microsoft.com/office/drawing/2014/main" id="{B0E9B29E-EDC2-C586-E667-4C36BDA71CF0}"/>
               </a:ext>
             </a:extLst>
           </p:cNvPr>
@@ -4937,35 +5610,35 @@
           <p:nvPr/>
         </p:nvSpPr>
         <p:spPr>
-          <a:xfrm rot="3111262">
-            <a:off x="2733948" y="1095749"/>
-            <a:ext cx="149415" cy="134471"/>
-          </a:xfrm>
-          <a:prstGeom prst="triangle">
-            <a:avLst/>
+          <a:xfrm rot="1464779" flipH="1">
+            <a:off x="3247326" y="3500690"/>
+            <a:ext cx="226366" cy="1076083"/>
+          </a:xfrm>
+          <a:prstGeom prst="leftBracket">
+            <a:avLst>
+              <a:gd name="adj" fmla="val 237687"/>
+            </a:avLst>
           </a:prstGeom>
-          <a:solidFill>
-            <a:srgbClr val="09B0AC"/>
-          </a:solidFill>
-          <a:ln>
+          <a:noFill/>
+          <a:ln w="38100">
             <a:solidFill>
-              <a:srgbClr val="09B0AC"/>
+              <a:srgbClr val="7D0112"/>
             </a:solidFill>
           </a:ln>
           <a:effectLst/>
         </p:spPr>
         <p:style>
-          <a:lnRef idx="1">
+          <a:lnRef idx="2">
             <a:schemeClr val="accent1"/>
           </a:lnRef>
-          <a:fillRef idx="3">
+          <a:fillRef idx="0">
             <a:schemeClr val="accent1"/>
           </a:fillRef>
-          <a:effectRef idx="2">
+          <a:effectRef idx="1">
             <a:schemeClr val="accent1"/>
           </a:effectRef>
           <a:fontRef idx="minor">
-            <a:schemeClr val="lt1"/>
+            <a:schemeClr val="tx1"/>
           </a:fontRef>
         </p:style>
         <p:txBody>
@@ -4973,26 +5646,28 @@
           <a:lstStyle/>
           <a:p>
             <a:pPr algn="ctr"/>
-            <a:endParaRPr lang="en-NL"/>
-          </a:p>
-        </p:txBody>
-      </p:sp>
-      <p:sp>
-        <p:nvSpPr>
-          <p:cNvPr id="11" name="Isosceles Triangle 10">
-            <a:extLst>
-              <a:ext uri="{FF2B5EF4-FFF2-40B4-BE49-F238E27FC236}">
-                <a16:creationId xmlns:a16="http://schemas.microsoft.com/office/drawing/2014/main" id="{9E989940-31AC-1265-F4DE-23F0F3E0E0B8}"/>
-              </a:ext>
-            </a:extLst>
-          </p:cNvPr>
-          <p:cNvSpPr/>
-          <p:nvPr/>
-        </p:nvSpPr>
-        <p:spPr>
-          <a:xfrm rot="18902611">
-            <a:off x="1651528" y="3129274"/>
-            <a:ext cx="149415" cy="134471"/>
+            <a:endParaRPr lang="en-NL" dirty="0"/>
+          </a:p>
+        </p:txBody>
+      </p:sp>
+      <p:sp>
+        <p:nvSpPr>
+          <p:cNvPr id="45" name="Isosceles Triangle 44">
+            <a:extLst>
+              <a:ext uri="{FF2B5EF4-FFF2-40B4-BE49-F238E27FC236}">
+                <a16:creationId xmlns:a16="http://schemas.microsoft.com/office/drawing/2014/main" id="{90251B77-E614-85EF-37FA-356704E79B50}"/>
+              </a:ext>
+            </a:extLst>
+          </p:cNvPr>
+          <p:cNvSpPr>
+            <a:spLocks noChangeAspect="1"/>
+          </p:cNvSpPr>
+          <p:nvPr/>
+        </p:nvSpPr>
+        <p:spPr>
+          <a:xfrm rot="15398180">
+            <a:off x="2903614" y="4424774"/>
+            <a:ext cx="207845" cy="187057"/>
           </a:xfrm>
           <a:prstGeom prst="triangle">
             <a:avLst/>
@@ -5032,31 +5707,31 @@
       </p:sp>
       <p:sp>
         <p:nvSpPr>
-          <p:cNvPr id="3" name="Isosceles Triangle 2">
-            <a:extLst>
-              <a:ext uri="{FF2B5EF4-FFF2-40B4-BE49-F238E27FC236}">
-                <a16:creationId xmlns:a16="http://schemas.microsoft.com/office/drawing/2014/main" id="{D799E0D9-4E59-6609-D71B-E4AAF657DC3B}"/>
-              </a:ext>
-            </a:extLst>
-          </p:cNvPr>
-          <p:cNvSpPr/>
-          <p:nvPr/>
-        </p:nvSpPr>
-        <p:spPr>
-          <a:xfrm rot="6705178">
-            <a:off x="543676" y="2295494"/>
-            <a:ext cx="149415" cy="134471"/>
+          <p:cNvPr id="47" name="Isosceles Triangle 46">
+            <a:extLst>
+              <a:ext uri="{FF2B5EF4-FFF2-40B4-BE49-F238E27FC236}">
+                <a16:creationId xmlns:a16="http://schemas.microsoft.com/office/drawing/2014/main" id="{34F5C35B-6A27-B180-129E-D42E91EC6ABE}"/>
+              </a:ext>
+            </a:extLst>
+          </p:cNvPr>
+          <p:cNvSpPr>
+            <a:spLocks noChangeAspect="1"/>
+          </p:cNvSpPr>
+          <p:nvPr/>
+        </p:nvSpPr>
+        <p:spPr>
+          <a:xfrm rot="18046731">
+            <a:off x="1654208" y="3146988"/>
+            <a:ext cx="207845" cy="187057"/>
           </a:xfrm>
           <a:prstGeom prst="triangle">
             <a:avLst/>
           </a:prstGeom>
           <a:solidFill>
-            <a:srgbClr val="09B0AC"/>
+            <a:srgbClr val="7D0112"/>
           </a:solidFill>
           <a:ln>
-            <a:solidFill>
-              <a:srgbClr val="09B0AC"/>
-            </a:solidFill>
+            <a:noFill/>
           </a:ln>
           <a:effectLst/>
         </p:spPr>
@@ -5083,22 +5758,460 @@
           </a:p>
         </p:txBody>
       </p:sp>
-      <p:sp>
-        <p:nvSpPr>
-          <p:cNvPr id="8" name="Isosceles Triangle 7">
-            <a:extLst>
-              <a:ext uri="{FF2B5EF4-FFF2-40B4-BE49-F238E27FC236}">
-                <a16:creationId xmlns:a16="http://schemas.microsoft.com/office/drawing/2014/main" id="{0561AFF8-F110-FB7B-A287-72075484219C}"/>
-              </a:ext>
-            </a:extLst>
-          </p:cNvPr>
-          <p:cNvSpPr/>
-          <p:nvPr/>
-        </p:nvSpPr>
-        <p:spPr>
-          <a:xfrm rot="17755380">
-            <a:off x="1580264" y="1124626"/>
-            <a:ext cx="149415" cy="134471"/>
+      <p:grpSp>
+        <p:nvGrpSpPr>
+          <p:cNvPr id="52" name="Group 51">
+            <a:extLst>
+              <a:ext uri="{FF2B5EF4-FFF2-40B4-BE49-F238E27FC236}">
+                <a16:creationId xmlns:a16="http://schemas.microsoft.com/office/drawing/2014/main" id="{50BE01DD-9911-82D1-14CA-DF2A5DBBB84D}"/>
+              </a:ext>
+            </a:extLst>
+          </p:cNvPr>
+          <p:cNvGrpSpPr/>
+          <p:nvPr/>
+        </p:nvGrpSpPr>
+        <p:grpSpPr>
+          <a:xfrm rot="20195890" flipH="1">
+            <a:off x="1021635" y="3446284"/>
+            <a:ext cx="340175" cy="1222279"/>
+            <a:chOff x="1255008" y="1204936"/>
+            <a:chExt cx="340175" cy="1222279"/>
+          </a:xfrm>
+        </p:grpSpPr>
+        <p:sp>
+          <p:nvSpPr>
+            <p:cNvPr id="53" name="Left Bracket 52">
+              <a:extLst>
+                <a:ext uri="{FF2B5EF4-FFF2-40B4-BE49-F238E27FC236}">
+                  <a16:creationId xmlns:a16="http://schemas.microsoft.com/office/drawing/2014/main" id="{BC13474C-609E-11DA-2713-1FEA5D4ACA46}"/>
+                </a:ext>
+              </a:extLst>
+            </p:cNvPr>
+            <p:cNvSpPr/>
+            <p:nvPr/>
+          </p:nvSpPr>
+          <p:spPr>
+            <a:xfrm rot="60669" flipH="1">
+              <a:off x="1368817" y="1204936"/>
+              <a:ext cx="226366" cy="1076083"/>
+            </a:xfrm>
+            <a:prstGeom prst="leftBracket">
+              <a:avLst>
+                <a:gd name="adj" fmla="val 237687"/>
+              </a:avLst>
+            </a:prstGeom>
+            <a:noFill/>
+            <a:ln w="38100">
+              <a:solidFill>
+                <a:srgbClr val="09B0AC"/>
+              </a:solidFill>
+            </a:ln>
+            <a:effectLst/>
+          </p:spPr>
+          <p:style>
+            <a:lnRef idx="2">
+              <a:schemeClr val="accent1"/>
+            </a:lnRef>
+            <a:fillRef idx="0">
+              <a:schemeClr val="accent1"/>
+            </a:fillRef>
+            <a:effectRef idx="1">
+              <a:schemeClr val="accent1"/>
+            </a:effectRef>
+            <a:fontRef idx="minor">
+              <a:schemeClr val="tx1"/>
+            </a:fontRef>
+          </p:style>
+          <p:txBody>
+            <a:bodyPr rtlCol="0" anchor="ctr"/>
+            <a:lstStyle/>
+            <a:p>
+              <a:pPr algn="ctr"/>
+              <a:endParaRPr lang="en-NL" dirty="0"/>
+            </a:p>
+          </p:txBody>
+        </p:sp>
+        <p:sp>
+          <p:nvSpPr>
+            <p:cNvPr id="54" name="Isosceles Triangle 53">
+              <a:extLst>
+                <a:ext uri="{FF2B5EF4-FFF2-40B4-BE49-F238E27FC236}">
+                  <a16:creationId xmlns:a16="http://schemas.microsoft.com/office/drawing/2014/main" id="{A7B79377-D2F9-4593-9FDC-34A85FBE1D40}"/>
+                </a:ext>
+              </a:extLst>
+            </p:cNvPr>
+            <p:cNvSpPr>
+              <a:spLocks noChangeAspect="1"/>
+            </p:cNvSpPr>
+            <p:nvPr/>
+          </p:nvSpPr>
+          <p:spPr>
+            <a:xfrm rot="13994070">
+              <a:off x="1244614" y="2229764"/>
+              <a:ext cx="207845" cy="187057"/>
+            </a:xfrm>
+            <a:prstGeom prst="triangle">
+              <a:avLst/>
+            </a:prstGeom>
+            <a:solidFill>
+              <a:srgbClr val="09B0AC"/>
+            </a:solidFill>
+            <a:ln>
+              <a:solidFill>
+                <a:srgbClr val="09B0AC"/>
+              </a:solidFill>
+            </a:ln>
+            <a:effectLst/>
+          </p:spPr>
+          <p:style>
+            <a:lnRef idx="1">
+              <a:schemeClr val="accent1"/>
+            </a:lnRef>
+            <a:fillRef idx="3">
+              <a:schemeClr val="accent1"/>
+            </a:fillRef>
+            <a:effectRef idx="2">
+              <a:schemeClr val="accent1"/>
+            </a:effectRef>
+            <a:fontRef idx="minor">
+              <a:schemeClr val="lt1"/>
+            </a:fontRef>
+          </p:style>
+          <p:txBody>
+            <a:bodyPr rtlCol="0" anchor="ctr"/>
+            <a:lstStyle/>
+            <a:p>
+              <a:pPr algn="ctr"/>
+              <a:endParaRPr lang="en-NL"/>
+            </a:p>
+          </p:txBody>
+        </p:sp>
+      </p:grpSp>
+      <p:grpSp>
+        <p:nvGrpSpPr>
+          <p:cNvPr id="59" name="Group 58">
+            <a:extLst>
+              <a:ext uri="{FF2B5EF4-FFF2-40B4-BE49-F238E27FC236}">
+                <a16:creationId xmlns:a16="http://schemas.microsoft.com/office/drawing/2014/main" id="{4D3EA220-A19B-5D13-EF74-338F5135AAC0}"/>
+              </a:ext>
+            </a:extLst>
+          </p:cNvPr>
+          <p:cNvGrpSpPr/>
+          <p:nvPr/>
+        </p:nvGrpSpPr>
+        <p:grpSpPr>
+          <a:xfrm>
+            <a:off x="1671950" y="1188421"/>
+            <a:ext cx="1213565" cy="1688298"/>
+            <a:chOff x="1671950" y="1188421"/>
+            <a:chExt cx="1213565" cy="1688298"/>
+          </a:xfrm>
+        </p:grpSpPr>
+        <p:sp>
+          <p:nvSpPr>
+            <p:cNvPr id="56" name="Isosceles Triangle 55">
+              <a:extLst>
+                <a:ext uri="{FF2B5EF4-FFF2-40B4-BE49-F238E27FC236}">
+                  <a16:creationId xmlns:a16="http://schemas.microsoft.com/office/drawing/2014/main" id="{CE0F9A78-8BA8-6361-9CF4-7D85D6C4FCCA}"/>
+                </a:ext>
+              </a:extLst>
+            </p:cNvPr>
+            <p:cNvSpPr>
+              <a:spLocks noChangeAspect="1"/>
+            </p:cNvSpPr>
+            <p:nvPr/>
+          </p:nvSpPr>
+          <p:spPr>
+            <a:xfrm rot="704710" flipV="1">
+              <a:off x="2677670" y="1188421"/>
+              <a:ext cx="207845" cy="187056"/>
+            </a:xfrm>
+            <a:prstGeom prst="triangle">
+              <a:avLst/>
+            </a:prstGeom>
+            <a:solidFill>
+              <a:srgbClr val="09B0AC"/>
+            </a:solidFill>
+            <a:ln>
+              <a:solidFill>
+                <a:srgbClr val="09B0AC"/>
+              </a:solidFill>
+            </a:ln>
+            <a:effectLst/>
+          </p:spPr>
+          <p:style>
+            <a:lnRef idx="1">
+              <a:schemeClr val="accent1"/>
+            </a:lnRef>
+            <a:fillRef idx="3">
+              <a:schemeClr val="accent1"/>
+            </a:fillRef>
+            <a:effectRef idx="2">
+              <a:schemeClr val="accent1"/>
+            </a:effectRef>
+            <a:fontRef idx="minor">
+              <a:schemeClr val="lt1"/>
+            </a:fontRef>
+          </p:style>
+          <p:txBody>
+            <a:bodyPr rtlCol="0" anchor="ctr"/>
+            <a:lstStyle/>
+            <a:p>
+              <a:pPr algn="ctr"/>
+              <a:endParaRPr lang="en-NL"/>
+            </a:p>
+          </p:txBody>
+        </p:sp>
+        <p:sp>
+          <p:nvSpPr>
+            <p:cNvPr id="58" name="Freeform: Shape 57">
+              <a:extLst>
+                <a:ext uri="{FF2B5EF4-FFF2-40B4-BE49-F238E27FC236}">
+                  <a16:creationId xmlns:a16="http://schemas.microsoft.com/office/drawing/2014/main" id="{E32F2242-F18F-1AC7-7B8B-D3B5C89F9946}"/>
+                </a:ext>
+              </a:extLst>
+            </p:cNvPr>
+            <p:cNvSpPr/>
+            <p:nvPr/>
+          </p:nvSpPr>
+          <p:spPr>
+            <a:xfrm>
+              <a:off x="1671950" y="1237970"/>
+              <a:ext cx="1113936" cy="1638749"/>
+            </a:xfrm>
+            <a:custGeom>
+              <a:avLst/>
+              <a:gdLst>
+                <a:gd name="csX0" fmla="*/ 1131320 w 1131320"/>
+                <a:gd name="csY0" fmla="*/ 0 h 1635303"/>
+                <a:gd name="csX1" fmla="*/ 654097 w 1131320"/>
+                <a:gd name="csY1" fmla="*/ 317037 h 1635303"/>
+                <a:gd name="csX2" fmla="*/ 400468 w 1131320"/>
+                <a:gd name="csY2" fmla="*/ 750876 h 1635303"/>
+                <a:gd name="csX3" fmla="*/ 243618 w 1131320"/>
+                <a:gd name="csY3" fmla="*/ 1244786 h 1635303"/>
+                <a:gd name="csX4" fmla="*/ 113466 w 1131320"/>
+                <a:gd name="csY4" fmla="*/ 1515101 h 1635303"/>
+                <a:gd name="csX5" fmla="*/ 0 w 1131320"/>
+                <a:gd name="csY5" fmla="*/ 1635241 h 1635303"/>
+                <a:gd name="csX0" fmla="*/ 1131320 w 1131320"/>
+                <a:gd name="csY0" fmla="*/ 0 h 1635303"/>
+                <a:gd name="csX1" fmla="*/ 723633 w 1131320"/>
+                <a:gd name="csY1" fmla="*/ 400480 h 1635303"/>
+                <a:gd name="csX2" fmla="*/ 400468 w 1131320"/>
+                <a:gd name="csY2" fmla="*/ 750876 h 1635303"/>
+                <a:gd name="csX3" fmla="*/ 243618 w 1131320"/>
+                <a:gd name="csY3" fmla="*/ 1244786 h 1635303"/>
+                <a:gd name="csX4" fmla="*/ 113466 w 1131320"/>
+                <a:gd name="csY4" fmla="*/ 1515101 h 1635303"/>
+                <a:gd name="csX5" fmla="*/ 0 w 1131320"/>
+                <a:gd name="csY5" fmla="*/ 1635241 h 1635303"/>
+                <a:gd name="csX0" fmla="*/ 1131320 w 1131320"/>
+                <a:gd name="csY0" fmla="*/ 0 h 1635303"/>
+                <a:gd name="csX1" fmla="*/ 723633 w 1131320"/>
+                <a:gd name="csY1" fmla="*/ 400480 h 1635303"/>
+                <a:gd name="csX2" fmla="*/ 466527 w 1131320"/>
+                <a:gd name="csY2" fmla="*/ 837796 h 1635303"/>
+                <a:gd name="csX3" fmla="*/ 243618 w 1131320"/>
+                <a:gd name="csY3" fmla="*/ 1244786 h 1635303"/>
+                <a:gd name="csX4" fmla="*/ 113466 w 1131320"/>
+                <a:gd name="csY4" fmla="*/ 1515101 h 1635303"/>
+                <a:gd name="csX5" fmla="*/ 0 w 1131320"/>
+                <a:gd name="csY5" fmla="*/ 1635241 h 1635303"/>
+                <a:gd name="csX0" fmla="*/ 1131320 w 1131320"/>
+                <a:gd name="csY0" fmla="*/ 0 h 1635303"/>
+                <a:gd name="csX1" fmla="*/ 723633 w 1131320"/>
+                <a:gd name="csY1" fmla="*/ 400480 h 1635303"/>
+                <a:gd name="csX2" fmla="*/ 466527 w 1131320"/>
+                <a:gd name="csY2" fmla="*/ 837796 h 1635303"/>
+                <a:gd name="csX3" fmla="*/ 299247 w 1131320"/>
+                <a:gd name="csY3" fmla="*/ 1269124 h 1635303"/>
+                <a:gd name="csX4" fmla="*/ 113466 w 1131320"/>
+                <a:gd name="csY4" fmla="*/ 1515101 h 1635303"/>
+                <a:gd name="csX5" fmla="*/ 0 w 1131320"/>
+                <a:gd name="csY5" fmla="*/ 1635241 h 1635303"/>
+                <a:gd name="csX0" fmla="*/ 1131320 w 1131320"/>
+                <a:gd name="csY0" fmla="*/ 0 h 1635303"/>
+                <a:gd name="csX1" fmla="*/ 723633 w 1131320"/>
+                <a:gd name="csY1" fmla="*/ 334421 h 1635303"/>
+                <a:gd name="csX2" fmla="*/ 466527 w 1131320"/>
+                <a:gd name="csY2" fmla="*/ 837796 h 1635303"/>
+                <a:gd name="csX3" fmla="*/ 299247 w 1131320"/>
+                <a:gd name="csY3" fmla="*/ 1269124 h 1635303"/>
+                <a:gd name="csX4" fmla="*/ 113466 w 1131320"/>
+                <a:gd name="csY4" fmla="*/ 1515101 h 1635303"/>
+                <a:gd name="csX5" fmla="*/ 0 w 1131320"/>
+                <a:gd name="csY5" fmla="*/ 1635241 h 1635303"/>
+                <a:gd name="csX0" fmla="*/ 1131320 w 1131320"/>
+                <a:gd name="csY0" fmla="*/ 0 h 1635303"/>
+                <a:gd name="csX1" fmla="*/ 723633 w 1131320"/>
+                <a:gd name="csY1" fmla="*/ 334421 h 1635303"/>
+                <a:gd name="csX2" fmla="*/ 501295 w 1131320"/>
+                <a:gd name="csY2" fmla="*/ 827365 h 1635303"/>
+                <a:gd name="csX3" fmla="*/ 299247 w 1131320"/>
+                <a:gd name="csY3" fmla="*/ 1269124 h 1635303"/>
+                <a:gd name="csX4" fmla="*/ 113466 w 1131320"/>
+                <a:gd name="csY4" fmla="*/ 1515101 h 1635303"/>
+                <a:gd name="csX5" fmla="*/ 0 w 1131320"/>
+                <a:gd name="csY5" fmla="*/ 1635241 h 1635303"/>
+                <a:gd name="csX0" fmla="*/ 1131320 w 1131320"/>
+                <a:gd name="csY0" fmla="*/ 0 h 1635291"/>
+                <a:gd name="csX1" fmla="*/ 723633 w 1131320"/>
+                <a:gd name="csY1" fmla="*/ 334421 h 1635291"/>
+                <a:gd name="csX2" fmla="*/ 501295 w 1131320"/>
+                <a:gd name="csY2" fmla="*/ 827365 h 1635291"/>
+                <a:gd name="csX3" fmla="*/ 299247 w 1131320"/>
+                <a:gd name="csY3" fmla="*/ 1269124 h 1635291"/>
+                <a:gd name="csX4" fmla="*/ 148234 w 1131320"/>
+                <a:gd name="csY4" fmla="*/ 1501194 h 1635291"/>
+                <a:gd name="csX5" fmla="*/ 0 w 1131320"/>
+                <a:gd name="csY5" fmla="*/ 1635241 h 1635291"/>
+                <a:gd name="csX0" fmla="*/ 1131320 w 1131320"/>
+                <a:gd name="csY0" fmla="*/ 0 h 1635291"/>
+                <a:gd name="csX1" fmla="*/ 751448 w 1131320"/>
+                <a:gd name="csY1" fmla="*/ 334421 h 1635291"/>
+                <a:gd name="csX2" fmla="*/ 501295 w 1131320"/>
+                <a:gd name="csY2" fmla="*/ 827365 h 1635291"/>
+                <a:gd name="csX3" fmla="*/ 299247 w 1131320"/>
+                <a:gd name="csY3" fmla="*/ 1269124 h 1635291"/>
+                <a:gd name="csX4" fmla="*/ 148234 w 1131320"/>
+                <a:gd name="csY4" fmla="*/ 1501194 h 1635291"/>
+                <a:gd name="csX5" fmla="*/ 0 w 1131320"/>
+                <a:gd name="csY5" fmla="*/ 1635241 h 1635291"/>
+                <a:gd name="csX0" fmla="*/ 1131320 w 1131320"/>
+                <a:gd name="csY0" fmla="*/ 0 h 1635272"/>
+                <a:gd name="csX1" fmla="*/ 751448 w 1131320"/>
+                <a:gd name="csY1" fmla="*/ 334421 h 1635272"/>
+                <a:gd name="csX2" fmla="*/ 501295 w 1131320"/>
+                <a:gd name="csY2" fmla="*/ 827365 h 1635272"/>
+                <a:gd name="csX3" fmla="*/ 299247 w 1131320"/>
+                <a:gd name="csY3" fmla="*/ 1269124 h 1635272"/>
+                <a:gd name="csX4" fmla="*/ 189955 w 1131320"/>
+                <a:gd name="csY4" fmla="*/ 1455996 h 1635272"/>
+                <a:gd name="csX5" fmla="*/ 0 w 1131320"/>
+                <a:gd name="csY5" fmla="*/ 1635241 h 1635272"/>
+                <a:gd name="csX0" fmla="*/ 1113936 w 1113936"/>
+                <a:gd name="csY0" fmla="*/ 0 h 1638749"/>
+                <a:gd name="csX1" fmla="*/ 751448 w 1113936"/>
+                <a:gd name="csY1" fmla="*/ 337898 h 1638749"/>
+                <a:gd name="csX2" fmla="*/ 501295 w 1113936"/>
+                <a:gd name="csY2" fmla="*/ 830842 h 1638749"/>
+                <a:gd name="csX3" fmla="*/ 299247 w 1113936"/>
+                <a:gd name="csY3" fmla="*/ 1272601 h 1638749"/>
+                <a:gd name="csX4" fmla="*/ 189955 w 1113936"/>
+                <a:gd name="csY4" fmla="*/ 1459473 h 1638749"/>
+                <a:gd name="csX5" fmla="*/ 0 w 1113936"/>
+                <a:gd name="csY5" fmla="*/ 1638718 h 1638749"/>
+              </a:gdLst>
+              <a:ahLst/>
+              <a:cxnLst>
+                <a:cxn ang="0">
+                  <a:pos x="csX0" y="csY0"/>
+                </a:cxn>
+                <a:cxn ang="0">
+                  <a:pos x="csX1" y="csY1"/>
+                </a:cxn>
+                <a:cxn ang="0">
+                  <a:pos x="csX2" y="csY2"/>
+                </a:cxn>
+                <a:cxn ang="0">
+                  <a:pos x="csX3" y="csY3"/>
+                </a:cxn>
+                <a:cxn ang="0">
+                  <a:pos x="csX4" y="csY4"/>
+                </a:cxn>
+                <a:cxn ang="0">
+                  <a:pos x="csX5" y="csY5"/>
+                </a:cxn>
+              </a:cxnLst>
+              <a:rect l="l" t="t" r="r" b="b"/>
+              <a:pathLst>
+                <a:path w="1113936" h="1638749">
+                  <a:moveTo>
+                    <a:pt x="1113936" y="0"/>
+                  </a:moveTo>
+                  <a:cubicBezTo>
+                    <a:pt x="936229" y="95945"/>
+                    <a:pt x="853555" y="199424"/>
+                    <a:pt x="751448" y="337898"/>
+                  </a:cubicBezTo>
+                  <a:cubicBezTo>
+                    <a:pt x="649341" y="476372"/>
+                    <a:pt x="576662" y="675058"/>
+                    <a:pt x="501295" y="830842"/>
+                  </a:cubicBezTo>
+                  <a:cubicBezTo>
+                    <a:pt x="425928" y="986626"/>
+                    <a:pt x="351137" y="1167829"/>
+                    <a:pt x="299247" y="1272601"/>
+                  </a:cubicBezTo>
+                  <a:cubicBezTo>
+                    <a:pt x="247357" y="1377373"/>
+                    <a:pt x="230558" y="1394397"/>
+                    <a:pt x="189955" y="1459473"/>
+                  </a:cubicBezTo>
+                  <a:cubicBezTo>
+                    <a:pt x="149352" y="1524549"/>
+                    <a:pt x="1112" y="1640943"/>
+                    <a:pt x="0" y="1638718"/>
+                  </a:cubicBezTo>
+                </a:path>
+              </a:pathLst>
+            </a:custGeom>
+            <a:noFill/>
+            <a:ln w="38100">
+              <a:solidFill>
+                <a:srgbClr val="09B0AC"/>
+              </a:solidFill>
+            </a:ln>
+            <a:effectLst/>
+          </p:spPr>
+          <p:style>
+            <a:lnRef idx="2">
+              <a:schemeClr val="accent1"/>
+            </a:lnRef>
+            <a:fillRef idx="0">
+              <a:schemeClr val="accent1"/>
+            </a:fillRef>
+            <a:effectRef idx="1">
+              <a:schemeClr val="accent1"/>
+            </a:effectRef>
+            <a:fontRef idx="minor">
+              <a:schemeClr val="tx1"/>
+            </a:fontRef>
+          </p:style>
+          <p:txBody>
+            <a:bodyPr rtlCol="0" anchor="ctr"/>
+            <a:lstStyle/>
+            <a:p>
+              <a:pPr algn="ctr"/>
+              <a:endParaRPr lang="en-NL">
+                <a:solidFill>
+                  <a:schemeClr val="tx1"/>
+                </a:solidFill>
+              </a:endParaRPr>
+            </a:p>
+          </p:txBody>
+        </p:sp>
+      </p:grpSp>
+      <p:sp>
+        <p:nvSpPr>
+          <p:cNvPr id="61" name="Isosceles Triangle 60">
+            <a:extLst>
+              <a:ext uri="{FF2B5EF4-FFF2-40B4-BE49-F238E27FC236}">
+                <a16:creationId xmlns:a16="http://schemas.microsoft.com/office/drawing/2014/main" id="{3C146F04-E086-DD79-CC51-D9173DC20799}"/>
+              </a:ext>
+            </a:extLst>
+          </p:cNvPr>
+          <p:cNvSpPr>
+            <a:spLocks noChangeAspect="1"/>
+          </p:cNvSpPr>
+          <p:nvPr/>
+        </p:nvSpPr>
+        <p:spPr>
+          <a:xfrm rot="20895290" flipH="1" flipV="1">
+            <a:off x="1595099" y="1181142"/>
+            <a:ext cx="207845" cy="187056"/>
           </a:xfrm>
           <a:prstGeom prst="triangle">
             <a:avLst/>
@@ -5138,10 +6251,10 @@
       </p:sp>
       <p:sp>
         <p:nvSpPr>
-          <p:cNvPr id="28" name="Isosceles Triangle 27">
-            <a:extLst>
-              <a:ext uri="{FF2B5EF4-FFF2-40B4-BE49-F238E27FC236}">
-                <a16:creationId xmlns:a16="http://schemas.microsoft.com/office/drawing/2014/main" id="{F3D56479-A609-7741-617F-CDCE28BFD520}"/>
+          <p:cNvPr id="62" name="Freeform: Shape 61">
+            <a:extLst>
+              <a:ext uri="{FF2B5EF4-FFF2-40B4-BE49-F238E27FC236}">
+                <a16:creationId xmlns:a16="http://schemas.microsoft.com/office/drawing/2014/main" id="{B6E994D4-B707-B5E2-2845-06564C9E104C}"/>
               </a:ext>
             </a:extLst>
           </p:cNvPr>
@@ -5149,9 +6262,394 @@
           <p:nvPr/>
         </p:nvSpPr>
         <p:spPr>
-          <a:xfrm rot="18226892">
-            <a:off x="3786001" y="1388479"/>
-            <a:ext cx="149415" cy="134471"/>
+          <a:xfrm flipH="1">
+            <a:off x="1694728" y="1230691"/>
+            <a:ext cx="1113936" cy="1638749"/>
+          </a:xfrm>
+          <a:custGeom>
+            <a:avLst/>
+            <a:gdLst>
+              <a:gd name="csX0" fmla="*/ 1131320 w 1131320"/>
+              <a:gd name="csY0" fmla="*/ 0 h 1635303"/>
+              <a:gd name="csX1" fmla="*/ 654097 w 1131320"/>
+              <a:gd name="csY1" fmla="*/ 317037 h 1635303"/>
+              <a:gd name="csX2" fmla="*/ 400468 w 1131320"/>
+              <a:gd name="csY2" fmla="*/ 750876 h 1635303"/>
+              <a:gd name="csX3" fmla="*/ 243618 w 1131320"/>
+              <a:gd name="csY3" fmla="*/ 1244786 h 1635303"/>
+              <a:gd name="csX4" fmla="*/ 113466 w 1131320"/>
+              <a:gd name="csY4" fmla="*/ 1515101 h 1635303"/>
+              <a:gd name="csX5" fmla="*/ 0 w 1131320"/>
+              <a:gd name="csY5" fmla="*/ 1635241 h 1635303"/>
+              <a:gd name="csX0" fmla="*/ 1131320 w 1131320"/>
+              <a:gd name="csY0" fmla="*/ 0 h 1635303"/>
+              <a:gd name="csX1" fmla="*/ 723633 w 1131320"/>
+              <a:gd name="csY1" fmla="*/ 400480 h 1635303"/>
+              <a:gd name="csX2" fmla="*/ 400468 w 1131320"/>
+              <a:gd name="csY2" fmla="*/ 750876 h 1635303"/>
+              <a:gd name="csX3" fmla="*/ 243618 w 1131320"/>
+              <a:gd name="csY3" fmla="*/ 1244786 h 1635303"/>
+              <a:gd name="csX4" fmla="*/ 113466 w 1131320"/>
+              <a:gd name="csY4" fmla="*/ 1515101 h 1635303"/>
+              <a:gd name="csX5" fmla="*/ 0 w 1131320"/>
+              <a:gd name="csY5" fmla="*/ 1635241 h 1635303"/>
+              <a:gd name="csX0" fmla="*/ 1131320 w 1131320"/>
+              <a:gd name="csY0" fmla="*/ 0 h 1635303"/>
+              <a:gd name="csX1" fmla="*/ 723633 w 1131320"/>
+              <a:gd name="csY1" fmla="*/ 400480 h 1635303"/>
+              <a:gd name="csX2" fmla="*/ 466527 w 1131320"/>
+              <a:gd name="csY2" fmla="*/ 837796 h 1635303"/>
+              <a:gd name="csX3" fmla="*/ 243618 w 1131320"/>
+              <a:gd name="csY3" fmla="*/ 1244786 h 1635303"/>
+              <a:gd name="csX4" fmla="*/ 113466 w 1131320"/>
+              <a:gd name="csY4" fmla="*/ 1515101 h 1635303"/>
+              <a:gd name="csX5" fmla="*/ 0 w 1131320"/>
+              <a:gd name="csY5" fmla="*/ 1635241 h 1635303"/>
+              <a:gd name="csX0" fmla="*/ 1131320 w 1131320"/>
+              <a:gd name="csY0" fmla="*/ 0 h 1635303"/>
+              <a:gd name="csX1" fmla="*/ 723633 w 1131320"/>
+              <a:gd name="csY1" fmla="*/ 400480 h 1635303"/>
+              <a:gd name="csX2" fmla="*/ 466527 w 1131320"/>
+              <a:gd name="csY2" fmla="*/ 837796 h 1635303"/>
+              <a:gd name="csX3" fmla="*/ 299247 w 1131320"/>
+              <a:gd name="csY3" fmla="*/ 1269124 h 1635303"/>
+              <a:gd name="csX4" fmla="*/ 113466 w 1131320"/>
+              <a:gd name="csY4" fmla="*/ 1515101 h 1635303"/>
+              <a:gd name="csX5" fmla="*/ 0 w 1131320"/>
+              <a:gd name="csY5" fmla="*/ 1635241 h 1635303"/>
+              <a:gd name="csX0" fmla="*/ 1131320 w 1131320"/>
+              <a:gd name="csY0" fmla="*/ 0 h 1635303"/>
+              <a:gd name="csX1" fmla="*/ 723633 w 1131320"/>
+              <a:gd name="csY1" fmla="*/ 334421 h 1635303"/>
+              <a:gd name="csX2" fmla="*/ 466527 w 1131320"/>
+              <a:gd name="csY2" fmla="*/ 837796 h 1635303"/>
+              <a:gd name="csX3" fmla="*/ 299247 w 1131320"/>
+              <a:gd name="csY3" fmla="*/ 1269124 h 1635303"/>
+              <a:gd name="csX4" fmla="*/ 113466 w 1131320"/>
+              <a:gd name="csY4" fmla="*/ 1515101 h 1635303"/>
+              <a:gd name="csX5" fmla="*/ 0 w 1131320"/>
+              <a:gd name="csY5" fmla="*/ 1635241 h 1635303"/>
+              <a:gd name="csX0" fmla="*/ 1131320 w 1131320"/>
+              <a:gd name="csY0" fmla="*/ 0 h 1635303"/>
+              <a:gd name="csX1" fmla="*/ 723633 w 1131320"/>
+              <a:gd name="csY1" fmla="*/ 334421 h 1635303"/>
+              <a:gd name="csX2" fmla="*/ 501295 w 1131320"/>
+              <a:gd name="csY2" fmla="*/ 827365 h 1635303"/>
+              <a:gd name="csX3" fmla="*/ 299247 w 1131320"/>
+              <a:gd name="csY3" fmla="*/ 1269124 h 1635303"/>
+              <a:gd name="csX4" fmla="*/ 113466 w 1131320"/>
+              <a:gd name="csY4" fmla="*/ 1515101 h 1635303"/>
+              <a:gd name="csX5" fmla="*/ 0 w 1131320"/>
+              <a:gd name="csY5" fmla="*/ 1635241 h 1635303"/>
+              <a:gd name="csX0" fmla="*/ 1131320 w 1131320"/>
+              <a:gd name="csY0" fmla="*/ 0 h 1635291"/>
+              <a:gd name="csX1" fmla="*/ 723633 w 1131320"/>
+              <a:gd name="csY1" fmla="*/ 334421 h 1635291"/>
+              <a:gd name="csX2" fmla="*/ 501295 w 1131320"/>
+              <a:gd name="csY2" fmla="*/ 827365 h 1635291"/>
+              <a:gd name="csX3" fmla="*/ 299247 w 1131320"/>
+              <a:gd name="csY3" fmla="*/ 1269124 h 1635291"/>
+              <a:gd name="csX4" fmla="*/ 148234 w 1131320"/>
+              <a:gd name="csY4" fmla="*/ 1501194 h 1635291"/>
+              <a:gd name="csX5" fmla="*/ 0 w 1131320"/>
+              <a:gd name="csY5" fmla="*/ 1635241 h 1635291"/>
+              <a:gd name="csX0" fmla="*/ 1131320 w 1131320"/>
+              <a:gd name="csY0" fmla="*/ 0 h 1635291"/>
+              <a:gd name="csX1" fmla="*/ 751448 w 1131320"/>
+              <a:gd name="csY1" fmla="*/ 334421 h 1635291"/>
+              <a:gd name="csX2" fmla="*/ 501295 w 1131320"/>
+              <a:gd name="csY2" fmla="*/ 827365 h 1635291"/>
+              <a:gd name="csX3" fmla="*/ 299247 w 1131320"/>
+              <a:gd name="csY3" fmla="*/ 1269124 h 1635291"/>
+              <a:gd name="csX4" fmla="*/ 148234 w 1131320"/>
+              <a:gd name="csY4" fmla="*/ 1501194 h 1635291"/>
+              <a:gd name="csX5" fmla="*/ 0 w 1131320"/>
+              <a:gd name="csY5" fmla="*/ 1635241 h 1635291"/>
+              <a:gd name="csX0" fmla="*/ 1131320 w 1131320"/>
+              <a:gd name="csY0" fmla="*/ 0 h 1635272"/>
+              <a:gd name="csX1" fmla="*/ 751448 w 1131320"/>
+              <a:gd name="csY1" fmla="*/ 334421 h 1635272"/>
+              <a:gd name="csX2" fmla="*/ 501295 w 1131320"/>
+              <a:gd name="csY2" fmla="*/ 827365 h 1635272"/>
+              <a:gd name="csX3" fmla="*/ 299247 w 1131320"/>
+              <a:gd name="csY3" fmla="*/ 1269124 h 1635272"/>
+              <a:gd name="csX4" fmla="*/ 189955 w 1131320"/>
+              <a:gd name="csY4" fmla="*/ 1455996 h 1635272"/>
+              <a:gd name="csX5" fmla="*/ 0 w 1131320"/>
+              <a:gd name="csY5" fmla="*/ 1635241 h 1635272"/>
+              <a:gd name="csX0" fmla="*/ 1113936 w 1113936"/>
+              <a:gd name="csY0" fmla="*/ 0 h 1638749"/>
+              <a:gd name="csX1" fmla="*/ 751448 w 1113936"/>
+              <a:gd name="csY1" fmla="*/ 337898 h 1638749"/>
+              <a:gd name="csX2" fmla="*/ 501295 w 1113936"/>
+              <a:gd name="csY2" fmla="*/ 830842 h 1638749"/>
+              <a:gd name="csX3" fmla="*/ 299247 w 1113936"/>
+              <a:gd name="csY3" fmla="*/ 1272601 h 1638749"/>
+              <a:gd name="csX4" fmla="*/ 189955 w 1113936"/>
+              <a:gd name="csY4" fmla="*/ 1459473 h 1638749"/>
+              <a:gd name="csX5" fmla="*/ 0 w 1113936"/>
+              <a:gd name="csY5" fmla="*/ 1638718 h 1638749"/>
+            </a:gdLst>
+            <a:ahLst/>
+            <a:cxnLst>
+              <a:cxn ang="0">
+                <a:pos x="csX0" y="csY0"/>
+              </a:cxn>
+              <a:cxn ang="0">
+                <a:pos x="csX1" y="csY1"/>
+              </a:cxn>
+              <a:cxn ang="0">
+                <a:pos x="csX2" y="csY2"/>
+              </a:cxn>
+              <a:cxn ang="0">
+                <a:pos x="csX3" y="csY3"/>
+              </a:cxn>
+              <a:cxn ang="0">
+                <a:pos x="csX4" y="csY4"/>
+              </a:cxn>
+              <a:cxn ang="0">
+                <a:pos x="csX5" y="csY5"/>
+              </a:cxn>
+            </a:cxnLst>
+            <a:rect l="l" t="t" r="r" b="b"/>
+            <a:pathLst>
+              <a:path w="1113936" h="1638749">
+                <a:moveTo>
+                  <a:pt x="1113936" y="0"/>
+                </a:moveTo>
+                <a:cubicBezTo>
+                  <a:pt x="936229" y="95945"/>
+                  <a:pt x="853555" y="199424"/>
+                  <a:pt x="751448" y="337898"/>
+                </a:cubicBezTo>
+                <a:cubicBezTo>
+                  <a:pt x="649341" y="476372"/>
+                  <a:pt x="576662" y="675058"/>
+                  <a:pt x="501295" y="830842"/>
+                </a:cubicBezTo>
+                <a:cubicBezTo>
+                  <a:pt x="425928" y="986626"/>
+                  <a:pt x="351137" y="1167829"/>
+                  <a:pt x="299247" y="1272601"/>
+                </a:cubicBezTo>
+                <a:cubicBezTo>
+                  <a:pt x="247357" y="1377373"/>
+                  <a:pt x="230558" y="1394397"/>
+                  <a:pt x="189955" y="1459473"/>
+                </a:cubicBezTo>
+                <a:cubicBezTo>
+                  <a:pt x="149352" y="1524549"/>
+                  <a:pt x="1112" y="1640943"/>
+                  <a:pt x="0" y="1638718"/>
+                </a:cubicBezTo>
+              </a:path>
+            </a:pathLst>
+          </a:custGeom>
+          <a:noFill/>
+          <a:ln w="38100">
+            <a:solidFill>
+              <a:srgbClr val="7D0112"/>
+            </a:solidFill>
+          </a:ln>
+          <a:effectLst/>
+        </p:spPr>
+        <p:style>
+          <a:lnRef idx="2">
+            <a:schemeClr val="accent1"/>
+          </a:lnRef>
+          <a:fillRef idx="0">
+            <a:schemeClr val="accent1"/>
+          </a:fillRef>
+          <a:effectRef idx="1">
+            <a:schemeClr val="accent1"/>
+          </a:effectRef>
+          <a:fontRef idx="minor">
+            <a:schemeClr val="tx1"/>
+          </a:fontRef>
+        </p:style>
+        <p:txBody>
+          <a:bodyPr rtlCol="0" anchor="ctr"/>
+          <a:lstStyle/>
+          <a:p>
+            <a:pPr algn="ctr"/>
+            <a:endParaRPr lang="en-NL">
+              <a:solidFill>
+                <a:schemeClr val="tx1"/>
+              </a:solidFill>
+            </a:endParaRPr>
+          </a:p>
+        </p:txBody>
+      </p:sp>
+      <p:sp>
+        <p:nvSpPr>
+          <p:cNvPr id="63" name="TextBox 62">
+            <a:extLst>
+              <a:ext uri="{FF2B5EF4-FFF2-40B4-BE49-F238E27FC236}">
+                <a16:creationId xmlns:a16="http://schemas.microsoft.com/office/drawing/2014/main" id="{9D4FC083-346B-F68E-4669-206378E988B3}"/>
+              </a:ext>
+            </a:extLst>
+          </p:cNvPr>
+          <p:cNvSpPr txBox="1"/>
+          <p:nvPr/>
+        </p:nvSpPr>
+        <p:spPr>
+          <a:xfrm>
+            <a:off x="3996274" y="2139169"/>
+            <a:ext cx="400595" cy="584775"/>
+          </a:xfrm>
+          <a:prstGeom prst="rect">
+            <a:avLst/>
+          </a:prstGeom>
+          <a:noFill/>
+        </p:spPr>
+        <p:txBody>
+          <a:bodyPr wrap="square" rtlCol="0">
+            <a:spAutoFit/>
+          </a:bodyPr>
+          <a:lstStyle/>
+          <a:p>
+            <a:r>
+              <a:rPr lang="en-US" sz="3200" dirty="0">
+                <a:solidFill>
+                  <a:srgbClr val="7D0112"/>
+                </a:solidFill>
+                <a:latin typeface="Times New Roman" panose="02020603050405020304" pitchFamily="18" charset="0"/>
+                <a:ea typeface="Lato Light" panose="020F0502020204030203" pitchFamily="34" charset="0"/>
+                <a:cs typeface="Times New Roman" panose="02020603050405020304" pitchFamily="18" charset="0"/>
+              </a:rPr>
+              <a:t>+</a:t>
+            </a:r>
+            <a:endParaRPr lang="en-NL" sz="3200" dirty="0">
+              <a:solidFill>
+                <a:srgbClr val="7D0112"/>
+              </a:solidFill>
+              <a:latin typeface="Times New Roman" panose="02020603050405020304" pitchFamily="18" charset="0"/>
+              <a:ea typeface="Lato Light" panose="020F0502020204030203" pitchFamily="34" charset="0"/>
+              <a:cs typeface="Times New Roman" panose="02020603050405020304" pitchFamily="18" charset="0"/>
+            </a:endParaRPr>
+          </a:p>
+        </p:txBody>
+      </p:sp>
+      <p:sp>
+        <p:nvSpPr>
+          <p:cNvPr id="64" name="TextBox 63">
+            <a:extLst>
+              <a:ext uri="{FF2B5EF4-FFF2-40B4-BE49-F238E27FC236}">
+                <a16:creationId xmlns:a16="http://schemas.microsoft.com/office/drawing/2014/main" id="{730B838C-F36D-D7DC-1888-E6AE8FA27AED}"/>
+              </a:ext>
+            </a:extLst>
+          </p:cNvPr>
+          <p:cNvSpPr txBox="1"/>
+          <p:nvPr/>
+        </p:nvSpPr>
+        <p:spPr>
+          <a:xfrm>
+            <a:off x="2483908" y="1291076"/>
+            <a:ext cx="400595" cy="584775"/>
+          </a:xfrm>
+          <a:prstGeom prst="rect">
+            <a:avLst/>
+          </a:prstGeom>
+          <a:noFill/>
+        </p:spPr>
+        <p:txBody>
+          <a:bodyPr wrap="square" rtlCol="0">
+            <a:spAutoFit/>
+          </a:bodyPr>
+          <a:lstStyle/>
+          <a:p>
+            <a:r>
+              <a:rPr lang="en-US" sz="3200" dirty="0">
+                <a:solidFill>
+                  <a:srgbClr val="7D0112"/>
+                </a:solidFill>
+                <a:latin typeface="Times New Roman" panose="02020603050405020304" pitchFamily="18" charset="0"/>
+                <a:ea typeface="Lato Light" panose="020F0502020204030203" pitchFamily="34" charset="0"/>
+                <a:cs typeface="Times New Roman" panose="02020603050405020304" pitchFamily="18" charset="0"/>
+              </a:rPr>
+              <a:t>+</a:t>
+            </a:r>
+            <a:endParaRPr lang="en-NL" sz="3200" dirty="0">
+              <a:solidFill>
+                <a:srgbClr val="7D0112"/>
+              </a:solidFill>
+              <a:latin typeface="Times New Roman" panose="02020603050405020304" pitchFamily="18" charset="0"/>
+              <a:ea typeface="Lato Light" panose="020F0502020204030203" pitchFamily="34" charset="0"/>
+              <a:cs typeface="Times New Roman" panose="02020603050405020304" pitchFamily="18" charset="0"/>
+            </a:endParaRPr>
+          </a:p>
+        </p:txBody>
+      </p:sp>
+      <p:sp>
+        <p:nvSpPr>
+          <p:cNvPr id="66" name="Left Bracket 65">
+            <a:extLst>
+              <a:ext uri="{FF2B5EF4-FFF2-40B4-BE49-F238E27FC236}">
+                <a16:creationId xmlns:a16="http://schemas.microsoft.com/office/drawing/2014/main" id="{94B230E1-E9E0-C4EC-8A3E-20CC5C4DF0E6}"/>
+              </a:ext>
+            </a:extLst>
+          </p:cNvPr>
+          <p:cNvSpPr/>
+          <p:nvPr/>
+        </p:nvSpPr>
+        <p:spPr>
+          <a:xfrm rot="10280251" flipH="1" flipV="1">
+            <a:off x="2883871" y="1503140"/>
+            <a:ext cx="226366" cy="1076083"/>
+          </a:xfrm>
+          <a:prstGeom prst="leftBracket">
+            <a:avLst>
+              <a:gd name="adj" fmla="val 237687"/>
+            </a:avLst>
+          </a:prstGeom>
+          <a:ln w="38100">
+            <a:solidFill>
+              <a:srgbClr val="7D0112"/>
+            </a:solidFill>
+          </a:ln>
+          <a:effectLst/>
+        </p:spPr>
+        <p:style>
+          <a:lnRef idx="2">
+            <a:schemeClr val="accent1"/>
+          </a:lnRef>
+          <a:fillRef idx="0">
+            <a:schemeClr val="accent1"/>
+          </a:fillRef>
+          <a:effectRef idx="1">
+            <a:schemeClr val="accent1"/>
+          </a:effectRef>
+          <a:fontRef idx="minor">
+            <a:schemeClr val="tx1"/>
+          </a:fontRef>
+        </p:style>
+        <p:txBody>
+          <a:bodyPr rtlCol="0" anchor="ctr"/>
+          <a:lstStyle/>
+          <a:p>
+            <a:pPr algn="ctr"/>
+            <a:endParaRPr lang="en-NL" dirty="0"/>
+          </a:p>
+        </p:txBody>
+      </p:sp>
+      <p:sp>
+        <p:nvSpPr>
+          <p:cNvPr id="67" name="Isosceles Triangle 66">
+            <a:extLst>
+              <a:ext uri="{FF2B5EF4-FFF2-40B4-BE49-F238E27FC236}">
+                <a16:creationId xmlns:a16="http://schemas.microsoft.com/office/drawing/2014/main" id="{63B71423-AF08-5458-75DF-5D212A98A1B8}"/>
+              </a:ext>
+            </a:extLst>
+          </p:cNvPr>
+          <p:cNvSpPr>
+            <a:spLocks noChangeAspect="1"/>
+          </p:cNvSpPr>
+          <p:nvPr/>
+        </p:nvSpPr>
+        <p:spPr>
+          <a:xfrm rot="20465788" flipV="1">
+            <a:off x="2901972" y="1423903"/>
+            <a:ext cx="207845" cy="187056"/>
           </a:xfrm>
           <a:prstGeom prst="triangle">
             <a:avLst/>
@@ -5191,10 +6689,10 @@
       </p:sp>
       <p:sp>
         <p:nvSpPr>
-          <p:cNvPr id="29" name="Isosceles Triangle 28">
-            <a:extLst>
-              <a:ext uri="{FF2B5EF4-FFF2-40B4-BE49-F238E27FC236}">
-                <a16:creationId xmlns:a16="http://schemas.microsoft.com/office/drawing/2014/main" id="{0C158919-5676-0186-C027-D547F055F72D}"/>
+          <p:cNvPr id="68" name="Left Bracket 67">
+            <a:extLst>
+              <a:ext uri="{FF2B5EF4-FFF2-40B4-BE49-F238E27FC236}">
+                <a16:creationId xmlns:a16="http://schemas.microsoft.com/office/drawing/2014/main" id="{9BB352A7-58B0-9F1C-0C4A-32BC50CF5ACC}"/>
               </a:ext>
             </a:extLst>
           </p:cNvPr>
@@ -5202,9 +6700,64 @@
           <p:nvPr/>
         </p:nvSpPr>
         <p:spPr>
-          <a:xfrm rot="6965398">
-            <a:off x="3003282" y="2308160"/>
-            <a:ext cx="149415" cy="134471"/>
+          <a:xfrm rot="21012888" flipH="1">
+            <a:off x="3841271" y="1231775"/>
+            <a:ext cx="226366" cy="1076083"/>
+          </a:xfrm>
+          <a:prstGeom prst="leftBracket">
+            <a:avLst>
+              <a:gd name="adj" fmla="val 237687"/>
+            </a:avLst>
+          </a:prstGeom>
+          <a:noFill/>
+          <a:ln w="38100">
+            <a:solidFill>
+              <a:srgbClr val="7D0112"/>
+            </a:solidFill>
+          </a:ln>
+          <a:effectLst/>
+        </p:spPr>
+        <p:style>
+          <a:lnRef idx="2">
+            <a:schemeClr val="accent1"/>
+          </a:lnRef>
+          <a:fillRef idx="0">
+            <a:schemeClr val="accent1"/>
+          </a:fillRef>
+          <a:effectRef idx="1">
+            <a:schemeClr val="accent1"/>
+          </a:effectRef>
+          <a:fontRef idx="minor">
+            <a:schemeClr val="tx1"/>
+          </a:fontRef>
+        </p:style>
+        <p:txBody>
+          <a:bodyPr rtlCol="0" anchor="ctr"/>
+          <a:lstStyle/>
+          <a:p>
+            <a:pPr algn="ctr"/>
+            <a:endParaRPr lang="en-NL" dirty="0"/>
+          </a:p>
+        </p:txBody>
+      </p:sp>
+      <p:sp>
+        <p:nvSpPr>
+          <p:cNvPr id="69" name="Isosceles Triangle 68">
+            <a:extLst>
+              <a:ext uri="{FF2B5EF4-FFF2-40B4-BE49-F238E27FC236}">
+                <a16:creationId xmlns:a16="http://schemas.microsoft.com/office/drawing/2014/main" id="{4EFFED38-D982-E730-242D-A91E458A9579}"/>
+              </a:ext>
+            </a:extLst>
+          </p:cNvPr>
+          <p:cNvSpPr>
+            <a:spLocks noChangeAspect="1"/>
+          </p:cNvSpPr>
+          <p:nvPr/>
+        </p:nvSpPr>
+        <p:spPr>
+          <a:xfrm rot="13346289">
+            <a:off x="3828134" y="2271331"/>
+            <a:ext cx="207845" cy="187057"/>
           </a:xfrm>
           <a:prstGeom prst="triangle">
             <a:avLst/>
@@ -5242,993 +6795,10 @@
           </a:p>
         </p:txBody>
       </p:sp>
-      <p:sp>
-        <p:nvSpPr>
-          <p:cNvPr id="34" name="Isosceles Triangle 33">
-            <a:extLst>
-              <a:ext uri="{FF2B5EF4-FFF2-40B4-BE49-F238E27FC236}">
-                <a16:creationId xmlns:a16="http://schemas.microsoft.com/office/drawing/2014/main" id="{20C1D9DF-6F68-17EE-0916-3F53A50A9FE5}"/>
-              </a:ext>
-            </a:extLst>
-          </p:cNvPr>
-          <p:cNvSpPr/>
-          <p:nvPr/>
-        </p:nvSpPr>
-        <p:spPr>
-          <a:xfrm rot="5718717">
-            <a:off x="1415485" y="4430925"/>
-            <a:ext cx="149415" cy="134471"/>
-          </a:xfrm>
-          <a:prstGeom prst="triangle">
-            <a:avLst/>
-          </a:prstGeom>
-          <a:solidFill>
-            <a:srgbClr val="09B0AC"/>
-          </a:solidFill>
-          <a:ln>
-            <a:solidFill>
-              <a:srgbClr val="09B0AC"/>
-            </a:solidFill>
-          </a:ln>
-          <a:effectLst/>
-        </p:spPr>
-        <p:style>
-          <a:lnRef idx="1">
-            <a:schemeClr val="accent1"/>
-          </a:lnRef>
-          <a:fillRef idx="3">
-            <a:schemeClr val="accent1"/>
-          </a:fillRef>
-          <a:effectRef idx="2">
-            <a:schemeClr val="accent1"/>
-          </a:effectRef>
-          <a:fontRef idx="minor">
-            <a:schemeClr val="lt1"/>
-          </a:fontRef>
-        </p:style>
-        <p:txBody>
-          <a:bodyPr rtlCol="0" anchor="ctr"/>
-          <a:lstStyle/>
-          <a:p>
-            <a:pPr algn="ctr"/>
-            <a:endParaRPr lang="en-NL"/>
-          </a:p>
-        </p:txBody>
-      </p:sp>
-      <p:sp>
-        <p:nvSpPr>
-          <p:cNvPr id="39" name="TextBox 38">
-            <a:extLst>
-              <a:ext uri="{FF2B5EF4-FFF2-40B4-BE49-F238E27FC236}">
-                <a16:creationId xmlns:a16="http://schemas.microsoft.com/office/drawing/2014/main" id="{25272641-A539-A402-5C94-67B00CCA7A40}"/>
-              </a:ext>
-            </a:extLst>
-          </p:cNvPr>
-          <p:cNvSpPr txBox="1"/>
-          <p:nvPr/>
-        </p:nvSpPr>
-        <p:spPr>
-          <a:xfrm>
-            <a:off x="89506" y="2127424"/>
-            <a:ext cx="400595" cy="584775"/>
-          </a:xfrm>
-          <a:prstGeom prst="rect">
-            <a:avLst/>
-          </a:prstGeom>
-          <a:noFill/>
-        </p:spPr>
-        <p:txBody>
-          <a:bodyPr wrap="square" rtlCol="0">
-            <a:spAutoFit/>
-          </a:bodyPr>
-          <a:lstStyle/>
-          <a:p>
-            <a:r>
-              <a:rPr lang="en-US" sz="3200" dirty="0">
-                <a:solidFill>
-                  <a:srgbClr val="09B0AC"/>
-                </a:solidFill>
-                <a:latin typeface="Lato Light" panose="020F0502020204030203" pitchFamily="34" charset="0"/>
-                <a:ea typeface="Lato Light" panose="020F0502020204030203" pitchFamily="34" charset="0"/>
-                <a:cs typeface="Lato Light" panose="020F0502020204030203" pitchFamily="34" charset="0"/>
-              </a:rPr>
-              <a:t>+</a:t>
-            </a:r>
-            <a:endParaRPr lang="en-NL" sz="3200" dirty="0">
-              <a:solidFill>
-                <a:srgbClr val="09B0AC"/>
-              </a:solidFill>
-              <a:latin typeface="Lato Light" panose="020F0502020204030203" pitchFamily="34" charset="0"/>
-              <a:ea typeface="Lato Light" panose="020F0502020204030203" pitchFamily="34" charset="0"/>
-              <a:cs typeface="Lato Light" panose="020F0502020204030203" pitchFamily="34" charset="0"/>
-            </a:endParaRPr>
-          </a:p>
-        </p:txBody>
-      </p:sp>
-      <p:sp>
-        <p:nvSpPr>
-          <p:cNvPr id="41" name="TextBox 40">
-            <a:extLst>
-              <a:ext uri="{FF2B5EF4-FFF2-40B4-BE49-F238E27FC236}">
-                <a16:creationId xmlns:a16="http://schemas.microsoft.com/office/drawing/2014/main" id="{96C6EDA8-801A-CA11-32FA-BEA4C06FED72}"/>
-              </a:ext>
-            </a:extLst>
-          </p:cNvPr>
-          <p:cNvSpPr txBox="1"/>
-          <p:nvPr/>
-        </p:nvSpPr>
-        <p:spPr>
-          <a:xfrm>
-            <a:off x="1676850" y="640564"/>
-            <a:ext cx="465102" cy="584775"/>
-          </a:xfrm>
-          <a:prstGeom prst="rect">
-            <a:avLst/>
-          </a:prstGeom>
-          <a:noFill/>
-          <a:effectLst/>
-        </p:spPr>
-        <p:txBody>
-          <a:bodyPr wrap="square" rtlCol="0">
-            <a:spAutoFit/>
-          </a:bodyPr>
-          <a:lstStyle/>
-          <a:p>
-            <a:r>
-              <a:rPr lang="en-NL" sz="2400" dirty="0">
-                <a:solidFill>
-                  <a:srgbClr val="7D0112"/>
-                </a:solidFill>
-                <a:latin typeface="Lato" panose="020F0502020204030203" pitchFamily="34" charset="0"/>
-                <a:ea typeface="Lato" panose="020F0502020204030203" pitchFamily="34" charset="0"/>
-                <a:cs typeface="Lato" panose="020F0502020204030203" pitchFamily="34" charset="0"/>
-              </a:rPr>
-              <a:t>—</a:t>
-            </a:r>
-            <a:r>
-              <a:rPr lang="en-US" sz="3200" dirty="0">
-                <a:solidFill>
-                  <a:srgbClr val="7D0112"/>
-                </a:solidFill>
-                <a:latin typeface="Lato Light" panose="020F0502020204030203" pitchFamily="34" charset="0"/>
-                <a:ea typeface="Lato Light" panose="020F0502020204030203" pitchFamily="34" charset="0"/>
-                <a:cs typeface="Lato Light" panose="020F0502020204030203" pitchFamily="34" charset="0"/>
-              </a:rPr>
-              <a:t> </a:t>
-            </a:r>
-            <a:endParaRPr lang="en-NL" sz="3200" dirty="0">
-              <a:solidFill>
-                <a:srgbClr val="7D0112"/>
-              </a:solidFill>
-              <a:latin typeface="Lato Light" panose="020F0502020204030203" pitchFamily="34" charset="0"/>
-              <a:ea typeface="Lato Light" panose="020F0502020204030203" pitchFamily="34" charset="0"/>
-              <a:cs typeface="Lato Light" panose="020F0502020204030203" pitchFamily="34" charset="0"/>
-            </a:endParaRPr>
-          </a:p>
-        </p:txBody>
-      </p:sp>
-      <p:sp>
-        <p:nvSpPr>
-          <p:cNvPr id="43" name="TextBox 42">
-            <a:extLst>
-              <a:ext uri="{FF2B5EF4-FFF2-40B4-BE49-F238E27FC236}">
-                <a16:creationId xmlns:a16="http://schemas.microsoft.com/office/drawing/2014/main" id="{A14D5C61-5F12-7800-FF58-A537533EE72D}"/>
-              </a:ext>
-            </a:extLst>
-          </p:cNvPr>
-          <p:cNvSpPr txBox="1"/>
-          <p:nvPr/>
-        </p:nvSpPr>
-        <p:spPr>
-          <a:xfrm>
-            <a:off x="2658616" y="2141876"/>
-            <a:ext cx="400595" cy="584775"/>
-          </a:xfrm>
-          <a:prstGeom prst="rect">
-            <a:avLst/>
-          </a:prstGeom>
-          <a:noFill/>
-        </p:spPr>
-        <p:txBody>
-          <a:bodyPr wrap="square" rtlCol="0">
-            <a:spAutoFit/>
-          </a:bodyPr>
-          <a:lstStyle/>
-          <a:p>
-            <a:r>
-              <a:rPr lang="en-US" sz="3200" dirty="0">
-                <a:solidFill>
-                  <a:srgbClr val="7D0112"/>
-                </a:solidFill>
-                <a:latin typeface="Lato Light" panose="020F0502020204030203" pitchFamily="34" charset="0"/>
-                <a:ea typeface="Lato Light" panose="020F0502020204030203" pitchFamily="34" charset="0"/>
-                <a:cs typeface="Lato Light" panose="020F0502020204030203" pitchFamily="34" charset="0"/>
-              </a:rPr>
-              <a:t>+</a:t>
-            </a:r>
-            <a:endParaRPr lang="en-NL" sz="3200" dirty="0">
-              <a:solidFill>
-                <a:srgbClr val="7D0112"/>
-              </a:solidFill>
-              <a:latin typeface="Lato Light" panose="020F0502020204030203" pitchFamily="34" charset="0"/>
-              <a:ea typeface="Lato Light" panose="020F0502020204030203" pitchFamily="34" charset="0"/>
-              <a:cs typeface="Lato Light" panose="020F0502020204030203" pitchFamily="34" charset="0"/>
-            </a:endParaRPr>
-          </a:p>
-        </p:txBody>
-      </p:sp>
-      <p:sp>
-        <p:nvSpPr>
-          <p:cNvPr id="44" name="TextBox 43">
-            <a:extLst>
-              <a:ext uri="{FF2B5EF4-FFF2-40B4-BE49-F238E27FC236}">
-                <a16:creationId xmlns:a16="http://schemas.microsoft.com/office/drawing/2014/main" id="{95FA244C-0E78-A9B3-019B-D058571B753C}"/>
-              </a:ext>
-            </a:extLst>
-          </p:cNvPr>
-          <p:cNvSpPr txBox="1"/>
-          <p:nvPr/>
-        </p:nvSpPr>
-        <p:spPr>
-          <a:xfrm>
-            <a:off x="3925283" y="1137204"/>
-            <a:ext cx="400595" cy="584775"/>
-          </a:xfrm>
-          <a:prstGeom prst="rect">
-            <a:avLst/>
-          </a:prstGeom>
-          <a:noFill/>
-        </p:spPr>
-        <p:txBody>
-          <a:bodyPr wrap="square" rtlCol="0">
-            <a:spAutoFit/>
-          </a:bodyPr>
-          <a:lstStyle/>
-          <a:p>
-            <a:r>
-              <a:rPr lang="en-US" sz="3200" dirty="0">
-                <a:solidFill>
-                  <a:srgbClr val="7D0112"/>
-                </a:solidFill>
-                <a:latin typeface="Lato Light" panose="020F0502020204030203" pitchFamily="34" charset="0"/>
-                <a:ea typeface="Lato Light" panose="020F0502020204030203" pitchFamily="34" charset="0"/>
-                <a:cs typeface="Lato Light" panose="020F0502020204030203" pitchFamily="34" charset="0"/>
-              </a:rPr>
-              <a:t>+</a:t>
-            </a:r>
-            <a:endParaRPr lang="en-NL" sz="3200" dirty="0">
-              <a:solidFill>
-                <a:srgbClr val="7D0112"/>
-              </a:solidFill>
-              <a:latin typeface="Lato Light" panose="020F0502020204030203" pitchFamily="34" charset="0"/>
-              <a:ea typeface="Lato Light" panose="020F0502020204030203" pitchFamily="34" charset="0"/>
-              <a:cs typeface="Lato Light" panose="020F0502020204030203" pitchFamily="34" charset="0"/>
-            </a:endParaRPr>
-          </a:p>
-        </p:txBody>
-      </p:sp>
-      <p:sp>
-        <p:nvSpPr>
-          <p:cNvPr id="46" name="TextBox 45">
-            <a:extLst>
-              <a:ext uri="{FF2B5EF4-FFF2-40B4-BE49-F238E27FC236}">
-                <a16:creationId xmlns:a16="http://schemas.microsoft.com/office/drawing/2014/main" id="{ADF0FED2-336F-970C-1A3A-5039CD76E598}"/>
-              </a:ext>
-            </a:extLst>
-          </p:cNvPr>
-          <p:cNvSpPr txBox="1"/>
-          <p:nvPr/>
-        </p:nvSpPr>
-        <p:spPr>
-          <a:xfrm>
-            <a:off x="1252869" y="3924787"/>
-            <a:ext cx="400595" cy="584775"/>
-          </a:xfrm>
-          <a:prstGeom prst="rect">
-            <a:avLst/>
-          </a:prstGeom>
-          <a:noFill/>
-        </p:spPr>
-        <p:txBody>
-          <a:bodyPr wrap="square" rtlCol="0">
-            <a:spAutoFit/>
-          </a:bodyPr>
-          <a:lstStyle/>
-          <a:p>
-            <a:r>
-              <a:rPr lang="en-US" sz="3200" dirty="0">
-                <a:solidFill>
-                  <a:srgbClr val="09B0AC"/>
-                </a:solidFill>
-                <a:latin typeface="Lato Light" panose="020F0502020204030203" pitchFamily="34" charset="0"/>
-                <a:ea typeface="Lato Light" panose="020F0502020204030203" pitchFamily="34" charset="0"/>
-                <a:cs typeface="Lato Light" panose="020F0502020204030203" pitchFamily="34" charset="0"/>
-              </a:rPr>
-              <a:t>+</a:t>
-            </a:r>
-            <a:endParaRPr lang="en-NL" sz="3200" dirty="0">
-              <a:solidFill>
-                <a:srgbClr val="09B0AC"/>
-              </a:solidFill>
-              <a:latin typeface="Lato Light" panose="020F0502020204030203" pitchFamily="34" charset="0"/>
-              <a:ea typeface="Lato Light" panose="020F0502020204030203" pitchFamily="34" charset="0"/>
-              <a:cs typeface="Lato Light" panose="020F0502020204030203" pitchFamily="34" charset="0"/>
-            </a:endParaRPr>
-          </a:p>
-        </p:txBody>
-      </p:sp>
-      <p:sp>
-        <p:nvSpPr>
-          <p:cNvPr id="48" name="TextBox 47">
-            <a:extLst>
-              <a:ext uri="{FF2B5EF4-FFF2-40B4-BE49-F238E27FC236}">
-                <a16:creationId xmlns:a16="http://schemas.microsoft.com/office/drawing/2014/main" id="{EF7E0274-5551-7687-6A7B-44C33E25B529}"/>
-              </a:ext>
-            </a:extLst>
-          </p:cNvPr>
-          <p:cNvSpPr txBox="1"/>
-          <p:nvPr/>
-        </p:nvSpPr>
-        <p:spPr>
-          <a:xfrm>
-            <a:off x="2402402" y="639663"/>
-            <a:ext cx="465102" cy="584775"/>
-          </a:xfrm>
-          <a:prstGeom prst="rect">
-            <a:avLst/>
-          </a:prstGeom>
-          <a:noFill/>
-        </p:spPr>
-        <p:txBody>
-          <a:bodyPr wrap="square" rtlCol="0">
-            <a:spAutoFit/>
-          </a:bodyPr>
-          <a:lstStyle/>
-          <a:p>
-            <a:r>
-              <a:rPr lang="en-NL" sz="2400" dirty="0">
-                <a:solidFill>
-                  <a:srgbClr val="09B0AC"/>
-                </a:solidFill>
-                <a:latin typeface="Lato" panose="020F0502020204030203" pitchFamily="34" charset="0"/>
-                <a:ea typeface="Lato" panose="020F0502020204030203" pitchFamily="34" charset="0"/>
-                <a:cs typeface="Lato" panose="020F0502020204030203" pitchFamily="34" charset="0"/>
-              </a:rPr>
-              <a:t>—</a:t>
-            </a:r>
-            <a:r>
-              <a:rPr lang="en-US" sz="3200" dirty="0">
-                <a:solidFill>
-                  <a:srgbClr val="7D0112"/>
-                </a:solidFill>
-                <a:latin typeface="Lato Light" panose="020F0502020204030203" pitchFamily="34" charset="0"/>
-                <a:ea typeface="Lato Light" panose="020F0502020204030203" pitchFamily="34" charset="0"/>
-                <a:cs typeface="Lato Light" panose="020F0502020204030203" pitchFamily="34" charset="0"/>
-              </a:rPr>
-              <a:t> </a:t>
-            </a:r>
-            <a:endParaRPr lang="en-NL" sz="3200" dirty="0">
-              <a:solidFill>
-                <a:srgbClr val="7D0112"/>
-              </a:solidFill>
-              <a:latin typeface="Lato Light" panose="020F0502020204030203" pitchFamily="34" charset="0"/>
-              <a:ea typeface="Lato Light" panose="020F0502020204030203" pitchFamily="34" charset="0"/>
-              <a:cs typeface="Lato Light" panose="020F0502020204030203" pitchFamily="34" charset="0"/>
-            </a:endParaRPr>
-          </a:p>
-        </p:txBody>
-      </p:sp>
-      <p:sp>
-        <p:nvSpPr>
-          <p:cNvPr id="49" name="TextBox 48">
-            <a:extLst>
-              <a:ext uri="{FF2B5EF4-FFF2-40B4-BE49-F238E27FC236}">
-                <a16:creationId xmlns:a16="http://schemas.microsoft.com/office/drawing/2014/main" id="{9B7DB700-D48B-38DC-E0BB-D2338A9B396F}"/>
-              </a:ext>
-            </a:extLst>
-          </p:cNvPr>
-          <p:cNvSpPr txBox="1"/>
-          <p:nvPr/>
-        </p:nvSpPr>
-        <p:spPr>
-          <a:xfrm>
-            <a:off x="2814151" y="3871838"/>
-            <a:ext cx="465102" cy="584775"/>
-          </a:xfrm>
-          <a:prstGeom prst="rect">
-            <a:avLst/>
-          </a:prstGeom>
-          <a:noFill/>
-        </p:spPr>
-        <p:txBody>
-          <a:bodyPr wrap="square" rtlCol="0">
-            <a:spAutoFit/>
-          </a:bodyPr>
-          <a:lstStyle/>
-          <a:p>
-            <a:r>
-              <a:rPr lang="en-NL" sz="2400" b="1" dirty="0">
-                <a:solidFill>
-                  <a:srgbClr val="7D0112"/>
-                </a:solidFill>
-                <a:latin typeface="Lato" panose="020F0502020204030203" pitchFamily="34" charset="0"/>
-                <a:ea typeface="Lato" panose="020F0502020204030203" pitchFamily="34" charset="0"/>
-                <a:cs typeface="Lato" panose="020F0502020204030203" pitchFamily="34" charset="0"/>
-              </a:rPr>
-              <a:t>—</a:t>
-            </a:r>
-            <a:r>
-              <a:rPr lang="en-US" sz="3200" dirty="0">
-                <a:solidFill>
-                  <a:srgbClr val="7D0112"/>
-                </a:solidFill>
-                <a:latin typeface="Lato" panose="020F0502020204030203" pitchFamily="34" charset="0"/>
-                <a:ea typeface="Lato" panose="020F0502020204030203" pitchFamily="34" charset="0"/>
-                <a:cs typeface="Lato" panose="020F0502020204030203" pitchFamily="34" charset="0"/>
-              </a:rPr>
-              <a:t> </a:t>
-            </a:r>
-            <a:endParaRPr lang="en-NL" sz="3200" dirty="0">
-              <a:solidFill>
-                <a:srgbClr val="7D0112"/>
-              </a:solidFill>
-              <a:latin typeface="Lato" panose="020F0502020204030203" pitchFamily="34" charset="0"/>
-              <a:ea typeface="Lato" panose="020F0502020204030203" pitchFamily="34" charset="0"/>
-              <a:cs typeface="Lato" panose="020F0502020204030203" pitchFamily="34" charset="0"/>
-            </a:endParaRPr>
-          </a:p>
-        </p:txBody>
-      </p:sp>
-      <p:sp>
-        <p:nvSpPr>
-          <p:cNvPr id="50" name="TextBox 49">
-            <a:extLst>
-              <a:ext uri="{FF2B5EF4-FFF2-40B4-BE49-F238E27FC236}">
-                <a16:creationId xmlns:a16="http://schemas.microsoft.com/office/drawing/2014/main" id="{F14FB793-DDC1-221E-B6B5-289DD2D49C4D}"/>
-              </a:ext>
-            </a:extLst>
-          </p:cNvPr>
-          <p:cNvSpPr txBox="1"/>
-          <p:nvPr/>
-        </p:nvSpPr>
-        <p:spPr>
-          <a:xfrm>
-            <a:off x="1673919" y="2658422"/>
-            <a:ext cx="465102" cy="584775"/>
-          </a:xfrm>
-          <a:prstGeom prst="rect">
-            <a:avLst/>
-          </a:prstGeom>
-          <a:noFill/>
-        </p:spPr>
-        <p:txBody>
-          <a:bodyPr wrap="square" rtlCol="0">
-            <a:spAutoFit/>
-          </a:bodyPr>
-          <a:lstStyle/>
-          <a:p>
-            <a:r>
-              <a:rPr lang="en-NL" sz="2400" dirty="0">
-                <a:solidFill>
-                  <a:srgbClr val="7D0112"/>
-                </a:solidFill>
-                <a:latin typeface="Lato" panose="020F0502020204030203" pitchFamily="34" charset="0"/>
-                <a:ea typeface="Lato" panose="020F0502020204030203" pitchFamily="34" charset="0"/>
-                <a:cs typeface="Lato" panose="020F0502020204030203" pitchFamily="34" charset="0"/>
-              </a:rPr>
-              <a:t>—</a:t>
-            </a:r>
-            <a:r>
-              <a:rPr lang="en-US" sz="3200" dirty="0">
-                <a:solidFill>
-                  <a:srgbClr val="7D0112"/>
-                </a:solidFill>
-                <a:latin typeface="Lato Light" panose="020F0502020204030203" pitchFamily="34" charset="0"/>
-                <a:ea typeface="Lato Light" panose="020F0502020204030203" pitchFamily="34" charset="0"/>
-                <a:cs typeface="Lato Light" panose="020F0502020204030203" pitchFamily="34" charset="0"/>
-              </a:rPr>
-              <a:t> </a:t>
-            </a:r>
-            <a:endParaRPr lang="en-NL" sz="3200" dirty="0">
-              <a:solidFill>
-                <a:srgbClr val="7D0112"/>
-              </a:solidFill>
-              <a:latin typeface="Lato Light" panose="020F0502020204030203" pitchFamily="34" charset="0"/>
-              <a:ea typeface="Lato Light" panose="020F0502020204030203" pitchFamily="34" charset="0"/>
-              <a:cs typeface="Lato Light" panose="020F0502020204030203" pitchFamily="34" charset="0"/>
-            </a:endParaRPr>
-          </a:p>
-        </p:txBody>
-      </p:sp>
-      <p:sp>
-        <p:nvSpPr>
-          <p:cNvPr id="51" name="Left Bracket 50">
-            <a:extLst>
-              <a:ext uri="{FF2B5EF4-FFF2-40B4-BE49-F238E27FC236}">
-                <a16:creationId xmlns:a16="http://schemas.microsoft.com/office/drawing/2014/main" id="{FB1F1BEE-2A54-F094-25F2-CF535A7C8FF9}"/>
-              </a:ext>
-            </a:extLst>
-          </p:cNvPr>
-          <p:cNvSpPr/>
-          <p:nvPr/>
-        </p:nvSpPr>
-        <p:spPr>
-          <a:xfrm rot="1703370" flipH="1">
-            <a:off x="3104221" y="3663273"/>
-            <a:ext cx="322790" cy="975247"/>
-          </a:xfrm>
-          <a:prstGeom prst="leftBracket">
-            <a:avLst>
-              <a:gd name="adj" fmla="val 242773"/>
-            </a:avLst>
-          </a:prstGeom>
-          <a:ln>
-            <a:solidFill>
-              <a:srgbClr val="7D0112"/>
-            </a:solidFill>
-          </a:ln>
-          <a:effectLst/>
-        </p:spPr>
-        <p:style>
-          <a:lnRef idx="2">
-            <a:schemeClr val="accent1"/>
-          </a:lnRef>
-          <a:fillRef idx="0">
-            <a:schemeClr val="accent1"/>
-          </a:fillRef>
-          <a:effectRef idx="1">
-            <a:schemeClr val="accent1"/>
-          </a:effectRef>
-          <a:fontRef idx="minor">
-            <a:schemeClr val="tx1"/>
-          </a:fontRef>
-        </p:style>
-        <p:txBody>
-          <a:bodyPr rtlCol="0" anchor="ctr"/>
-          <a:lstStyle/>
-          <a:p>
-            <a:pPr algn="ctr"/>
-            <a:endParaRPr lang="en-NL"/>
-          </a:p>
-        </p:txBody>
-      </p:sp>
-      <p:sp>
-        <p:nvSpPr>
-          <p:cNvPr id="36" name="Isosceles Triangle 35">
-            <a:extLst>
-              <a:ext uri="{FF2B5EF4-FFF2-40B4-BE49-F238E27FC236}">
-                <a16:creationId xmlns:a16="http://schemas.microsoft.com/office/drawing/2014/main" id="{A72AF958-0D09-761A-46AC-5C9873159CF6}"/>
-              </a:ext>
-            </a:extLst>
-          </p:cNvPr>
-          <p:cNvSpPr/>
-          <p:nvPr/>
-        </p:nvSpPr>
-        <p:spPr>
-          <a:xfrm rot="16200000" flipH="1">
-            <a:off x="2876678" y="4447823"/>
-            <a:ext cx="149415" cy="134471"/>
-          </a:xfrm>
-          <a:prstGeom prst="triangle">
-            <a:avLst/>
-          </a:prstGeom>
-          <a:solidFill>
-            <a:srgbClr val="7D0112"/>
-          </a:solidFill>
-          <a:ln>
-            <a:solidFill>
-              <a:srgbClr val="7D0112"/>
-            </a:solidFill>
-          </a:ln>
-          <a:effectLst/>
-        </p:spPr>
-        <p:style>
-          <a:lnRef idx="1">
-            <a:schemeClr val="accent1"/>
-          </a:lnRef>
-          <a:fillRef idx="3">
-            <a:schemeClr val="accent1"/>
-          </a:fillRef>
-          <a:effectRef idx="2">
-            <a:schemeClr val="accent1"/>
-          </a:effectRef>
-          <a:fontRef idx="minor">
-            <a:schemeClr val="lt1"/>
-          </a:fontRef>
-        </p:style>
-        <p:txBody>
-          <a:bodyPr rtlCol="0" anchor="ctr"/>
-          <a:lstStyle/>
-          <a:p>
-            <a:pPr algn="ctr"/>
-            <a:endParaRPr lang="en-NL"/>
-          </a:p>
-        </p:txBody>
-      </p:sp>
-      <p:sp>
-        <p:nvSpPr>
-          <p:cNvPr id="86" name="Oval 85">
-            <a:extLst>
-              <a:ext uri="{FF2B5EF4-FFF2-40B4-BE49-F238E27FC236}">
-                <a16:creationId xmlns:a16="http://schemas.microsoft.com/office/drawing/2014/main" id="{BD29C2B3-4DEF-B114-CD24-07B891890F2A}"/>
-              </a:ext>
-            </a:extLst>
-          </p:cNvPr>
-          <p:cNvSpPr>
-            <a:spLocks noChangeAspect="1"/>
-          </p:cNvSpPr>
-          <p:nvPr/>
-        </p:nvSpPr>
-        <p:spPr>
-          <a:xfrm>
-            <a:off x="2790544" y="2319810"/>
-            <a:ext cx="1380565" cy="1380565"/>
-          </a:xfrm>
-          <a:prstGeom prst="ellipse">
-            <a:avLst/>
-          </a:prstGeom>
-          <a:solidFill>
-            <a:srgbClr val="7D0112"/>
-          </a:solidFill>
-          <a:ln w="19050">
-            <a:solidFill>
-              <a:srgbClr val="7D0112"/>
-            </a:solidFill>
-          </a:ln>
-          <a:effectLst/>
-        </p:spPr>
-        <p:style>
-          <a:lnRef idx="1">
-            <a:schemeClr val="accent1"/>
-          </a:lnRef>
-          <a:fillRef idx="3">
-            <a:schemeClr val="accent1"/>
-          </a:fillRef>
-          <a:effectRef idx="2">
-            <a:schemeClr val="accent1"/>
-          </a:effectRef>
-          <a:fontRef idx="minor">
-            <a:schemeClr val="lt1"/>
-          </a:fontRef>
-        </p:style>
-        <p:txBody>
-          <a:bodyPr wrap="none" lIns="0" tIns="0" rIns="0" bIns="0" rtlCol="0" anchor="ctr"/>
-          <a:lstStyle/>
-          <a:p>
-            <a:pPr algn="ctr"/>
-            <a:r>
-              <a:rPr lang="en-US" dirty="0">
-                <a:latin typeface="Lato" panose="020F0502020204030203" pitchFamily="34" charset="0"/>
-                <a:ea typeface="Lato" panose="020F0502020204030203" pitchFamily="34" charset="0"/>
-                <a:cs typeface="Lato" panose="020F0502020204030203" pitchFamily="34" charset="0"/>
-              </a:rPr>
-              <a:t>Exhaustion</a:t>
-            </a:r>
-            <a:endParaRPr lang="en-NL" dirty="0">
-              <a:latin typeface="Lato" panose="020F0502020204030203" pitchFamily="34" charset="0"/>
-              <a:ea typeface="Lato" panose="020F0502020204030203" pitchFamily="34" charset="0"/>
-              <a:cs typeface="Lato" panose="020F0502020204030203" pitchFamily="34" charset="0"/>
-            </a:endParaRPr>
-          </a:p>
-        </p:txBody>
-      </p:sp>
-      <p:sp>
-        <p:nvSpPr>
-          <p:cNvPr id="32" name="Oval 31">
-            <a:extLst>
-              <a:ext uri="{FF2B5EF4-FFF2-40B4-BE49-F238E27FC236}">
-                <a16:creationId xmlns:a16="http://schemas.microsoft.com/office/drawing/2014/main" id="{EDC20456-EDF5-D3A3-33B7-34B58C9065E5}"/>
-              </a:ext>
-            </a:extLst>
-          </p:cNvPr>
-          <p:cNvSpPr>
-            <a:spLocks noChangeAspect="1"/>
-          </p:cNvSpPr>
-          <p:nvPr/>
-        </p:nvSpPr>
-        <p:spPr>
-          <a:xfrm>
-            <a:off x="307559" y="117482"/>
-            <a:ext cx="1380565" cy="1380565"/>
-          </a:xfrm>
-          <a:prstGeom prst="ellipse">
-            <a:avLst/>
-          </a:prstGeom>
-          <a:solidFill>
-            <a:srgbClr val="09B0AC"/>
-          </a:solidFill>
-          <a:ln w="19050">
-            <a:solidFill>
-              <a:srgbClr val="09B0AC"/>
-            </a:solidFill>
-          </a:ln>
-          <a:effectLst/>
-        </p:spPr>
-        <p:style>
-          <a:lnRef idx="1">
-            <a:schemeClr val="accent1"/>
-          </a:lnRef>
-          <a:fillRef idx="3">
-            <a:schemeClr val="accent1"/>
-          </a:fillRef>
-          <a:effectRef idx="2">
-            <a:schemeClr val="accent1"/>
-          </a:effectRef>
-          <a:fontRef idx="minor">
-            <a:schemeClr val="lt1"/>
-          </a:fontRef>
-        </p:style>
-        <p:txBody>
-          <a:bodyPr wrap="none" lIns="0" tIns="0" rIns="0" bIns="0" rtlCol="0" anchor="ctr"/>
-          <a:lstStyle/>
-          <a:p>
-            <a:pPr algn="ctr"/>
-            <a:r>
-              <a:rPr lang="en-US" dirty="0">
-                <a:latin typeface="Lato" panose="020F0502020204030203" pitchFamily="34" charset="0"/>
-                <a:ea typeface="Lato" panose="020F0502020204030203" pitchFamily="34" charset="0"/>
-                <a:cs typeface="Lato" panose="020F0502020204030203" pitchFamily="34" charset="0"/>
-              </a:rPr>
-              <a:t>Job </a:t>
-            </a:r>
-            <a:br>
-              <a:rPr lang="en-US" dirty="0">
-                <a:latin typeface="Lato" panose="020F0502020204030203" pitchFamily="34" charset="0"/>
-                <a:ea typeface="Lato" panose="020F0502020204030203" pitchFamily="34" charset="0"/>
-                <a:cs typeface="Lato" panose="020F0502020204030203" pitchFamily="34" charset="0"/>
-              </a:rPr>
-            </a:br>
-            <a:r>
-              <a:rPr lang="en-US" dirty="0">
-                <a:latin typeface="Lato" panose="020F0502020204030203" pitchFamily="34" charset="0"/>
-                <a:ea typeface="Lato" panose="020F0502020204030203" pitchFamily="34" charset="0"/>
-                <a:cs typeface="Lato" panose="020F0502020204030203" pitchFamily="34" charset="0"/>
-              </a:rPr>
-              <a:t>Resources</a:t>
-            </a:r>
-            <a:endParaRPr lang="en-NL" dirty="0">
-              <a:latin typeface="Lato" panose="020F0502020204030203" pitchFamily="34" charset="0"/>
-              <a:ea typeface="Lato" panose="020F0502020204030203" pitchFamily="34" charset="0"/>
-              <a:cs typeface="Lato" panose="020F0502020204030203" pitchFamily="34" charset="0"/>
-            </a:endParaRPr>
-          </a:p>
-        </p:txBody>
-      </p:sp>
-      <p:sp>
-        <p:nvSpPr>
-          <p:cNvPr id="33" name="Oval 32">
-            <a:extLst>
-              <a:ext uri="{FF2B5EF4-FFF2-40B4-BE49-F238E27FC236}">
-                <a16:creationId xmlns:a16="http://schemas.microsoft.com/office/drawing/2014/main" id="{AA34AF3D-141F-5B1B-57D8-612AEDC58F1B}"/>
-              </a:ext>
-            </a:extLst>
-          </p:cNvPr>
-          <p:cNvSpPr>
-            <a:spLocks noChangeAspect="1"/>
-          </p:cNvSpPr>
-          <p:nvPr/>
-        </p:nvSpPr>
-        <p:spPr>
-          <a:xfrm>
-            <a:off x="307559" y="2319811"/>
-            <a:ext cx="1380565" cy="1380565"/>
-          </a:xfrm>
-          <a:prstGeom prst="ellipse">
-            <a:avLst/>
-          </a:prstGeom>
-          <a:solidFill>
-            <a:srgbClr val="09B0AC"/>
-          </a:solidFill>
-          <a:ln w="19050">
-            <a:solidFill>
-              <a:srgbClr val="09B0AC"/>
-            </a:solidFill>
-          </a:ln>
-          <a:effectLst/>
-        </p:spPr>
-        <p:style>
-          <a:lnRef idx="1">
-            <a:schemeClr val="accent1"/>
-          </a:lnRef>
-          <a:fillRef idx="3">
-            <a:schemeClr val="accent1"/>
-          </a:fillRef>
-          <a:effectRef idx="2">
-            <a:schemeClr val="accent1"/>
-          </a:effectRef>
-          <a:fontRef idx="minor">
-            <a:schemeClr val="lt1"/>
-          </a:fontRef>
-        </p:style>
-        <p:txBody>
-          <a:bodyPr wrap="none" lIns="0" tIns="0" rIns="0" bIns="0" rtlCol="0" anchor="ctr"/>
-          <a:lstStyle/>
-          <a:p>
-            <a:pPr algn="ctr"/>
-            <a:r>
-              <a:rPr lang="en-US" dirty="0">
-                <a:latin typeface="Lato" panose="020F0502020204030203" pitchFamily="34" charset="0"/>
-                <a:ea typeface="Lato" panose="020F0502020204030203" pitchFamily="34" charset="0"/>
-                <a:cs typeface="Lato" panose="020F0502020204030203" pitchFamily="34" charset="0"/>
-              </a:rPr>
-              <a:t>Engagement</a:t>
-            </a:r>
-            <a:endParaRPr lang="en-NL" dirty="0">
-              <a:latin typeface="Lato" panose="020F0502020204030203" pitchFamily="34" charset="0"/>
-              <a:ea typeface="Lato" panose="020F0502020204030203" pitchFamily="34" charset="0"/>
-              <a:cs typeface="Lato" panose="020F0502020204030203" pitchFamily="34" charset="0"/>
-            </a:endParaRPr>
-          </a:p>
-        </p:txBody>
-      </p:sp>
-      <p:sp>
-        <p:nvSpPr>
-          <p:cNvPr id="31" name="Oval 30">
-            <a:extLst>
-              <a:ext uri="{FF2B5EF4-FFF2-40B4-BE49-F238E27FC236}">
-                <a16:creationId xmlns:a16="http://schemas.microsoft.com/office/drawing/2014/main" id="{AEA9D42D-A84E-C670-B808-F2675095D298}"/>
-              </a:ext>
-            </a:extLst>
-          </p:cNvPr>
-          <p:cNvSpPr>
-            <a:spLocks noChangeAspect="1"/>
-          </p:cNvSpPr>
-          <p:nvPr/>
-        </p:nvSpPr>
-        <p:spPr>
-          <a:xfrm>
-            <a:off x="1533116" y="4016076"/>
-            <a:ext cx="1380565" cy="1380565"/>
-          </a:xfrm>
-          <a:prstGeom prst="ellipse">
-            <a:avLst/>
-          </a:prstGeom>
-          <a:solidFill>
-            <a:srgbClr val="B4771A"/>
-          </a:solidFill>
-          <a:ln w="19050">
-            <a:solidFill>
-              <a:srgbClr val="B4771A"/>
-            </a:solidFill>
-          </a:ln>
-          <a:effectLst/>
-        </p:spPr>
-        <p:style>
-          <a:lnRef idx="1">
-            <a:schemeClr val="accent1"/>
-          </a:lnRef>
-          <a:fillRef idx="3">
-            <a:schemeClr val="accent1"/>
-          </a:fillRef>
-          <a:effectRef idx="2">
-            <a:schemeClr val="accent1"/>
-          </a:effectRef>
-          <a:fontRef idx="minor">
-            <a:schemeClr val="lt1"/>
-          </a:fontRef>
-        </p:style>
-        <p:txBody>
-          <a:bodyPr wrap="none" lIns="0" tIns="0" rIns="0" bIns="0" rtlCol="0" anchor="ctr"/>
-          <a:lstStyle/>
-          <a:p>
-            <a:pPr algn="ctr"/>
-            <a:r>
-              <a:rPr lang="en-US" sz="1700" dirty="0">
-                <a:latin typeface="Lato" panose="020F0502020204030203" pitchFamily="34" charset="0"/>
-                <a:ea typeface="Lato" panose="020F0502020204030203" pitchFamily="34" charset="0"/>
-                <a:cs typeface="Lato" panose="020F0502020204030203" pitchFamily="34" charset="0"/>
-              </a:rPr>
-              <a:t>Job </a:t>
-            </a:r>
-            <a:br>
-              <a:rPr lang="en-US" sz="1700" dirty="0">
-                <a:latin typeface="Lato" panose="020F0502020204030203" pitchFamily="34" charset="0"/>
-                <a:ea typeface="Lato" panose="020F0502020204030203" pitchFamily="34" charset="0"/>
-                <a:cs typeface="Lato" panose="020F0502020204030203" pitchFamily="34" charset="0"/>
-              </a:rPr>
-            </a:br>
-            <a:r>
-              <a:rPr lang="en-US" sz="1700" dirty="0">
-                <a:latin typeface="Lato" panose="020F0502020204030203" pitchFamily="34" charset="0"/>
-                <a:ea typeface="Lato" panose="020F0502020204030203" pitchFamily="34" charset="0"/>
-                <a:cs typeface="Lato" panose="020F0502020204030203" pitchFamily="34" charset="0"/>
-              </a:rPr>
-              <a:t>Performance</a:t>
-            </a:r>
-            <a:endParaRPr lang="en-NL" sz="1700" dirty="0">
-              <a:latin typeface="Lato" panose="020F0502020204030203" pitchFamily="34" charset="0"/>
-              <a:ea typeface="Lato" panose="020F0502020204030203" pitchFamily="34" charset="0"/>
-              <a:cs typeface="Lato" panose="020F0502020204030203" pitchFamily="34" charset="0"/>
-            </a:endParaRPr>
-          </a:p>
-        </p:txBody>
-      </p:sp>
-      <p:sp>
-        <p:nvSpPr>
-          <p:cNvPr id="85" name="Oval 84">
-            <a:extLst>
-              <a:ext uri="{FF2B5EF4-FFF2-40B4-BE49-F238E27FC236}">
-                <a16:creationId xmlns:a16="http://schemas.microsoft.com/office/drawing/2014/main" id="{3FB2EE0A-4F9B-0322-B077-D70D9BC719FE}"/>
-              </a:ext>
-            </a:extLst>
-          </p:cNvPr>
-          <p:cNvSpPr>
-            <a:spLocks noChangeAspect="1"/>
-          </p:cNvSpPr>
-          <p:nvPr/>
-        </p:nvSpPr>
-        <p:spPr>
-          <a:xfrm>
-            <a:off x="2790544" y="117481"/>
-            <a:ext cx="1380565" cy="1380565"/>
-          </a:xfrm>
-          <a:prstGeom prst="ellipse">
-            <a:avLst/>
-          </a:prstGeom>
-          <a:solidFill>
-            <a:srgbClr val="7D0112"/>
-          </a:solidFill>
-          <a:ln w="19050">
-            <a:solidFill>
-              <a:srgbClr val="7D0112"/>
-            </a:solidFill>
-          </a:ln>
-          <a:effectLst/>
-        </p:spPr>
-        <p:style>
-          <a:lnRef idx="1">
-            <a:schemeClr val="accent1"/>
-          </a:lnRef>
-          <a:fillRef idx="3">
-            <a:schemeClr val="accent1"/>
-          </a:fillRef>
-          <a:effectRef idx="2">
-            <a:schemeClr val="accent1"/>
-          </a:effectRef>
-          <a:fontRef idx="minor">
-            <a:schemeClr val="lt1"/>
-          </a:fontRef>
-        </p:style>
-        <p:txBody>
-          <a:bodyPr wrap="none" lIns="0" tIns="0" rIns="0" bIns="0" rtlCol="0" anchor="ctr"/>
-          <a:lstStyle/>
-          <a:p>
-            <a:pPr algn="ctr"/>
-            <a:r>
-              <a:rPr lang="en-US" dirty="0">
-                <a:latin typeface="Lato" panose="020F0502020204030203" pitchFamily="34" charset="0"/>
-                <a:ea typeface="Lato" panose="020F0502020204030203" pitchFamily="34" charset="0"/>
-                <a:cs typeface="Lato" panose="020F0502020204030203" pitchFamily="34" charset="0"/>
-              </a:rPr>
-              <a:t>Job </a:t>
-            </a:r>
-            <a:br>
-              <a:rPr lang="en-US" dirty="0">
-                <a:latin typeface="Lato" panose="020F0502020204030203" pitchFamily="34" charset="0"/>
-                <a:ea typeface="Lato" panose="020F0502020204030203" pitchFamily="34" charset="0"/>
-                <a:cs typeface="Lato" panose="020F0502020204030203" pitchFamily="34" charset="0"/>
-              </a:rPr>
-            </a:br>
-            <a:r>
-              <a:rPr lang="en-US" dirty="0">
-                <a:latin typeface="Lato" panose="020F0502020204030203" pitchFamily="34" charset="0"/>
-                <a:ea typeface="Lato" panose="020F0502020204030203" pitchFamily="34" charset="0"/>
-                <a:cs typeface="Lato" panose="020F0502020204030203" pitchFamily="34" charset="0"/>
-              </a:rPr>
-              <a:t>Demands</a:t>
-            </a:r>
-            <a:endParaRPr lang="en-NL" dirty="0">
-              <a:latin typeface="Lato" panose="020F0502020204030203" pitchFamily="34" charset="0"/>
-              <a:ea typeface="Lato" panose="020F0502020204030203" pitchFamily="34" charset="0"/>
-              <a:cs typeface="Lato" panose="020F0502020204030203" pitchFamily="34" charset="0"/>
-            </a:endParaRPr>
-          </a:p>
-        </p:txBody>
-      </p:sp>
     </p:spTree>
     <p:extLst>
       <p:ext uri="{BB962C8B-B14F-4D97-AF65-F5344CB8AC3E}">
-        <p14:creationId xmlns:p14="http://schemas.microsoft.com/office/powerpoint/2010/main" val="1293223303"/>
+        <p14:creationId xmlns:p14="http://schemas.microsoft.com/office/powerpoint/2010/main" val="780590902"/>
       </p:ext>
     </p:extLst>
   </p:cSld>
@@ -6243,7 +6813,13 @@
   <p:cSld>
     <p:spTree>
       <p:nvGrpSpPr>
-        <p:cNvPr id="1" name=""/>
+        <p:cNvPr id="1" name="">
+          <a:extLst>
+            <a:ext uri="{FF2B5EF4-FFF2-40B4-BE49-F238E27FC236}">
+              <a16:creationId xmlns:a16="http://schemas.microsoft.com/office/drawing/2014/main" id="{DCDB65C6-1EA1-B9E5-A70B-221E406D31AF}"/>
+            </a:ext>
+          </a:extLst>
+        </p:cNvPr>
         <p:cNvGrpSpPr/>
         <p:nvPr/>
       </p:nvGrpSpPr>
@@ -6257,10 +6833,10 @@
       </p:grpSpPr>
       <p:sp>
         <p:nvSpPr>
-          <p:cNvPr id="20" name="TextBox 19">
-            <a:extLst>
-              <a:ext uri="{FF2B5EF4-FFF2-40B4-BE49-F238E27FC236}">
-                <a16:creationId xmlns:a16="http://schemas.microsoft.com/office/drawing/2014/main" id="{2EAB8C60-01C6-6F2E-5875-B38006A8F0FD}"/>
+          <p:cNvPr id="12" name="TextBox 11">
+            <a:extLst>
+              <a:ext uri="{FF2B5EF4-FFF2-40B4-BE49-F238E27FC236}">
+                <a16:creationId xmlns:a16="http://schemas.microsoft.com/office/drawing/2014/main" id="{FD127724-5F51-556F-C83C-664B770957B9}"/>
               </a:ext>
             </a:extLst>
           </p:cNvPr>
@@ -6269,7 +6845,7 @@
         </p:nvSpPr>
         <p:spPr>
           <a:xfrm>
-            <a:off x="2556722" y="-99032"/>
+            <a:off x="2556722" y="-92079"/>
             <a:ext cx="400595" cy="584775"/>
           </a:xfrm>
           <a:prstGeom prst="rect">
@@ -6288,9 +6864,9 @@
                 <a:solidFill>
                   <a:srgbClr val="09B0AC"/>
                 </a:solidFill>
-                <a:latin typeface="Lato Light" panose="020F0502020204030203" pitchFamily="34" charset="0"/>
+                <a:latin typeface="Times New Roman" panose="02020603050405020304" pitchFamily="18" charset="0"/>
                 <a:ea typeface="Lato Light" panose="020F0502020204030203" pitchFamily="34" charset="0"/>
-                <a:cs typeface="Lato Light" panose="020F0502020204030203" pitchFamily="34" charset="0"/>
+                <a:cs typeface="Times New Roman" panose="02020603050405020304" pitchFamily="18" charset="0"/>
               </a:rPr>
               <a:t>+</a:t>
             </a:r>
@@ -6298,19 +6874,19 @@
               <a:solidFill>
                 <a:srgbClr val="09B0AC"/>
               </a:solidFill>
-              <a:latin typeface="Lato Light" panose="020F0502020204030203" pitchFamily="34" charset="0"/>
+              <a:latin typeface="Times New Roman" panose="02020603050405020304" pitchFamily="18" charset="0"/>
               <a:ea typeface="Lato Light" panose="020F0502020204030203" pitchFamily="34" charset="0"/>
-              <a:cs typeface="Lato Light" panose="020F0502020204030203" pitchFamily="34" charset="0"/>
+              <a:cs typeface="Times New Roman" panose="02020603050405020304" pitchFamily="18" charset="0"/>
             </a:endParaRPr>
           </a:p>
         </p:txBody>
       </p:sp>
       <p:sp>
         <p:nvSpPr>
-          <p:cNvPr id="21" name="Oval 20">
-            <a:extLst>
-              <a:ext uri="{FF2B5EF4-FFF2-40B4-BE49-F238E27FC236}">
-                <a16:creationId xmlns:a16="http://schemas.microsoft.com/office/drawing/2014/main" id="{F70E8FCD-C3B5-8311-4757-C5A65B481E0C}"/>
+          <p:cNvPr id="13" name="Oval 12">
+            <a:extLst>
+              <a:ext uri="{FF2B5EF4-FFF2-40B4-BE49-F238E27FC236}">
+                <a16:creationId xmlns:a16="http://schemas.microsoft.com/office/drawing/2014/main" id="{4565B12B-361E-E85D-FB3F-E73DB09A8A8F}"/>
               </a:ext>
             </a:extLst>
           </p:cNvPr>
@@ -6321,7 +6897,7 @@
         </p:nvSpPr>
         <p:spPr>
           <a:xfrm>
-            <a:off x="166815" y="97261"/>
+            <a:off x="166815" y="104214"/>
             <a:ext cx="1380565" cy="1380565"/>
           </a:xfrm>
           <a:prstGeom prst="ellipse">
@@ -6362,6 +6938,21 @@
                 <a:ea typeface="Lato" panose="020F0502020204030203" pitchFamily="34" charset="0"/>
                 <a:cs typeface="Lato" panose="020F0502020204030203" pitchFamily="34" charset="0"/>
               </a:rPr>
+              <a:t>Work</a:t>
+            </a:r>
+            <a:br>
+              <a:rPr lang="en-US" dirty="0">
+                <a:latin typeface="Lato" panose="020F0502020204030203" pitchFamily="34" charset="0"/>
+                <a:ea typeface="Lato" panose="020F0502020204030203" pitchFamily="34" charset="0"/>
+                <a:cs typeface="Lato" panose="020F0502020204030203" pitchFamily="34" charset="0"/>
+              </a:rPr>
+            </a:br>
+            <a:r>
+              <a:rPr lang="en-US" dirty="0">
+                <a:latin typeface="Lato" panose="020F0502020204030203" pitchFamily="34" charset="0"/>
+                <a:ea typeface="Lato" panose="020F0502020204030203" pitchFamily="34" charset="0"/>
+                <a:cs typeface="Lato" panose="020F0502020204030203" pitchFamily="34" charset="0"/>
+              </a:rPr>
               <a:t>Engagement</a:t>
             </a:r>
             <a:endParaRPr lang="en-NL" dirty="0">
@@ -6374,10 +6965,10 @@
       </p:sp>
       <p:sp>
         <p:nvSpPr>
-          <p:cNvPr id="24" name="Left Bracket 23">
-            <a:extLst>
-              <a:ext uri="{FF2B5EF4-FFF2-40B4-BE49-F238E27FC236}">
-                <a16:creationId xmlns:a16="http://schemas.microsoft.com/office/drawing/2014/main" id="{EC9BFB70-D61B-85E9-EA09-A11E61C27493}"/>
+          <p:cNvPr id="15" name="Left Bracket 14">
+            <a:extLst>
+              <a:ext uri="{FF2B5EF4-FFF2-40B4-BE49-F238E27FC236}">
+                <a16:creationId xmlns:a16="http://schemas.microsoft.com/office/drawing/2014/main" id="{AB008E79-3D23-C6F2-728B-FCEE4AEACF74}"/>
               </a:ext>
             </a:extLst>
           </p:cNvPr>
@@ -6385,8 +6976,8 @@
           <p:nvPr/>
         </p:nvSpPr>
         <p:spPr>
-          <a:xfrm rot="15656625" flipH="1" flipV="1">
-            <a:off x="1821172" y="-172329"/>
+          <a:xfrm rot="4969210" flipH="1">
+            <a:off x="2162338" y="422377"/>
             <a:ext cx="261391" cy="1242586"/>
           </a:xfrm>
           <a:prstGeom prst="leftBracket">
@@ -6394,6 +6985,7 @@
               <a:gd name="adj" fmla="val 237687"/>
             </a:avLst>
           </a:prstGeom>
+          <a:noFill/>
           <a:ln w="38100">
             <a:solidFill>
               <a:srgbClr val="09B0AC"/>
@@ -6426,10 +7018,10 @@
       </p:sp>
       <p:sp>
         <p:nvSpPr>
-          <p:cNvPr id="25" name="Isosceles Triangle 24">
-            <a:extLst>
-              <a:ext uri="{FF2B5EF4-FFF2-40B4-BE49-F238E27FC236}">
-                <a16:creationId xmlns:a16="http://schemas.microsoft.com/office/drawing/2014/main" id="{E287B260-7459-7AC3-DCE3-BAB1A5CF8D85}"/>
+          <p:cNvPr id="16" name="Isosceles Triangle 15">
+            <a:extLst>
+              <a:ext uri="{FF2B5EF4-FFF2-40B4-BE49-F238E27FC236}">
+                <a16:creationId xmlns:a16="http://schemas.microsoft.com/office/drawing/2014/main" id="{7349D770-A474-D65F-3A01-FD337E6C8FEA}"/>
               </a:ext>
             </a:extLst>
           </p:cNvPr>
@@ -6439,8 +7031,8 @@
           <p:nvPr/>
         </p:nvSpPr>
         <p:spPr>
-          <a:xfrm rot="4242162" flipV="1">
-            <a:off x="2436720" y="347019"/>
+          <a:xfrm rot="18902611">
+            <a:off x="1487802" y="878600"/>
             <a:ext cx="240005" cy="216000"/>
           </a:xfrm>
           <a:prstGeom prst="triangle">
@@ -6481,10 +7073,62 @@
       </p:sp>
       <p:sp>
         <p:nvSpPr>
-          <p:cNvPr id="26" name="Oval 25">
-            <a:extLst>
-              <a:ext uri="{FF2B5EF4-FFF2-40B4-BE49-F238E27FC236}">
-                <a16:creationId xmlns:a16="http://schemas.microsoft.com/office/drawing/2014/main" id="{96FD361A-711E-9DEE-2E8E-1BA11EEA94AE}"/>
+          <p:cNvPr id="17" name="Left Bracket 16">
+            <a:extLst>
+              <a:ext uri="{FF2B5EF4-FFF2-40B4-BE49-F238E27FC236}">
+                <a16:creationId xmlns:a16="http://schemas.microsoft.com/office/drawing/2014/main" id="{A27D7E91-9B99-7EEE-24A3-0572D1D010F6}"/>
+              </a:ext>
+            </a:extLst>
+          </p:cNvPr>
+          <p:cNvSpPr/>
+          <p:nvPr/>
+        </p:nvSpPr>
+        <p:spPr>
+          <a:xfrm rot="15656625" flipH="1" flipV="1">
+            <a:off x="1821172" y="-165376"/>
+            <a:ext cx="261391" cy="1242586"/>
+          </a:xfrm>
+          <a:prstGeom prst="leftBracket">
+            <a:avLst>
+              <a:gd name="adj" fmla="val 237687"/>
+            </a:avLst>
+          </a:prstGeom>
+          <a:ln w="38100">
+            <a:solidFill>
+              <a:srgbClr val="09B0AC"/>
+            </a:solidFill>
+          </a:ln>
+          <a:effectLst/>
+        </p:spPr>
+        <p:style>
+          <a:lnRef idx="2">
+            <a:schemeClr val="accent1"/>
+          </a:lnRef>
+          <a:fillRef idx="0">
+            <a:schemeClr val="accent1"/>
+          </a:fillRef>
+          <a:effectRef idx="1">
+            <a:schemeClr val="accent1"/>
+          </a:effectRef>
+          <a:fontRef idx="minor">
+            <a:schemeClr val="tx1"/>
+          </a:fontRef>
+        </p:style>
+        <p:txBody>
+          <a:bodyPr rtlCol="0" anchor="ctr"/>
+          <a:lstStyle/>
+          <a:p>
+            <a:pPr algn="ctr"/>
+            <a:endParaRPr lang="en-NL" dirty="0"/>
+          </a:p>
+        </p:txBody>
+      </p:sp>
+      <p:sp>
+        <p:nvSpPr>
+          <p:cNvPr id="18" name="Isosceles Triangle 17">
+            <a:extLst>
+              <a:ext uri="{FF2B5EF4-FFF2-40B4-BE49-F238E27FC236}">
+                <a16:creationId xmlns:a16="http://schemas.microsoft.com/office/drawing/2014/main" id="{6BF5A8A2-0B50-75B3-8E0B-0298A4A0D1AF}"/>
               </a:ext>
             </a:extLst>
           </p:cNvPr>
@@ -6494,19 +7138,19 @@
           <p:nvPr/>
         </p:nvSpPr>
         <p:spPr>
-          <a:xfrm>
-            <a:off x="2636787" y="165434"/>
-            <a:ext cx="1380565" cy="1380565"/>
-          </a:xfrm>
-          <a:prstGeom prst="ellipse">
+          <a:xfrm rot="4242162" flipV="1">
+            <a:off x="2436720" y="353972"/>
+            <a:ext cx="240005" cy="216000"/>
+          </a:xfrm>
+          <a:prstGeom prst="triangle">
             <a:avLst/>
           </a:prstGeom>
           <a:solidFill>
-            <a:srgbClr val="B4771A"/>
+            <a:srgbClr val="09B0AC"/>
           </a:solidFill>
-          <a:ln w="19050">
+          <a:ln>
             <a:solidFill>
-              <a:srgbClr val="B4771A"/>
+              <a:srgbClr val="09B0AC"/>
             </a:solidFill>
           </a:ln>
           <a:effectLst/>
@@ -6526,12 +7170,67 @@
           </a:fontRef>
         </p:style>
         <p:txBody>
+          <a:bodyPr rtlCol="0" anchor="ctr"/>
+          <a:lstStyle/>
+          <a:p>
+            <a:pPr algn="ctr"/>
+            <a:endParaRPr lang="en-NL"/>
+          </a:p>
+        </p:txBody>
+      </p:sp>
+      <p:sp>
+        <p:nvSpPr>
+          <p:cNvPr id="14" name="Oval 13">
+            <a:extLst>
+              <a:ext uri="{FF2B5EF4-FFF2-40B4-BE49-F238E27FC236}">
+                <a16:creationId xmlns:a16="http://schemas.microsoft.com/office/drawing/2014/main" id="{B0BFAD6E-BC6A-18D5-BB04-E4130ECF1462}"/>
+              </a:ext>
+            </a:extLst>
+          </p:cNvPr>
+          <p:cNvSpPr>
+            <a:spLocks noChangeAspect="1"/>
+          </p:cNvSpPr>
+          <p:nvPr/>
+        </p:nvSpPr>
+        <p:spPr>
+          <a:xfrm>
+            <a:off x="2636787" y="172387"/>
+            <a:ext cx="1380565" cy="1380565"/>
+          </a:xfrm>
+          <a:prstGeom prst="ellipse">
+            <a:avLst/>
+          </a:prstGeom>
+          <a:solidFill>
+            <a:srgbClr val="09B0AC"/>
+          </a:solidFill>
+          <a:ln w="19050">
+            <a:solidFill>
+              <a:srgbClr val="09B0AC"/>
+            </a:solidFill>
+          </a:ln>
+          <a:effectLst/>
+        </p:spPr>
+        <p:style>
+          <a:lnRef idx="1">
+            <a:schemeClr val="accent1"/>
+          </a:lnRef>
+          <a:fillRef idx="3">
+            <a:schemeClr val="accent1"/>
+          </a:fillRef>
+          <a:effectRef idx="2">
+            <a:schemeClr val="accent1"/>
+          </a:effectRef>
+          <a:fontRef idx="minor">
+            <a:schemeClr val="lt1"/>
+          </a:fontRef>
+        </p:style>
+        <p:txBody>
           <a:bodyPr wrap="none" lIns="0" tIns="0" rIns="0" bIns="0" rtlCol="0" anchor="ctr"/>
           <a:lstStyle/>
           <a:p>
             <a:pPr algn="ctr"/>
             <a:r>
-              <a:rPr lang="en-US" sz="1700" dirty="0">
+              <a:rPr lang="en-US" dirty="0">
                 <a:latin typeface="Lato" panose="020F0502020204030203" pitchFamily="34" charset="0"/>
                 <a:ea typeface="Lato" panose="020F0502020204030203" pitchFamily="34" charset="0"/>
                 <a:cs typeface="Lato" panose="020F0502020204030203" pitchFamily="34" charset="0"/>
@@ -6539,21 +7238,21 @@
               <a:t>Job </a:t>
             </a:r>
             <a:br>
-              <a:rPr lang="en-US" sz="1700" dirty="0">
+              <a:rPr lang="en-US" dirty="0">
                 <a:latin typeface="Lato" panose="020F0502020204030203" pitchFamily="34" charset="0"/>
                 <a:ea typeface="Lato" panose="020F0502020204030203" pitchFamily="34" charset="0"/>
                 <a:cs typeface="Lato" panose="020F0502020204030203" pitchFamily="34" charset="0"/>
               </a:rPr>
             </a:br>
             <a:r>
-              <a:rPr lang="en-US" sz="1700" dirty="0">
+              <a:rPr lang="en-US" dirty="0">
                 <a:latin typeface="Lato" panose="020F0502020204030203" pitchFamily="34" charset="0"/>
                 <a:ea typeface="Lato" panose="020F0502020204030203" pitchFamily="34" charset="0"/>
                 <a:cs typeface="Lato" panose="020F0502020204030203" pitchFamily="34" charset="0"/>
               </a:rPr>
-              <a:t>Performance</a:t>
-            </a:r>
-            <a:endParaRPr lang="en-NL" sz="1700" dirty="0">
+              <a:t>Resources</a:t>
+            </a:r>
+            <a:endParaRPr lang="en-NL" dirty="0">
               <a:latin typeface="Lato" panose="020F0502020204030203" pitchFamily="34" charset="0"/>
               <a:ea typeface="Lato" panose="020F0502020204030203" pitchFamily="34" charset="0"/>
               <a:cs typeface="Lato" panose="020F0502020204030203" pitchFamily="34" charset="0"/>
@@ -6561,10 +7260,60 @@
           </a:p>
         </p:txBody>
       </p:sp>
+      <p:sp>
+        <p:nvSpPr>
+          <p:cNvPr id="19" name="TextBox 18">
+            <a:extLst>
+              <a:ext uri="{FF2B5EF4-FFF2-40B4-BE49-F238E27FC236}">
+                <a16:creationId xmlns:a16="http://schemas.microsoft.com/office/drawing/2014/main" id="{CFDB3A79-1E77-8002-FBFB-545C79331E45}"/>
+              </a:ext>
+            </a:extLst>
+          </p:cNvPr>
+          <p:cNvSpPr txBox="1"/>
+          <p:nvPr/>
+        </p:nvSpPr>
+        <p:spPr>
+          <a:xfrm>
+            <a:off x="1317747" y="1026353"/>
+            <a:ext cx="400595" cy="584775"/>
+          </a:xfrm>
+          <a:prstGeom prst="rect">
+            <a:avLst/>
+          </a:prstGeom>
+          <a:noFill/>
+        </p:spPr>
+        <p:txBody>
+          <a:bodyPr wrap="square" rtlCol="0">
+            <a:spAutoFit/>
+          </a:bodyPr>
+          <a:lstStyle/>
+          <a:p>
+            <a:r>
+              <a:rPr lang="en-US" sz="3200" dirty="0">
+                <a:solidFill>
+                  <a:srgbClr val="09B0AC"/>
+                </a:solidFill>
+                <a:latin typeface="Times New Roman" panose="02020603050405020304" pitchFamily="18" charset="0"/>
+                <a:ea typeface="Lato Light" panose="020F0502020204030203" pitchFamily="34" charset="0"/>
+                <a:cs typeface="Times New Roman" panose="02020603050405020304" pitchFamily="18" charset="0"/>
+              </a:rPr>
+              <a:t>+</a:t>
+            </a:r>
+            <a:endParaRPr lang="en-NL" sz="3200" dirty="0">
+              <a:solidFill>
+                <a:srgbClr val="09B0AC"/>
+              </a:solidFill>
+              <a:latin typeface="Times New Roman" panose="02020603050405020304" pitchFamily="18" charset="0"/>
+              <a:ea typeface="Lato Light" panose="020F0502020204030203" pitchFamily="34" charset="0"/>
+              <a:cs typeface="Times New Roman" panose="02020603050405020304" pitchFamily="18" charset="0"/>
+            </a:endParaRPr>
+          </a:p>
+        </p:txBody>
+      </p:sp>
     </p:spTree>
     <p:extLst>
       <p:ext uri="{BB962C8B-B14F-4D97-AF65-F5344CB8AC3E}">
-        <p14:creationId xmlns:p14="http://schemas.microsoft.com/office/powerpoint/2010/main" val="3818576943"/>
+        <p14:creationId xmlns:p14="http://schemas.microsoft.com/office/powerpoint/2010/main" val="3012716665"/>
       </p:ext>
     </p:extLst>
   </p:cSld>
@@ -6593,60 +7342,10 @@
       </p:grpSpPr>
       <p:sp>
         <p:nvSpPr>
-          <p:cNvPr id="12" name="TextBox 11">
-            <a:extLst>
-              <a:ext uri="{FF2B5EF4-FFF2-40B4-BE49-F238E27FC236}">
-                <a16:creationId xmlns:a16="http://schemas.microsoft.com/office/drawing/2014/main" id="{4E949153-57EE-C077-453A-A9A97AF092D2}"/>
-              </a:ext>
-            </a:extLst>
-          </p:cNvPr>
-          <p:cNvSpPr txBox="1"/>
-          <p:nvPr/>
-        </p:nvSpPr>
-        <p:spPr>
-          <a:xfrm>
-            <a:off x="2556722" y="-92079"/>
-            <a:ext cx="400595" cy="584775"/>
-          </a:xfrm>
-          <a:prstGeom prst="rect">
-            <a:avLst/>
-          </a:prstGeom>
-          <a:noFill/>
-        </p:spPr>
-        <p:txBody>
-          <a:bodyPr wrap="square" rtlCol="0">
-            <a:spAutoFit/>
-          </a:bodyPr>
-          <a:lstStyle/>
-          <a:p>
-            <a:r>
-              <a:rPr lang="en-US" sz="3200" dirty="0">
-                <a:solidFill>
-                  <a:srgbClr val="09B0AC"/>
-                </a:solidFill>
-                <a:latin typeface="Lato Light" panose="020F0502020204030203" pitchFamily="34" charset="0"/>
-                <a:ea typeface="Lato Light" panose="020F0502020204030203" pitchFamily="34" charset="0"/>
-                <a:cs typeface="Lato Light" panose="020F0502020204030203" pitchFamily="34" charset="0"/>
-              </a:rPr>
-              <a:t>+</a:t>
-            </a:r>
-            <a:endParaRPr lang="en-NL" sz="3200" dirty="0">
-              <a:solidFill>
-                <a:srgbClr val="09B0AC"/>
-              </a:solidFill>
-              <a:latin typeface="Lato Light" panose="020F0502020204030203" pitchFamily="34" charset="0"/>
-              <a:ea typeface="Lato Light" panose="020F0502020204030203" pitchFamily="34" charset="0"/>
-              <a:cs typeface="Lato Light" panose="020F0502020204030203" pitchFamily="34" charset="0"/>
-            </a:endParaRPr>
-          </a:p>
-        </p:txBody>
-      </p:sp>
-      <p:sp>
-        <p:nvSpPr>
-          <p:cNvPr id="13" name="Oval 12">
-            <a:extLst>
-              <a:ext uri="{FF2B5EF4-FFF2-40B4-BE49-F238E27FC236}">
-                <a16:creationId xmlns:a16="http://schemas.microsoft.com/office/drawing/2014/main" id="{727E59FA-1079-3EE2-3F54-7561BE643485}"/>
+          <p:cNvPr id="21" name="Oval 20">
+            <a:extLst>
+              <a:ext uri="{FF2B5EF4-FFF2-40B4-BE49-F238E27FC236}">
+                <a16:creationId xmlns:a16="http://schemas.microsoft.com/office/drawing/2014/main" id="{F70E8FCD-C3B5-8311-4757-C5A65B481E0C}"/>
               </a:ext>
             </a:extLst>
           </p:cNvPr>
@@ -6657,7 +7356,7 @@
         </p:nvSpPr>
         <p:spPr>
           <a:xfrm>
-            <a:off x="166815" y="104214"/>
+            <a:off x="166815" y="97261"/>
             <a:ext cx="1380565" cy="1380565"/>
           </a:xfrm>
           <a:prstGeom prst="ellipse">
@@ -6698,6 +7397,372 @@
                 <a:ea typeface="Lato" panose="020F0502020204030203" pitchFamily="34" charset="0"/>
                 <a:cs typeface="Lato" panose="020F0502020204030203" pitchFamily="34" charset="0"/>
               </a:rPr>
+              <a:t>Work</a:t>
+            </a:r>
+            <a:br>
+              <a:rPr lang="en-US" dirty="0">
+                <a:latin typeface="Lato" panose="020F0502020204030203" pitchFamily="34" charset="0"/>
+                <a:ea typeface="Lato" panose="020F0502020204030203" pitchFamily="34" charset="0"/>
+                <a:cs typeface="Lato" panose="020F0502020204030203" pitchFamily="34" charset="0"/>
+              </a:rPr>
+            </a:br>
+            <a:r>
+              <a:rPr lang="en-US" dirty="0">
+                <a:latin typeface="Lato" panose="020F0502020204030203" pitchFamily="34" charset="0"/>
+                <a:ea typeface="Lato" panose="020F0502020204030203" pitchFamily="34" charset="0"/>
+                <a:cs typeface="Lato" panose="020F0502020204030203" pitchFamily="34" charset="0"/>
+              </a:rPr>
+              <a:t>Engagement</a:t>
+            </a:r>
+            <a:endParaRPr lang="en-NL" dirty="0">
+              <a:latin typeface="Lato" panose="020F0502020204030203" pitchFamily="34" charset="0"/>
+              <a:ea typeface="Lato" panose="020F0502020204030203" pitchFamily="34" charset="0"/>
+              <a:cs typeface="Lato" panose="020F0502020204030203" pitchFamily="34" charset="0"/>
+            </a:endParaRPr>
+          </a:p>
+        </p:txBody>
+      </p:sp>
+      <p:sp>
+        <p:nvSpPr>
+          <p:cNvPr id="24" name="Left Bracket 23">
+            <a:extLst>
+              <a:ext uri="{FF2B5EF4-FFF2-40B4-BE49-F238E27FC236}">
+                <a16:creationId xmlns:a16="http://schemas.microsoft.com/office/drawing/2014/main" id="{EC9BFB70-D61B-85E9-EA09-A11E61C27493}"/>
+              </a:ext>
+            </a:extLst>
+          </p:cNvPr>
+          <p:cNvSpPr/>
+          <p:nvPr/>
+        </p:nvSpPr>
+        <p:spPr>
+          <a:xfrm rot="15656625" flipH="1" flipV="1">
+            <a:off x="1821172" y="-172329"/>
+            <a:ext cx="261391" cy="1242586"/>
+          </a:xfrm>
+          <a:prstGeom prst="leftBracket">
+            <a:avLst>
+              <a:gd name="adj" fmla="val 237687"/>
+            </a:avLst>
+          </a:prstGeom>
+          <a:ln w="38100">
+            <a:solidFill>
+              <a:srgbClr val="09B0AC"/>
+            </a:solidFill>
+          </a:ln>
+          <a:effectLst/>
+        </p:spPr>
+        <p:style>
+          <a:lnRef idx="2">
+            <a:schemeClr val="accent1"/>
+          </a:lnRef>
+          <a:fillRef idx="0">
+            <a:schemeClr val="accent1"/>
+          </a:fillRef>
+          <a:effectRef idx="1">
+            <a:schemeClr val="accent1"/>
+          </a:effectRef>
+          <a:fontRef idx="minor">
+            <a:schemeClr val="tx1"/>
+          </a:fontRef>
+        </p:style>
+        <p:txBody>
+          <a:bodyPr rtlCol="0" anchor="ctr"/>
+          <a:lstStyle/>
+          <a:p>
+            <a:pPr algn="ctr"/>
+            <a:endParaRPr lang="en-NL" dirty="0"/>
+          </a:p>
+        </p:txBody>
+      </p:sp>
+      <p:sp>
+        <p:nvSpPr>
+          <p:cNvPr id="25" name="Isosceles Triangle 24">
+            <a:extLst>
+              <a:ext uri="{FF2B5EF4-FFF2-40B4-BE49-F238E27FC236}">
+                <a16:creationId xmlns:a16="http://schemas.microsoft.com/office/drawing/2014/main" id="{E287B260-7459-7AC3-DCE3-BAB1A5CF8D85}"/>
+              </a:ext>
+            </a:extLst>
+          </p:cNvPr>
+          <p:cNvSpPr>
+            <a:spLocks noChangeAspect="1"/>
+          </p:cNvSpPr>
+          <p:nvPr/>
+        </p:nvSpPr>
+        <p:spPr>
+          <a:xfrm rot="4242162" flipV="1">
+            <a:off x="2436720" y="347019"/>
+            <a:ext cx="240005" cy="216000"/>
+          </a:xfrm>
+          <a:prstGeom prst="triangle">
+            <a:avLst/>
+          </a:prstGeom>
+          <a:solidFill>
+            <a:srgbClr val="09B0AC"/>
+          </a:solidFill>
+          <a:ln>
+            <a:solidFill>
+              <a:srgbClr val="09B0AC"/>
+            </a:solidFill>
+          </a:ln>
+          <a:effectLst/>
+        </p:spPr>
+        <p:style>
+          <a:lnRef idx="1">
+            <a:schemeClr val="accent1"/>
+          </a:lnRef>
+          <a:fillRef idx="3">
+            <a:schemeClr val="accent1"/>
+          </a:fillRef>
+          <a:effectRef idx="2">
+            <a:schemeClr val="accent1"/>
+          </a:effectRef>
+          <a:fontRef idx="minor">
+            <a:schemeClr val="lt1"/>
+          </a:fontRef>
+        </p:style>
+        <p:txBody>
+          <a:bodyPr rtlCol="0" anchor="ctr"/>
+          <a:lstStyle/>
+          <a:p>
+            <a:pPr algn="ctr"/>
+            <a:endParaRPr lang="en-NL"/>
+          </a:p>
+        </p:txBody>
+      </p:sp>
+      <p:sp>
+        <p:nvSpPr>
+          <p:cNvPr id="26" name="Oval 25">
+            <a:extLst>
+              <a:ext uri="{FF2B5EF4-FFF2-40B4-BE49-F238E27FC236}">
+                <a16:creationId xmlns:a16="http://schemas.microsoft.com/office/drawing/2014/main" id="{96FD361A-711E-9DEE-2E8E-1BA11EEA94AE}"/>
+              </a:ext>
+            </a:extLst>
+          </p:cNvPr>
+          <p:cNvSpPr>
+            <a:spLocks noChangeAspect="1"/>
+          </p:cNvSpPr>
+          <p:nvPr/>
+        </p:nvSpPr>
+        <p:spPr>
+          <a:xfrm>
+            <a:off x="2636787" y="165434"/>
+            <a:ext cx="1380565" cy="1380565"/>
+          </a:xfrm>
+          <a:prstGeom prst="ellipse">
+            <a:avLst/>
+          </a:prstGeom>
+          <a:solidFill>
+            <a:srgbClr val="B4771A"/>
+          </a:solidFill>
+          <a:ln w="19050">
+            <a:solidFill>
+              <a:srgbClr val="B4771A"/>
+            </a:solidFill>
+          </a:ln>
+          <a:effectLst/>
+        </p:spPr>
+        <p:style>
+          <a:lnRef idx="1">
+            <a:schemeClr val="accent1"/>
+          </a:lnRef>
+          <a:fillRef idx="3">
+            <a:schemeClr val="accent1"/>
+          </a:fillRef>
+          <a:effectRef idx="2">
+            <a:schemeClr val="accent1"/>
+          </a:effectRef>
+          <a:fontRef idx="minor">
+            <a:schemeClr val="lt1"/>
+          </a:fontRef>
+        </p:style>
+        <p:txBody>
+          <a:bodyPr wrap="none" lIns="0" tIns="0" rIns="0" bIns="0" rtlCol="0" anchor="ctr"/>
+          <a:lstStyle/>
+          <a:p>
+            <a:pPr algn="ctr"/>
+            <a:r>
+              <a:rPr lang="en-US" sz="1700" dirty="0">
+                <a:latin typeface="Lato" panose="020F0502020204030203" pitchFamily="34" charset="0"/>
+                <a:ea typeface="Lato" panose="020F0502020204030203" pitchFamily="34" charset="0"/>
+                <a:cs typeface="Lato" panose="020F0502020204030203" pitchFamily="34" charset="0"/>
+              </a:rPr>
+              <a:t>Job </a:t>
+            </a:r>
+            <a:br>
+              <a:rPr lang="en-US" sz="1700" dirty="0">
+                <a:latin typeface="Lato" panose="020F0502020204030203" pitchFamily="34" charset="0"/>
+                <a:ea typeface="Lato" panose="020F0502020204030203" pitchFamily="34" charset="0"/>
+                <a:cs typeface="Lato" panose="020F0502020204030203" pitchFamily="34" charset="0"/>
+              </a:rPr>
+            </a:br>
+            <a:r>
+              <a:rPr lang="en-US" sz="1700" dirty="0">
+                <a:latin typeface="Lato" panose="020F0502020204030203" pitchFamily="34" charset="0"/>
+                <a:ea typeface="Lato" panose="020F0502020204030203" pitchFamily="34" charset="0"/>
+                <a:cs typeface="Lato" panose="020F0502020204030203" pitchFamily="34" charset="0"/>
+              </a:rPr>
+              <a:t>Performance</a:t>
+            </a:r>
+            <a:endParaRPr lang="en-NL" sz="1700" dirty="0">
+              <a:latin typeface="Lato" panose="020F0502020204030203" pitchFamily="34" charset="0"/>
+              <a:ea typeface="Lato" panose="020F0502020204030203" pitchFamily="34" charset="0"/>
+              <a:cs typeface="Lato" panose="020F0502020204030203" pitchFamily="34" charset="0"/>
+            </a:endParaRPr>
+          </a:p>
+        </p:txBody>
+      </p:sp>
+      <p:sp>
+        <p:nvSpPr>
+          <p:cNvPr id="2" name="TextBox 1">
+            <a:extLst>
+              <a:ext uri="{FF2B5EF4-FFF2-40B4-BE49-F238E27FC236}">
+                <a16:creationId xmlns:a16="http://schemas.microsoft.com/office/drawing/2014/main" id="{6310DF98-F002-70C1-BE4C-27054565ADC0}"/>
+              </a:ext>
+            </a:extLst>
+          </p:cNvPr>
+          <p:cNvSpPr txBox="1"/>
+          <p:nvPr/>
+        </p:nvSpPr>
+        <p:spPr>
+          <a:xfrm>
+            <a:off x="2556722" y="-92079"/>
+            <a:ext cx="400595" cy="584775"/>
+          </a:xfrm>
+          <a:prstGeom prst="rect">
+            <a:avLst/>
+          </a:prstGeom>
+          <a:noFill/>
+        </p:spPr>
+        <p:txBody>
+          <a:bodyPr wrap="square" rtlCol="0">
+            <a:spAutoFit/>
+          </a:bodyPr>
+          <a:lstStyle/>
+          <a:p>
+            <a:r>
+              <a:rPr lang="en-US" sz="3200" dirty="0">
+                <a:solidFill>
+                  <a:srgbClr val="09B0AC"/>
+                </a:solidFill>
+                <a:latin typeface="Times New Roman" panose="02020603050405020304" pitchFamily="18" charset="0"/>
+                <a:ea typeface="Lato Light" panose="020F0502020204030203" pitchFamily="34" charset="0"/>
+                <a:cs typeface="Times New Roman" panose="02020603050405020304" pitchFamily="18" charset="0"/>
+              </a:rPr>
+              <a:t>+</a:t>
+            </a:r>
+            <a:endParaRPr lang="en-NL" sz="3200" dirty="0">
+              <a:solidFill>
+                <a:srgbClr val="09B0AC"/>
+              </a:solidFill>
+              <a:latin typeface="Times New Roman" panose="02020603050405020304" pitchFamily="18" charset="0"/>
+              <a:ea typeface="Lato Light" panose="020F0502020204030203" pitchFamily="34" charset="0"/>
+              <a:cs typeface="Times New Roman" panose="02020603050405020304" pitchFamily="18" charset="0"/>
+            </a:endParaRPr>
+          </a:p>
+        </p:txBody>
+      </p:sp>
+    </p:spTree>
+    <p:extLst>
+      <p:ext uri="{BB962C8B-B14F-4D97-AF65-F5344CB8AC3E}">
+        <p14:creationId xmlns:p14="http://schemas.microsoft.com/office/powerpoint/2010/main" val="3818576943"/>
+      </p:ext>
+    </p:extLst>
+  </p:cSld>
+  <p:clrMapOvr>
+    <a:masterClrMapping/>
+  </p:clrMapOvr>
+</p:sld>
+</file>
+
+<file path=ppt/slides/slide5.xml><?xml version="1.0" encoding="utf-8"?>
+<p:sld xmlns:a="http://schemas.openxmlformats.org/drawingml/2006/main" xmlns:r="http://schemas.openxmlformats.org/officeDocument/2006/relationships" xmlns:p="http://schemas.openxmlformats.org/presentationml/2006/main">
+  <p:cSld>
+    <p:spTree>
+      <p:nvGrpSpPr>
+        <p:cNvPr id="1" name=""/>
+        <p:cNvGrpSpPr/>
+        <p:nvPr/>
+      </p:nvGrpSpPr>
+      <p:grpSpPr>
+        <a:xfrm>
+          <a:off x="0" y="0"/>
+          <a:ext cx="0" cy="0"/>
+          <a:chOff x="0" y="0"/>
+          <a:chExt cx="0" cy="0"/>
+        </a:xfrm>
+      </p:grpSpPr>
+      <p:sp>
+        <p:nvSpPr>
+          <p:cNvPr id="13" name="Oval 12">
+            <a:extLst>
+              <a:ext uri="{FF2B5EF4-FFF2-40B4-BE49-F238E27FC236}">
+                <a16:creationId xmlns:a16="http://schemas.microsoft.com/office/drawing/2014/main" id="{727E59FA-1079-3EE2-3F54-7561BE643485}"/>
+              </a:ext>
+            </a:extLst>
+          </p:cNvPr>
+          <p:cNvSpPr>
+            <a:spLocks noChangeAspect="1"/>
+          </p:cNvSpPr>
+          <p:nvPr/>
+        </p:nvSpPr>
+        <p:spPr>
+          <a:xfrm>
+            <a:off x="166815" y="104214"/>
+            <a:ext cx="1380565" cy="1380565"/>
+          </a:xfrm>
+          <a:prstGeom prst="ellipse">
+            <a:avLst/>
+          </a:prstGeom>
+          <a:solidFill>
+            <a:srgbClr val="09B0AC"/>
+          </a:solidFill>
+          <a:ln w="19050">
+            <a:solidFill>
+              <a:srgbClr val="09B0AC"/>
+            </a:solidFill>
+          </a:ln>
+          <a:effectLst/>
+        </p:spPr>
+        <p:style>
+          <a:lnRef idx="1">
+            <a:schemeClr val="accent1"/>
+          </a:lnRef>
+          <a:fillRef idx="3">
+            <a:schemeClr val="accent1"/>
+          </a:fillRef>
+          <a:effectRef idx="2">
+            <a:schemeClr val="accent1"/>
+          </a:effectRef>
+          <a:fontRef idx="minor">
+            <a:schemeClr val="lt1"/>
+          </a:fontRef>
+        </p:style>
+        <p:txBody>
+          <a:bodyPr wrap="none" lIns="0" tIns="0" rIns="0" bIns="0" rtlCol="0" anchor="ctr"/>
+          <a:lstStyle/>
+          <a:p>
+            <a:pPr algn="ctr"/>
+            <a:r>
+              <a:rPr lang="en-US" dirty="0">
+                <a:latin typeface="Lato" panose="020F0502020204030203" pitchFamily="34" charset="0"/>
+                <a:ea typeface="Lato" panose="020F0502020204030203" pitchFamily="34" charset="0"/>
+                <a:cs typeface="Lato" panose="020F0502020204030203" pitchFamily="34" charset="0"/>
+              </a:rPr>
+              <a:t>Work</a:t>
+            </a:r>
+            <a:br>
+              <a:rPr lang="en-US" dirty="0">
+                <a:latin typeface="Lato" panose="020F0502020204030203" pitchFamily="34" charset="0"/>
+                <a:ea typeface="Lato" panose="020F0502020204030203" pitchFamily="34" charset="0"/>
+                <a:cs typeface="Lato" panose="020F0502020204030203" pitchFamily="34" charset="0"/>
+              </a:rPr>
+            </a:br>
+            <a:r>
+              <a:rPr lang="en-US" dirty="0">
+                <a:latin typeface="Lato" panose="020F0502020204030203" pitchFamily="34" charset="0"/>
+                <a:ea typeface="Lato" panose="020F0502020204030203" pitchFamily="34" charset="0"/>
+                <a:cs typeface="Lato" panose="020F0502020204030203" pitchFamily="34" charset="0"/>
+              </a:rPr>
               <a:t>Engagement</a:t>
             </a:r>
             <a:endParaRPr lang="en-NL" dirty="0">
@@ -7007,10 +8072,10 @@
       </p:sp>
       <p:sp>
         <p:nvSpPr>
-          <p:cNvPr id="19" name="TextBox 18">
-            <a:extLst>
-              <a:ext uri="{FF2B5EF4-FFF2-40B4-BE49-F238E27FC236}">
-                <a16:creationId xmlns:a16="http://schemas.microsoft.com/office/drawing/2014/main" id="{BC05E588-E9C4-68E0-658E-61D04C434D28}"/>
+          <p:cNvPr id="2" name="TextBox 1">
+            <a:extLst>
+              <a:ext uri="{FF2B5EF4-FFF2-40B4-BE49-F238E27FC236}">
+                <a16:creationId xmlns:a16="http://schemas.microsoft.com/office/drawing/2014/main" id="{DD31B63F-7BF3-9B58-D722-75A0E71E57D5}"/>
               </a:ext>
             </a:extLst>
           </p:cNvPr>
@@ -7019,7 +8084,7 @@
         </p:nvSpPr>
         <p:spPr>
           <a:xfrm>
-            <a:off x="1317747" y="1026353"/>
+            <a:off x="2556722" y="-92079"/>
             <a:ext cx="400595" cy="584775"/>
           </a:xfrm>
           <a:prstGeom prst="rect">
@@ -7036,11 +8101,61 @@
             <a:r>
               <a:rPr lang="en-US" sz="3200" dirty="0">
                 <a:solidFill>
+                  <a:srgbClr val="09B0AC"/>
+                </a:solidFill>
+                <a:latin typeface="Times New Roman" panose="02020603050405020304" pitchFamily="18" charset="0"/>
+                <a:ea typeface="Lato Light" panose="020F0502020204030203" pitchFamily="34" charset="0"/>
+                <a:cs typeface="Times New Roman" panose="02020603050405020304" pitchFamily="18" charset="0"/>
+              </a:rPr>
+              <a:t>+</a:t>
+            </a:r>
+            <a:endParaRPr lang="en-NL" sz="3200" dirty="0">
+              <a:solidFill>
+                <a:srgbClr val="09B0AC"/>
+              </a:solidFill>
+              <a:latin typeface="Times New Roman" panose="02020603050405020304" pitchFamily="18" charset="0"/>
+              <a:ea typeface="Lato Light" panose="020F0502020204030203" pitchFamily="34" charset="0"/>
+              <a:cs typeface="Times New Roman" panose="02020603050405020304" pitchFamily="18" charset="0"/>
+            </a:endParaRPr>
+          </a:p>
+        </p:txBody>
+      </p:sp>
+      <p:sp>
+        <p:nvSpPr>
+          <p:cNvPr id="3" name="TextBox 2">
+            <a:extLst>
+              <a:ext uri="{FF2B5EF4-FFF2-40B4-BE49-F238E27FC236}">
+                <a16:creationId xmlns:a16="http://schemas.microsoft.com/office/drawing/2014/main" id="{BEC0ED95-21FE-B4D8-EF3F-6754BF63EC37}"/>
+              </a:ext>
+            </a:extLst>
+          </p:cNvPr>
+          <p:cNvSpPr txBox="1"/>
+          <p:nvPr/>
+        </p:nvSpPr>
+        <p:spPr>
+          <a:xfrm>
+            <a:off x="1317747" y="1026353"/>
+            <a:ext cx="400595" cy="584775"/>
+          </a:xfrm>
+          <a:prstGeom prst="rect">
+            <a:avLst/>
+          </a:prstGeom>
+          <a:noFill/>
+        </p:spPr>
+        <p:txBody>
+          <a:bodyPr wrap="square" rtlCol="0">
+            <a:spAutoFit/>
+          </a:bodyPr>
+          <a:lstStyle/>
+          <a:p>
+            <a:r>
+              <a:rPr lang="en-US" sz="3200" dirty="0">
+                <a:solidFill>
                   <a:srgbClr val="B4771A"/>
                 </a:solidFill>
-                <a:latin typeface="Lato Light" panose="020F0502020204030203" pitchFamily="34" charset="0"/>
+                <a:latin typeface="Times New Roman" panose="02020603050405020304" pitchFamily="18" charset="0"/>
                 <a:ea typeface="Lato Light" panose="020F0502020204030203" pitchFamily="34" charset="0"/>
-                <a:cs typeface="Lato Light" panose="020F0502020204030203" pitchFamily="34" charset="0"/>
+                <a:cs typeface="Times New Roman" panose="02020603050405020304" pitchFamily="18" charset="0"/>
               </a:rPr>
               <a:t>+</a:t>
             </a:r>
@@ -7048,9 +8163,9 @@
               <a:solidFill>
                 <a:srgbClr val="B4771A"/>
               </a:solidFill>
-              <a:latin typeface="Lato Light" panose="020F0502020204030203" pitchFamily="34" charset="0"/>
+              <a:latin typeface="Times New Roman" panose="02020603050405020304" pitchFamily="18" charset="0"/>
               <a:ea typeface="Lato Light" panose="020F0502020204030203" pitchFamily="34" charset="0"/>
-              <a:cs typeface="Lato Light" panose="020F0502020204030203" pitchFamily="34" charset="0"/>
+              <a:cs typeface="Times New Roman" panose="02020603050405020304" pitchFamily="18" charset="0"/>
             </a:endParaRPr>
           </a:p>
         </p:txBody>
@@ -7068,7 +8183,7 @@
 </p:sld>
 </file>
 
-<file path=ppt/slides/slide5.xml><?xml version="1.0" encoding="utf-8"?>
+<file path=ppt/slides/slide6.xml><?xml version="1.0" encoding="utf-8"?>
 <p:sld xmlns:a="http://schemas.openxmlformats.org/drawingml/2006/main" xmlns:r="http://schemas.openxmlformats.org/officeDocument/2006/relationships" xmlns:p="http://schemas.openxmlformats.org/presentationml/2006/main">
   <p:cSld>
     <p:spTree>
@@ -7709,7 +8824,9 @@
             <a:srgbClr val="09B0AC"/>
           </a:solidFill>
           <a:ln>
-            <a:noFill/>
+            <a:solidFill>
+              <a:srgbClr val="09B0AC"/>
+            </a:solidFill>
           </a:ln>
           <a:effectLst/>
         </p:spPr>
@@ -8104,8 +9221,3160 @@
 </p:sld>
 </file>
 
-<file path=ppt/slides/slide6.xml><?xml version="1.0" encoding="utf-8"?>
-<p:sld xmlns:a="http://schemas.openxmlformats.org/drawingml/2006/main" xmlns:r="http://schemas.openxmlformats.org/officeDocument/2006/relationships" xmlns:p="http://schemas.openxmlformats.org/presentationml/2006/main">
+<file path=ppt/slides/slide7.xml><?xml version="1.0" encoding="utf-8"?>
+<p:sld xmlns:a="http://schemas.openxmlformats.org/drawingml/2006/main" xmlns:r="http://schemas.openxmlformats.org/officeDocument/2006/relationships" xmlns:p="http://schemas.openxmlformats.org/presentationml/2006/main" show="0">
+  <p:cSld>
+    <p:spTree>
+      <p:nvGrpSpPr>
+        <p:cNvPr id="1" name="">
+          <a:extLst>
+            <a:ext uri="{FF2B5EF4-FFF2-40B4-BE49-F238E27FC236}">
+              <a16:creationId xmlns:a16="http://schemas.microsoft.com/office/drawing/2014/main" id="{F9224F5F-4D70-EC07-0CAF-A42DC922FDEB}"/>
+            </a:ext>
+          </a:extLst>
+        </p:cNvPr>
+        <p:cNvGrpSpPr/>
+        <p:nvPr/>
+      </p:nvGrpSpPr>
+      <p:grpSpPr>
+        <a:xfrm>
+          <a:off x="0" y="0"/>
+          <a:ext cx="0" cy="0"/>
+          <a:chOff x="0" y="0"/>
+          <a:chExt cx="0" cy="0"/>
+        </a:xfrm>
+      </p:grpSpPr>
+      <p:sp>
+        <p:nvSpPr>
+          <p:cNvPr id="40" name="TextBox 39">
+            <a:extLst>
+              <a:ext uri="{FF2B5EF4-FFF2-40B4-BE49-F238E27FC236}">
+                <a16:creationId xmlns:a16="http://schemas.microsoft.com/office/drawing/2014/main" id="{3CB5C776-7F4A-BFAF-FF6F-80F2D54E7EA5}"/>
+              </a:ext>
+            </a:extLst>
+          </p:cNvPr>
+          <p:cNvSpPr txBox="1"/>
+          <p:nvPr/>
+        </p:nvSpPr>
+        <p:spPr>
+          <a:xfrm>
+            <a:off x="1464536" y="1138361"/>
+            <a:ext cx="400595" cy="584775"/>
+          </a:xfrm>
+          <a:prstGeom prst="rect">
+            <a:avLst/>
+          </a:prstGeom>
+          <a:noFill/>
+        </p:spPr>
+        <p:txBody>
+          <a:bodyPr wrap="square" rtlCol="0">
+            <a:spAutoFit/>
+          </a:bodyPr>
+          <a:lstStyle/>
+          <a:p>
+            <a:r>
+              <a:rPr lang="en-US" sz="3200" dirty="0">
+                <a:solidFill>
+                  <a:srgbClr val="09B0AC"/>
+                </a:solidFill>
+                <a:latin typeface="Lato Light" panose="020F0502020204030203" pitchFamily="34" charset="0"/>
+                <a:ea typeface="Lato Light" panose="020F0502020204030203" pitchFamily="34" charset="0"/>
+                <a:cs typeface="Lato Light" panose="020F0502020204030203" pitchFamily="34" charset="0"/>
+              </a:rPr>
+              <a:t>+</a:t>
+            </a:r>
+            <a:endParaRPr lang="en-NL" sz="3200" dirty="0">
+              <a:solidFill>
+                <a:srgbClr val="09B0AC"/>
+              </a:solidFill>
+              <a:latin typeface="Lato Light" panose="020F0502020204030203" pitchFamily="34" charset="0"/>
+              <a:ea typeface="Lato Light" panose="020F0502020204030203" pitchFamily="34" charset="0"/>
+              <a:cs typeface="Lato Light" panose="020F0502020204030203" pitchFamily="34" charset="0"/>
+            </a:endParaRPr>
+          </a:p>
+        </p:txBody>
+      </p:sp>
+      <p:sp>
+        <p:nvSpPr>
+          <p:cNvPr id="23" name="Left Bracket 22">
+            <a:extLst>
+              <a:ext uri="{FF2B5EF4-FFF2-40B4-BE49-F238E27FC236}">
+                <a16:creationId xmlns:a16="http://schemas.microsoft.com/office/drawing/2014/main" id="{A4A34787-DBC0-59F1-B401-96B698775CD5}"/>
+              </a:ext>
+            </a:extLst>
+          </p:cNvPr>
+          <p:cNvSpPr/>
+          <p:nvPr/>
+        </p:nvSpPr>
+        <p:spPr>
+          <a:xfrm>
+            <a:off x="398153" y="1411800"/>
+            <a:ext cx="283911" cy="975247"/>
+          </a:xfrm>
+          <a:custGeom>
+            <a:avLst/>
+            <a:gdLst>
+              <a:gd name="csX0" fmla="*/ 283911 w 283911"/>
+              <a:gd name="csY0" fmla="*/ 975247 h 975247"/>
+              <a:gd name="csX1" fmla="*/ 0 w 283911"/>
+              <a:gd name="csY1" fmla="*/ 487623 h 975247"/>
+              <a:gd name="csX2" fmla="*/ 0 w 283911"/>
+              <a:gd name="csY2" fmla="*/ 487624 h 975247"/>
+              <a:gd name="csX3" fmla="*/ 283911 w 283911"/>
+              <a:gd name="csY3" fmla="*/ 0 h 975247"/>
+              <a:gd name="csX4" fmla="*/ 283911 w 283911"/>
+              <a:gd name="csY4" fmla="*/ 975247 h 975247"/>
+              <a:gd name="csX0" fmla="*/ 283911 w 283911"/>
+              <a:gd name="csY0" fmla="*/ 975247 h 975247"/>
+              <a:gd name="csX1" fmla="*/ 0 w 283911"/>
+              <a:gd name="csY1" fmla="*/ 487623 h 975247"/>
+              <a:gd name="csX2" fmla="*/ 0 w 283911"/>
+              <a:gd name="csY2" fmla="*/ 487624 h 975247"/>
+              <a:gd name="csX3" fmla="*/ 283911 w 283911"/>
+              <a:gd name="csY3" fmla="*/ 0 h 975247"/>
+              <a:gd name="csX0" fmla="*/ 283911 w 283911"/>
+              <a:gd name="csY0" fmla="*/ 975247 h 975247"/>
+              <a:gd name="csX1" fmla="*/ 0 w 283911"/>
+              <a:gd name="csY1" fmla="*/ 487623 h 975247"/>
+              <a:gd name="csX2" fmla="*/ 0 w 283911"/>
+              <a:gd name="csY2" fmla="*/ 487624 h 975247"/>
+              <a:gd name="csX3" fmla="*/ 283911 w 283911"/>
+              <a:gd name="csY3" fmla="*/ 0 h 975247"/>
+              <a:gd name="csX4" fmla="*/ 283911 w 283911"/>
+              <a:gd name="csY4" fmla="*/ 975247 h 975247"/>
+              <a:gd name="csX0" fmla="*/ 217924 w 283911"/>
+              <a:gd name="csY0" fmla="*/ 940682 h 975247"/>
+              <a:gd name="csX1" fmla="*/ 0 w 283911"/>
+              <a:gd name="csY1" fmla="*/ 487623 h 975247"/>
+              <a:gd name="csX2" fmla="*/ 0 w 283911"/>
+              <a:gd name="csY2" fmla="*/ 487624 h 975247"/>
+              <a:gd name="csX3" fmla="*/ 283911 w 283911"/>
+              <a:gd name="csY3" fmla="*/ 0 h 975247"/>
+              <a:gd name="csX0" fmla="*/ 283911 w 283911"/>
+              <a:gd name="csY0" fmla="*/ 975247 h 975247"/>
+              <a:gd name="csX1" fmla="*/ 0 w 283911"/>
+              <a:gd name="csY1" fmla="*/ 487623 h 975247"/>
+              <a:gd name="csX2" fmla="*/ 0 w 283911"/>
+              <a:gd name="csY2" fmla="*/ 487624 h 975247"/>
+              <a:gd name="csX3" fmla="*/ 283911 w 283911"/>
+              <a:gd name="csY3" fmla="*/ 0 h 975247"/>
+              <a:gd name="csX4" fmla="*/ 283911 w 283911"/>
+              <a:gd name="csY4" fmla="*/ 975247 h 975247"/>
+              <a:gd name="csX0" fmla="*/ 217924 w 283911"/>
+              <a:gd name="csY0" fmla="*/ 940682 h 975247"/>
+              <a:gd name="csX1" fmla="*/ 0 w 283911"/>
+              <a:gd name="csY1" fmla="*/ 487623 h 975247"/>
+              <a:gd name="csX2" fmla="*/ 0 w 283911"/>
+              <a:gd name="csY2" fmla="*/ 487624 h 975247"/>
+              <a:gd name="csX3" fmla="*/ 283911 w 283911"/>
+              <a:gd name="csY3" fmla="*/ 0 h 975247"/>
+            </a:gdLst>
+            <a:ahLst/>
+            <a:cxnLst>
+              <a:cxn ang="0">
+                <a:pos x="csX0" y="csY0"/>
+              </a:cxn>
+              <a:cxn ang="0">
+                <a:pos x="csX1" y="csY1"/>
+              </a:cxn>
+              <a:cxn ang="0">
+                <a:pos x="csX2" y="csY2"/>
+              </a:cxn>
+              <a:cxn ang="0">
+                <a:pos x="csX3" y="csY3"/>
+              </a:cxn>
+            </a:cxnLst>
+            <a:rect l="l" t="t" r="r" b="b"/>
+            <a:pathLst>
+              <a:path w="283911" h="975247" stroke="0" extrusionOk="0">
+                <a:moveTo>
+                  <a:pt x="283911" y="975247"/>
+                </a:moveTo>
+                <a:cubicBezTo>
+                  <a:pt x="127111" y="975247"/>
+                  <a:pt x="0" y="756930"/>
+                  <a:pt x="0" y="487623"/>
+                </a:cubicBezTo>
+                <a:lnTo>
+                  <a:pt x="0" y="487624"/>
+                </a:lnTo>
+                <a:cubicBezTo>
+                  <a:pt x="0" y="218317"/>
+                  <a:pt x="127111" y="0"/>
+                  <a:pt x="283911" y="0"/>
+                </a:cubicBezTo>
+                <a:lnTo>
+                  <a:pt x="283911" y="975247"/>
+                </a:lnTo>
+                <a:close/>
+              </a:path>
+              <a:path w="283911" h="975247" fill="none">
+                <a:moveTo>
+                  <a:pt x="217924" y="940682"/>
+                </a:moveTo>
+                <a:cubicBezTo>
+                  <a:pt x="61124" y="931255"/>
+                  <a:pt x="0" y="756930"/>
+                  <a:pt x="0" y="487623"/>
+                </a:cubicBezTo>
+                <a:lnTo>
+                  <a:pt x="0" y="487624"/>
+                </a:lnTo>
+                <a:cubicBezTo>
+                  <a:pt x="0" y="218317"/>
+                  <a:pt x="127111" y="0"/>
+                  <a:pt x="283911" y="0"/>
+                </a:cubicBezTo>
+              </a:path>
+            </a:pathLst>
+          </a:custGeom>
+          <a:ln w="38100">
+            <a:solidFill>
+              <a:srgbClr val="09B0AC"/>
+            </a:solidFill>
+          </a:ln>
+          <a:effectLst/>
+        </p:spPr>
+        <p:style>
+          <a:lnRef idx="2">
+            <a:schemeClr val="accent1"/>
+          </a:lnRef>
+          <a:fillRef idx="0">
+            <a:schemeClr val="accent1"/>
+          </a:fillRef>
+          <a:effectRef idx="1">
+            <a:schemeClr val="accent1"/>
+          </a:effectRef>
+          <a:fontRef idx="minor">
+            <a:schemeClr val="tx1"/>
+          </a:fontRef>
+        </p:style>
+        <p:txBody>
+          <a:bodyPr rtlCol="0" anchor="ctr"/>
+          <a:lstStyle/>
+          <a:p>
+            <a:pPr algn="ctr"/>
+            <a:endParaRPr lang="en-NL"/>
+          </a:p>
+        </p:txBody>
+      </p:sp>
+      <p:sp>
+        <p:nvSpPr>
+          <p:cNvPr id="24" name="Left Bracket 23">
+            <a:extLst>
+              <a:ext uri="{FF2B5EF4-FFF2-40B4-BE49-F238E27FC236}">
+                <a16:creationId xmlns:a16="http://schemas.microsoft.com/office/drawing/2014/main" id="{18EEE740-8318-A693-CA5D-4698C43E445C}"/>
+              </a:ext>
+            </a:extLst>
+          </p:cNvPr>
+          <p:cNvSpPr/>
+          <p:nvPr/>
+        </p:nvSpPr>
+        <p:spPr>
+          <a:xfrm flipH="1">
+            <a:off x="1380022" y="1442085"/>
+            <a:ext cx="226076" cy="1011400"/>
+          </a:xfrm>
+          <a:custGeom>
+            <a:avLst/>
+            <a:gdLst>
+              <a:gd name="csX0" fmla="*/ 226076 w 226076"/>
+              <a:gd name="csY0" fmla="*/ 1011400 h 1011400"/>
+              <a:gd name="csX1" fmla="*/ 0 w 226076"/>
+              <a:gd name="csY1" fmla="*/ 513284 h 1011400"/>
+              <a:gd name="csX2" fmla="*/ 0 w 226076"/>
+              <a:gd name="csY2" fmla="*/ 498116 h 1011400"/>
+              <a:gd name="csX3" fmla="*/ 226076 w 226076"/>
+              <a:gd name="csY3" fmla="*/ 0 h 1011400"/>
+              <a:gd name="csX4" fmla="*/ 226076 w 226076"/>
+              <a:gd name="csY4" fmla="*/ 1011400 h 1011400"/>
+              <a:gd name="csX0" fmla="*/ 226076 w 226076"/>
+              <a:gd name="csY0" fmla="*/ 1011400 h 1011400"/>
+              <a:gd name="csX1" fmla="*/ 0 w 226076"/>
+              <a:gd name="csY1" fmla="*/ 513284 h 1011400"/>
+              <a:gd name="csX2" fmla="*/ 0 w 226076"/>
+              <a:gd name="csY2" fmla="*/ 498116 h 1011400"/>
+              <a:gd name="csX3" fmla="*/ 226076 w 226076"/>
+              <a:gd name="csY3" fmla="*/ 0 h 1011400"/>
+              <a:gd name="csX0" fmla="*/ 226076 w 226076"/>
+              <a:gd name="csY0" fmla="*/ 1011400 h 1011400"/>
+              <a:gd name="csX1" fmla="*/ 0 w 226076"/>
+              <a:gd name="csY1" fmla="*/ 513284 h 1011400"/>
+              <a:gd name="csX2" fmla="*/ 0 w 226076"/>
+              <a:gd name="csY2" fmla="*/ 498116 h 1011400"/>
+              <a:gd name="csX3" fmla="*/ 226076 w 226076"/>
+              <a:gd name="csY3" fmla="*/ 0 h 1011400"/>
+              <a:gd name="csX4" fmla="*/ 226076 w 226076"/>
+              <a:gd name="csY4" fmla="*/ 1011400 h 1011400"/>
+              <a:gd name="csX0" fmla="*/ 226076 w 226076"/>
+              <a:gd name="csY0" fmla="*/ 1011400 h 1011400"/>
+              <a:gd name="csX1" fmla="*/ 0 w 226076"/>
+              <a:gd name="csY1" fmla="*/ 513284 h 1011400"/>
+              <a:gd name="csX2" fmla="*/ 0 w 226076"/>
+              <a:gd name="csY2" fmla="*/ 498116 h 1011400"/>
+              <a:gd name="csX3" fmla="*/ 182084 w 226076"/>
+              <a:gd name="csY3" fmla="*/ 12569 h 1011400"/>
+              <a:gd name="csX0" fmla="*/ 226076 w 226076"/>
+              <a:gd name="csY0" fmla="*/ 1011400 h 1011400"/>
+              <a:gd name="csX1" fmla="*/ 0 w 226076"/>
+              <a:gd name="csY1" fmla="*/ 513284 h 1011400"/>
+              <a:gd name="csX2" fmla="*/ 0 w 226076"/>
+              <a:gd name="csY2" fmla="*/ 498116 h 1011400"/>
+              <a:gd name="csX3" fmla="*/ 226076 w 226076"/>
+              <a:gd name="csY3" fmla="*/ 0 h 1011400"/>
+              <a:gd name="csX4" fmla="*/ 226076 w 226076"/>
+              <a:gd name="csY4" fmla="*/ 1011400 h 1011400"/>
+              <a:gd name="csX0" fmla="*/ 226076 w 226076"/>
+              <a:gd name="csY0" fmla="*/ 1011400 h 1011400"/>
+              <a:gd name="csX1" fmla="*/ 0 w 226076"/>
+              <a:gd name="csY1" fmla="*/ 513284 h 1011400"/>
+              <a:gd name="csX2" fmla="*/ 0 w 226076"/>
+              <a:gd name="csY2" fmla="*/ 498116 h 1011400"/>
+              <a:gd name="csX3" fmla="*/ 182084 w 226076"/>
+              <a:gd name="csY3" fmla="*/ 12569 h 1011400"/>
+              <a:gd name="csX0" fmla="*/ 226076 w 226076"/>
+              <a:gd name="csY0" fmla="*/ 1011400 h 1011400"/>
+              <a:gd name="csX1" fmla="*/ 0 w 226076"/>
+              <a:gd name="csY1" fmla="*/ 513284 h 1011400"/>
+              <a:gd name="csX2" fmla="*/ 0 w 226076"/>
+              <a:gd name="csY2" fmla="*/ 498116 h 1011400"/>
+              <a:gd name="csX3" fmla="*/ 226076 w 226076"/>
+              <a:gd name="csY3" fmla="*/ 0 h 1011400"/>
+              <a:gd name="csX4" fmla="*/ 226076 w 226076"/>
+              <a:gd name="csY4" fmla="*/ 1011400 h 1011400"/>
+              <a:gd name="csX0" fmla="*/ 226076 w 226076"/>
+              <a:gd name="csY0" fmla="*/ 1011400 h 1011400"/>
+              <a:gd name="csX1" fmla="*/ 0 w 226076"/>
+              <a:gd name="csY1" fmla="*/ 513284 h 1011400"/>
+              <a:gd name="csX2" fmla="*/ 0 w 226076"/>
+              <a:gd name="csY2" fmla="*/ 498116 h 1011400"/>
+              <a:gd name="csX3" fmla="*/ 182084 w 226076"/>
+              <a:gd name="csY3" fmla="*/ 12569 h 1011400"/>
+            </a:gdLst>
+            <a:ahLst/>
+            <a:cxnLst>
+              <a:cxn ang="0">
+                <a:pos x="csX0" y="csY0"/>
+              </a:cxn>
+              <a:cxn ang="0">
+                <a:pos x="csX1" y="csY1"/>
+              </a:cxn>
+              <a:cxn ang="0">
+                <a:pos x="csX2" y="csY2"/>
+              </a:cxn>
+              <a:cxn ang="0">
+                <a:pos x="csX3" y="csY3"/>
+              </a:cxn>
+            </a:cxnLst>
+            <a:rect l="l" t="t" r="r" b="b"/>
+            <a:pathLst>
+              <a:path w="226076" h="1011400" stroke="0" extrusionOk="0">
+                <a:moveTo>
+                  <a:pt x="226076" y="1011400"/>
+                </a:moveTo>
+                <a:cubicBezTo>
+                  <a:pt x="101218" y="1011400"/>
+                  <a:pt x="0" y="788386"/>
+                  <a:pt x="0" y="513284"/>
+                </a:cubicBezTo>
+                <a:lnTo>
+                  <a:pt x="0" y="498116"/>
+                </a:lnTo>
+                <a:cubicBezTo>
+                  <a:pt x="0" y="223014"/>
+                  <a:pt x="101218" y="0"/>
+                  <a:pt x="226076" y="0"/>
+                </a:cubicBezTo>
+                <a:lnTo>
+                  <a:pt x="226076" y="1011400"/>
+                </a:lnTo>
+                <a:close/>
+              </a:path>
+              <a:path w="226076" h="1011400" fill="none">
+                <a:moveTo>
+                  <a:pt x="226076" y="1011400"/>
+                </a:moveTo>
+                <a:cubicBezTo>
+                  <a:pt x="101218" y="1011400"/>
+                  <a:pt x="0" y="788386"/>
+                  <a:pt x="0" y="513284"/>
+                </a:cubicBezTo>
+                <a:lnTo>
+                  <a:pt x="0" y="498116"/>
+                </a:lnTo>
+                <a:cubicBezTo>
+                  <a:pt x="0" y="223014"/>
+                  <a:pt x="63511" y="40850"/>
+                  <a:pt x="182084" y="12569"/>
+                </a:cubicBezTo>
+              </a:path>
+            </a:pathLst>
+          </a:custGeom>
+          <a:ln w="38100">
+            <a:solidFill>
+              <a:srgbClr val="09B0AC"/>
+            </a:solidFill>
+          </a:ln>
+          <a:effectLst/>
+        </p:spPr>
+        <p:style>
+          <a:lnRef idx="2">
+            <a:schemeClr val="accent1"/>
+          </a:lnRef>
+          <a:fillRef idx="0">
+            <a:schemeClr val="accent1"/>
+          </a:fillRef>
+          <a:effectRef idx="1">
+            <a:schemeClr val="accent1"/>
+          </a:effectRef>
+          <a:fontRef idx="minor">
+            <a:schemeClr val="tx1"/>
+          </a:fontRef>
+        </p:style>
+        <p:txBody>
+          <a:bodyPr rtlCol="0" anchor="ctr"/>
+          <a:lstStyle/>
+          <a:p>
+            <a:pPr algn="ctr"/>
+            <a:endParaRPr lang="en-NL"/>
+          </a:p>
+        </p:txBody>
+      </p:sp>
+      <p:sp>
+        <p:nvSpPr>
+          <p:cNvPr id="25" name="Left Bracket 24">
+            <a:extLst>
+              <a:ext uri="{FF2B5EF4-FFF2-40B4-BE49-F238E27FC236}">
+                <a16:creationId xmlns:a16="http://schemas.microsoft.com/office/drawing/2014/main" id="{079DC83A-E04C-5176-34D4-56D524DF9641}"/>
+              </a:ext>
+            </a:extLst>
+          </p:cNvPr>
+          <p:cNvSpPr/>
+          <p:nvPr/>
+        </p:nvSpPr>
+        <p:spPr>
+          <a:xfrm rot="19411434" flipH="1">
+            <a:off x="2132585" y="869438"/>
+            <a:ext cx="244078" cy="2272592"/>
+          </a:xfrm>
+          <a:custGeom>
+            <a:avLst/>
+            <a:gdLst>
+              <a:gd name="csX0" fmla="*/ 244078 w 244078"/>
+              <a:gd name="csY0" fmla="*/ 2272592 h 2272592"/>
+              <a:gd name="csX1" fmla="*/ 0 w 244078"/>
+              <a:gd name="csY1" fmla="*/ 1382732 h 2272592"/>
+              <a:gd name="csX2" fmla="*/ 0 w 244078"/>
+              <a:gd name="csY2" fmla="*/ 889860 h 2272592"/>
+              <a:gd name="csX3" fmla="*/ 244078 w 244078"/>
+              <a:gd name="csY3" fmla="*/ 0 h 2272592"/>
+              <a:gd name="csX4" fmla="*/ 244078 w 244078"/>
+              <a:gd name="csY4" fmla="*/ 2272592 h 2272592"/>
+              <a:gd name="csX0" fmla="*/ 244078 w 244078"/>
+              <a:gd name="csY0" fmla="*/ 2272592 h 2272592"/>
+              <a:gd name="csX1" fmla="*/ 0 w 244078"/>
+              <a:gd name="csY1" fmla="*/ 1382732 h 2272592"/>
+              <a:gd name="csX2" fmla="*/ 0 w 244078"/>
+              <a:gd name="csY2" fmla="*/ 889860 h 2272592"/>
+              <a:gd name="csX3" fmla="*/ 244078 w 244078"/>
+              <a:gd name="csY3" fmla="*/ 0 h 2272592"/>
+              <a:gd name="csX0" fmla="*/ 244306 w 244306"/>
+              <a:gd name="csY0" fmla="*/ 2272592 h 2272592"/>
+              <a:gd name="csX1" fmla="*/ 228 w 244306"/>
+              <a:gd name="csY1" fmla="*/ 1382732 h 2272592"/>
+              <a:gd name="csX2" fmla="*/ 228 w 244306"/>
+              <a:gd name="csY2" fmla="*/ 889860 h 2272592"/>
+              <a:gd name="csX3" fmla="*/ 244306 w 244306"/>
+              <a:gd name="csY3" fmla="*/ 0 h 2272592"/>
+              <a:gd name="csX4" fmla="*/ 244306 w 244306"/>
+              <a:gd name="csY4" fmla="*/ 2272592 h 2272592"/>
+              <a:gd name="csX0" fmla="*/ 244306 w 244306"/>
+              <a:gd name="csY0" fmla="*/ 2272592 h 2272592"/>
+              <a:gd name="csX1" fmla="*/ 228 w 244306"/>
+              <a:gd name="csY1" fmla="*/ 1382732 h 2272592"/>
+              <a:gd name="csX2" fmla="*/ 228 w 244306"/>
+              <a:gd name="csY2" fmla="*/ 889860 h 2272592"/>
+              <a:gd name="csX3" fmla="*/ 123801 w 244306"/>
+              <a:gd name="csY3" fmla="*/ 159432 h 2272592"/>
+              <a:gd name="csX0" fmla="*/ 244078 w 244078"/>
+              <a:gd name="csY0" fmla="*/ 2272592 h 2272592"/>
+              <a:gd name="csX1" fmla="*/ 0 w 244078"/>
+              <a:gd name="csY1" fmla="*/ 1382732 h 2272592"/>
+              <a:gd name="csX2" fmla="*/ 0 w 244078"/>
+              <a:gd name="csY2" fmla="*/ 889860 h 2272592"/>
+              <a:gd name="csX3" fmla="*/ 244078 w 244078"/>
+              <a:gd name="csY3" fmla="*/ 0 h 2272592"/>
+              <a:gd name="csX4" fmla="*/ 244078 w 244078"/>
+              <a:gd name="csY4" fmla="*/ 2272592 h 2272592"/>
+              <a:gd name="csX0" fmla="*/ 244078 w 244078"/>
+              <a:gd name="csY0" fmla="*/ 2272592 h 2272592"/>
+              <a:gd name="csX1" fmla="*/ 0 w 244078"/>
+              <a:gd name="csY1" fmla="*/ 1382732 h 2272592"/>
+              <a:gd name="csX2" fmla="*/ 0 w 244078"/>
+              <a:gd name="csY2" fmla="*/ 889860 h 2272592"/>
+              <a:gd name="csX3" fmla="*/ 123573 w 244078"/>
+              <a:gd name="csY3" fmla="*/ 159432 h 2272592"/>
+              <a:gd name="csX0" fmla="*/ 244078 w 244078"/>
+              <a:gd name="csY0" fmla="*/ 2272592 h 2272592"/>
+              <a:gd name="csX1" fmla="*/ 0 w 244078"/>
+              <a:gd name="csY1" fmla="*/ 1382732 h 2272592"/>
+              <a:gd name="csX2" fmla="*/ 0 w 244078"/>
+              <a:gd name="csY2" fmla="*/ 889860 h 2272592"/>
+              <a:gd name="csX3" fmla="*/ 244078 w 244078"/>
+              <a:gd name="csY3" fmla="*/ 0 h 2272592"/>
+              <a:gd name="csX4" fmla="*/ 244078 w 244078"/>
+              <a:gd name="csY4" fmla="*/ 2272592 h 2272592"/>
+              <a:gd name="csX0" fmla="*/ 244078 w 244078"/>
+              <a:gd name="csY0" fmla="*/ 2272592 h 2272592"/>
+              <a:gd name="csX1" fmla="*/ 0 w 244078"/>
+              <a:gd name="csY1" fmla="*/ 1382732 h 2272592"/>
+              <a:gd name="csX2" fmla="*/ 0 w 244078"/>
+              <a:gd name="csY2" fmla="*/ 889860 h 2272592"/>
+              <a:gd name="csX3" fmla="*/ 123573 w 244078"/>
+              <a:gd name="csY3" fmla="*/ 159432 h 2272592"/>
+              <a:gd name="csX0" fmla="*/ 244078 w 244078"/>
+              <a:gd name="csY0" fmla="*/ 2272592 h 2272592"/>
+              <a:gd name="csX1" fmla="*/ 0 w 244078"/>
+              <a:gd name="csY1" fmla="*/ 1382732 h 2272592"/>
+              <a:gd name="csX2" fmla="*/ 0 w 244078"/>
+              <a:gd name="csY2" fmla="*/ 889860 h 2272592"/>
+              <a:gd name="csX3" fmla="*/ 244078 w 244078"/>
+              <a:gd name="csY3" fmla="*/ 0 h 2272592"/>
+              <a:gd name="csX4" fmla="*/ 244078 w 244078"/>
+              <a:gd name="csY4" fmla="*/ 2272592 h 2272592"/>
+              <a:gd name="csX0" fmla="*/ 244078 w 244078"/>
+              <a:gd name="csY0" fmla="*/ 2272592 h 2272592"/>
+              <a:gd name="csX1" fmla="*/ 0 w 244078"/>
+              <a:gd name="csY1" fmla="*/ 1382732 h 2272592"/>
+              <a:gd name="csX2" fmla="*/ 0 w 244078"/>
+              <a:gd name="csY2" fmla="*/ 889860 h 2272592"/>
+              <a:gd name="csX3" fmla="*/ 115442 w 244078"/>
+              <a:gd name="csY3" fmla="*/ 153720 h 2272592"/>
+              <a:gd name="csX0" fmla="*/ 244078 w 244078"/>
+              <a:gd name="csY0" fmla="*/ 2272592 h 2272592"/>
+              <a:gd name="csX1" fmla="*/ 0 w 244078"/>
+              <a:gd name="csY1" fmla="*/ 1382732 h 2272592"/>
+              <a:gd name="csX2" fmla="*/ 0 w 244078"/>
+              <a:gd name="csY2" fmla="*/ 889860 h 2272592"/>
+              <a:gd name="csX3" fmla="*/ 244078 w 244078"/>
+              <a:gd name="csY3" fmla="*/ 0 h 2272592"/>
+              <a:gd name="csX4" fmla="*/ 244078 w 244078"/>
+              <a:gd name="csY4" fmla="*/ 2272592 h 2272592"/>
+              <a:gd name="csX0" fmla="*/ 244078 w 244078"/>
+              <a:gd name="csY0" fmla="*/ 2272592 h 2272592"/>
+              <a:gd name="csX1" fmla="*/ 0 w 244078"/>
+              <a:gd name="csY1" fmla="*/ 1382732 h 2272592"/>
+              <a:gd name="csX2" fmla="*/ 0 w 244078"/>
+              <a:gd name="csY2" fmla="*/ 889860 h 2272592"/>
+              <a:gd name="csX3" fmla="*/ 115442 w 244078"/>
+              <a:gd name="csY3" fmla="*/ 153720 h 2272592"/>
+              <a:gd name="csX0" fmla="*/ 244078 w 244078"/>
+              <a:gd name="csY0" fmla="*/ 2272592 h 2272592"/>
+              <a:gd name="csX1" fmla="*/ 0 w 244078"/>
+              <a:gd name="csY1" fmla="*/ 1382732 h 2272592"/>
+              <a:gd name="csX2" fmla="*/ 0 w 244078"/>
+              <a:gd name="csY2" fmla="*/ 889860 h 2272592"/>
+              <a:gd name="csX3" fmla="*/ 244078 w 244078"/>
+              <a:gd name="csY3" fmla="*/ 0 h 2272592"/>
+              <a:gd name="csX4" fmla="*/ 244078 w 244078"/>
+              <a:gd name="csY4" fmla="*/ 2272592 h 2272592"/>
+              <a:gd name="csX0" fmla="*/ 244078 w 244078"/>
+              <a:gd name="csY0" fmla="*/ 2272592 h 2272592"/>
+              <a:gd name="csX1" fmla="*/ 0 w 244078"/>
+              <a:gd name="csY1" fmla="*/ 1382732 h 2272592"/>
+              <a:gd name="csX2" fmla="*/ 0 w 244078"/>
+              <a:gd name="csY2" fmla="*/ 889860 h 2272592"/>
+              <a:gd name="csX3" fmla="*/ 109837 w 244078"/>
+              <a:gd name="csY3" fmla="*/ 146140 h 2272592"/>
+            </a:gdLst>
+            <a:ahLst/>
+            <a:cxnLst>
+              <a:cxn ang="0">
+                <a:pos x="csX0" y="csY0"/>
+              </a:cxn>
+              <a:cxn ang="0">
+                <a:pos x="csX1" y="csY1"/>
+              </a:cxn>
+              <a:cxn ang="0">
+                <a:pos x="csX2" y="csY2"/>
+              </a:cxn>
+              <a:cxn ang="0">
+                <a:pos x="csX3" y="csY3"/>
+              </a:cxn>
+            </a:cxnLst>
+            <a:rect l="l" t="t" r="r" b="b"/>
+            <a:pathLst>
+              <a:path w="244078" h="2272592" stroke="0" extrusionOk="0">
+                <a:moveTo>
+                  <a:pt x="244078" y="2272592"/>
+                </a:moveTo>
+                <a:cubicBezTo>
+                  <a:pt x="109277" y="2272592"/>
+                  <a:pt x="0" y="1874188"/>
+                  <a:pt x="0" y="1382732"/>
+                </a:cubicBezTo>
+                <a:lnTo>
+                  <a:pt x="0" y="889860"/>
+                </a:lnTo>
+                <a:cubicBezTo>
+                  <a:pt x="0" y="398404"/>
+                  <a:pt x="109277" y="0"/>
+                  <a:pt x="244078" y="0"/>
+                </a:cubicBezTo>
+                <a:lnTo>
+                  <a:pt x="244078" y="2272592"/>
+                </a:lnTo>
+                <a:close/>
+              </a:path>
+              <a:path w="244078" h="2272592" fill="none">
+                <a:moveTo>
+                  <a:pt x="244078" y="2272592"/>
+                </a:moveTo>
+                <a:cubicBezTo>
+                  <a:pt x="109277" y="2272592"/>
+                  <a:pt x="0" y="1874188"/>
+                  <a:pt x="0" y="1382732"/>
+                </a:cubicBezTo>
+                <a:lnTo>
+                  <a:pt x="0" y="889860"/>
+                </a:lnTo>
+                <a:cubicBezTo>
+                  <a:pt x="0" y="398404"/>
+                  <a:pt x="33280" y="267207"/>
+                  <a:pt x="109837" y="146140"/>
+                </a:cubicBezTo>
+              </a:path>
+            </a:pathLst>
+          </a:custGeom>
+          <a:ln w="38100">
+            <a:solidFill>
+              <a:srgbClr val="7D0112"/>
+            </a:solidFill>
+          </a:ln>
+          <a:effectLst/>
+        </p:spPr>
+        <p:style>
+          <a:lnRef idx="2">
+            <a:schemeClr val="accent1"/>
+          </a:lnRef>
+          <a:fillRef idx="0">
+            <a:schemeClr val="accent1"/>
+          </a:fillRef>
+          <a:effectRef idx="1">
+            <a:schemeClr val="accent1"/>
+          </a:effectRef>
+          <a:fontRef idx="minor">
+            <a:schemeClr val="tx1"/>
+          </a:fontRef>
+        </p:style>
+        <p:txBody>
+          <a:bodyPr rtlCol="0" anchor="ctr"/>
+          <a:lstStyle/>
+          <a:p>
+            <a:pPr algn="ctr"/>
+            <a:endParaRPr lang="en-NL"/>
+          </a:p>
+        </p:txBody>
+      </p:sp>
+      <p:sp>
+        <p:nvSpPr>
+          <p:cNvPr id="26" name="Left Bracket 25">
+            <a:extLst>
+              <a:ext uri="{FF2B5EF4-FFF2-40B4-BE49-F238E27FC236}">
+                <a16:creationId xmlns:a16="http://schemas.microsoft.com/office/drawing/2014/main" id="{D1629CCA-F76A-32A4-064D-904BBEC70BA0}"/>
+              </a:ext>
+            </a:extLst>
+          </p:cNvPr>
+          <p:cNvSpPr/>
+          <p:nvPr/>
+        </p:nvSpPr>
+        <p:spPr>
+          <a:xfrm>
+            <a:off x="2871773" y="1411800"/>
+            <a:ext cx="307491" cy="994197"/>
+          </a:xfrm>
+          <a:custGeom>
+            <a:avLst/>
+            <a:gdLst>
+              <a:gd name="csX0" fmla="*/ 307491 w 307491"/>
+              <a:gd name="csY0" fmla="*/ 994197 h 994197"/>
+              <a:gd name="csX1" fmla="*/ 0 w 307491"/>
+              <a:gd name="csY1" fmla="*/ 497098 h 994197"/>
+              <a:gd name="csX2" fmla="*/ 0 w 307491"/>
+              <a:gd name="csY2" fmla="*/ 497099 h 994197"/>
+              <a:gd name="csX3" fmla="*/ 307491 w 307491"/>
+              <a:gd name="csY3" fmla="*/ 0 h 994197"/>
+              <a:gd name="csX4" fmla="*/ 307491 w 307491"/>
+              <a:gd name="csY4" fmla="*/ 994197 h 994197"/>
+              <a:gd name="csX0" fmla="*/ 307491 w 307491"/>
+              <a:gd name="csY0" fmla="*/ 994197 h 994197"/>
+              <a:gd name="csX1" fmla="*/ 0 w 307491"/>
+              <a:gd name="csY1" fmla="*/ 497098 h 994197"/>
+              <a:gd name="csX2" fmla="*/ 0 w 307491"/>
+              <a:gd name="csY2" fmla="*/ 497099 h 994197"/>
+              <a:gd name="csX3" fmla="*/ 307491 w 307491"/>
+              <a:gd name="csY3" fmla="*/ 0 h 994197"/>
+              <a:gd name="csX0" fmla="*/ 307491 w 307491"/>
+              <a:gd name="csY0" fmla="*/ 994197 h 994197"/>
+              <a:gd name="csX1" fmla="*/ 0 w 307491"/>
+              <a:gd name="csY1" fmla="*/ 497098 h 994197"/>
+              <a:gd name="csX2" fmla="*/ 0 w 307491"/>
+              <a:gd name="csY2" fmla="*/ 497099 h 994197"/>
+              <a:gd name="csX3" fmla="*/ 307491 w 307491"/>
+              <a:gd name="csY3" fmla="*/ 0 h 994197"/>
+              <a:gd name="csX4" fmla="*/ 307491 w 307491"/>
+              <a:gd name="csY4" fmla="*/ 994197 h 994197"/>
+              <a:gd name="csX0" fmla="*/ 191227 w 307491"/>
+              <a:gd name="csY0" fmla="*/ 962774 h 994197"/>
+              <a:gd name="csX1" fmla="*/ 0 w 307491"/>
+              <a:gd name="csY1" fmla="*/ 497098 h 994197"/>
+              <a:gd name="csX2" fmla="*/ 0 w 307491"/>
+              <a:gd name="csY2" fmla="*/ 497099 h 994197"/>
+              <a:gd name="csX3" fmla="*/ 307491 w 307491"/>
+              <a:gd name="csY3" fmla="*/ 0 h 994197"/>
+              <a:gd name="csX0" fmla="*/ 307491 w 307491"/>
+              <a:gd name="csY0" fmla="*/ 994197 h 994197"/>
+              <a:gd name="csX1" fmla="*/ 0 w 307491"/>
+              <a:gd name="csY1" fmla="*/ 497098 h 994197"/>
+              <a:gd name="csX2" fmla="*/ 0 w 307491"/>
+              <a:gd name="csY2" fmla="*/ 497099 h 994197"/>
+              <a:gd name="csX3" fmla="*/ 307491 w 307491"/>
+              <a:gd name="csY3" fmla="*/ 0 h 994197"/>
+              <a:gd name="csX4" fmla="*/ 307491 w 307491"/>
+              <a:gd name="csY4" fmla="*/ 994197 h 994197"/>
+              <a:gd name="csX0" fmla="*/ 191227 w 307491"/>
+              <a:gd name="csY0" fmla="*/ 962774 h 994197"/>
+              <a:gd name="csX1" fmla="*/ 0 w 307491"/>
+              <a:gd name="csY1" fmla="*/ 497098 h 994197"/>
+              <a:gd name="csX2" fmla="*/ 0 w 307491"/>
+              <a:gd name="csY2" fmla="*/ 497099 h 994197"/>
+              <a:gd name="csX3" fmla="*/ 307491 w 307491"/>
+              <a:gd name="csY3" fmla="*/ 0 h 994197"/>
+            </a:gdLst>
+            <a:ahLst/>
+            <a:cxnLst>
+              <a:cxn ang="0">
+                <a:pos x="csX0" y="csY0"/>
+              </a:cxn>
+              <a:cxn ang="0">
+                <a:pos x="csX1" y="csY1"/>
+              </a:cxn>
+              <a:cxn ang="0">
+                <a:pos x="csX2" y="csY2"/>
+              </a:cxn>
+              <a:cxn ang="0">
+                <a:pos x="csX3" y="csY3"/>
+              </a:cxn>
+            </a:cxnLst>
+            <a:rect l="l" t="t" r="r" b="b"/>
+            <a:pathLst>
+              <a:path w="307491" h="994197" stroke="0" extrusionOk="0">
+                <a:moveTo>
+                  <a:pt x="307491" y="994197"/>
+                </a:moveTo>
+                <a:cubicBezTo>
+                  <a:pt x="137668" y="994197"/>
+                  <a:pt x="0" y="771638"/>
+                  <a:pt x="0" y="497098"/>
+                </a:cubicBezTo>
+                <a:lnTo>
+                  <a:pt x="0" y="497099"/>
+                </a:lnTo>
+                <a:cubicBezTo>
+                  <a:pt x="0" y="222559"/>
+                  <a:pt x="137668" y="0"/>
+                  <a:pt x="307491" y="0"/>
+                </a:cubicBezTo>
+                <a:lnTo>
+                  <a:pt x="307491" y="994197"/>
+                </a:lnTo>
+                <a:close/>
+              </a:path>
+              <a:path w="307491" h="994197" fill="none">
+                <a:moveTo>
+                  <a:pt x="191227" y="962774"/>
+                </a:moveTo>
+                <a:cubicBezTo>
+                  <a:pt x="43400" y="912498"/>
+                  <a:pt x="0" y="771638"/>
+                  <a:pt x="0" y="497098"/>
+                </a:cubicBezTo>
+                <a:lnTo>
+                  <a:pt x="0" y="497099"/>
+                </a:lnTo>
+                <a:cubicBezTo>
+                  <a:pt x="0" y="222559"/>
+                  <a:pt x="137668" y="0"/>
+                  <a:pt x="307491" y="0"/>
+                </a:cubicBezTo>
+              </a:path>
+            </a:pathLst>
+          </a:custGeom>
+          <a:ln w="38100">
+            <a:solidFill>
+              <a:srgbClr val="7D0112"/>
+            </a:solidFill>
+          </a:ln>
+          <a:effectLst/>
+        </p:spPr>
+        <p:style>
+          <a:lnRef idx="2">
+            <a:schemeClr val="accent1"/>
+          </a:lnRef>
+          <a:fillRef idx="0">
+            <a:schemeClr val="accent1"/>
+          </a:fillRef>
+          <a:effectRef idx="1">
+            <a:schemeClr val="accent1"/>
+          </a:effectRef>
+          <a:fontRef idx="minor">
+            <a:schemeClr val="tx1"/>
+          </a:fontRef>
+        </p:style>
+        <p:txBody>
+          <a:bodyPr rtlCol="0" anchor="ctr"/>
+          <a:lstStyle/>
+          <a:p>
+            <a:pPr algn="ctr"/>
+            <a:endParaRPr lang="en-NL"/>
+          </a:p>
+        </p:txBody>
+      </p:sp>
+      <p:sp>
+        <p:nvSpPr>
+          <p:cNvPr id="27" name="Left Bracket 26">
+            <a:extLst>
+              <a:ext uri="{FF2B5EF4-FFF2-40B4-BE49-F238E27FC236}">
+                <a16:creationId xmlns:a16="http://schemas.microsoft.com/office/drawing/2014/main" id="{DF228722-4D4D-0452-5F98-8A52D14DDF51}"/>
+              </a:ext>
+            </a:extLst>
+          </p:cNvPr>
+          <p:cNvSpPr/>
+          <p:nvPr/>
+        </p:nvSpPr>
+        <p:spPr>
+          <a:xfrm flipH="1">
+            <a:off x="3805230" y="1430749"/>
+            <a:ext cx="268974" cy="975247"/>
+          </a:xfrm>
+          <a:custGeom>
+            <a:avLst/>
+            <a:gdLst>
+              <a:gd name="csX0" fmla="*/ 268974 w 268974"/>
+              <a:gd name="csY0" fmla="*/ 975247 h 975247"/>
+              <a:gd name="csX1" fmla="*/ 0 w 268974"/>
+              <a:gd name="csY1" fmla="*/ 487623 h 975247"/>
+              <a:gd name="csX2" fmla="*/ 0 w 268974"/>
+              <a:gd name="csY2" fmla="*/ 487624 h 975247"/>
+              <a:gd name="csX3" fmla="*/ 268974 w 268974"/>
+              <a:gd name="csY3" fmla="*/ 0 h 975247"/>
+              <a:gd name="csX4" fmla="*/ 268974 w 268974"/>
+              <a:gd name="csY4" fmla="*/ 975247 h 975247"/>
+              <a:gd name="csX0" fmla="*/ 268974 w 268974"/>
+              <a:gd name="csY0" fmla="*/ 975247 h 975247"/>
+              <a:gd name="csX1" fmla="*/ 0 w 268974"/>
+              <a:gd name="csY1" fmla="*/ 487623 h 975247"/>
+              <a:gd name="csX2" fmla="*/ 0 w 268974"/>
+              <a:gd name="csY2" fmla="*/ 487624 h 975247"/>
+              <a:gd name="csX3" fmla="*/ 268974 w 268974"/>
+              <a:gd name="csY3" fmla="*/ 0 h 975247"/>
+              <a:gd name="csX0" fmla="*/ 268974 w 268974"/>
+              <a:gd name="csY0" fmla="*/ 975247 h 975247"/>
+              <a:gd name="csX1" fmla="*/ 0 w 268974"/>
+              <a:gd name="csY1" fmla="*/ 487623 h 975247"/>
+              <a:gd name="csX2" fmla="*/ 0 w 268974"/>
+              <a:gd name="csY2" fmla="*/ 487624 h 975247"/>
+              <a:gd name="csX3" fmla="*/ 268974 w 268974"/>
+              <a:gd name="csY3" fmla="*/ 0 h 975247"/>
+              <a:gd name="csX4" fmla="*/ 268974 w 268974"/>
+              <a:gd name="csY4" fmla="*/ 975247 h 975247"/>
+              <a:gd name="csX0" fmla="*/ 268974 w 268974"/>
+              <a:gd name="csY0" fmla="*/ 975247 h 975247"/>
+              <a:gd name="csX1" fmla="*/ 0 w 268974"/>
+              <a:gd name="csY1" fmla="*/ 487623 h 975247"/>
+              <a:gd name="csX2" fmla="*/ 0 w 268974"/>
+              <a:gd name="csY2" fmla="*/ 487624 h 975247"/>
+              <a:gd name="csX3" fmla="*/ 202987 w 268974"/>
+              <a:gd name="csY3" fmla="*/ 37708 h 975247"/>
+              <a:gd name="csX0" fmla="*/ 268974 w 268974"/>
+              <a:gd name="csY0" fmla="*/ 975247 h 975247"/>
+              <a:gd name="csX1" fmla="*/ 0 w 268974"/>
+              <a:gd name="csY1" fmla="*/ 487623 h 975247"/>
+              <a:gd name="csX2" fmla="*/ 0 w 268974"/>
+              <a:gd name="csY2" fmla="*/ 487624 h 975247"/>
+              <a:gd name="csX3" fmla="*/ 268974 w 268974"/>
+              <a:gd name="csY3" fmla="*/ 0 h 975247"/>
+              <a:gd name="csX4" fmla="*/ 268974 w 268974"/>
+              <a:gd name="csY4" fmla="*/ 975247 h 975247"/>
+              <a:gd name="csX0" fmla="*/ 268974 w 268974"/>
+              <a:gd name="csY0" fmla="*/ 975247 h 975247"/>
+              <a:gd name="csX1" fmla="*/ 0 w 268974"/>
+              <a:gd name="csY1" fmla="*/ 487623 h 975247"/>
+              <a:gd name="csX2" fmla="*/ 0 w 268974"/>
+              <a:gd name="csY2" fmla="*/ 487624 h 975247"/>
+              <a:gd name="csX3" fmla="*/ 202987 w 268974"/>
+              <a:gd name="csY3" fmla="*/ 37708 h 975247"/>
+            </a:gdLst>
+            <a:ahLst/>
+            <a:cxnLst>
+              <a:cxn ang="0">
+                <a:pos x="csX0" y="csY0"/>
+              </a:cxn>
+              <a:cxn ang="0">
+                <a:pos x="csX1" y="csY1"/>
+              </a:cxn>
+              <a:cxn ang="0">
+                <a:pos x="csX2" y="csY2"/>
+              </a:cxn>
+              <a:cxn ang="0">
+                <a:pos x="csX3" y="csY3"/>
+              </a:cxn>
+            </a:cxnLst>
+            <a:rect l="l" t="t" r="r" b="b"/>
+            <a:pathLst>
+              <a:path w="268974" h="975247" stroke="0" extrusionOk="0">
+                <a:moveTo>
+                  <a:pt x="268974" y="975247"/>
+                </a:moveTo>
+                <a:cubicBezTo>
+                  <a:pt x="120424" y="975247"/>
+                  <a:pt x="0" y="756930"/>
+                  <a:pt x="0" y="487623"/>
+                </a:cubicBezTo>
+                <a:lnTo>
+                  <a:pt x="0" y="487624"/>
+                </a:lnTo>
+                <a:cubicBezTo>
+                  <a:pt x="0" y="218317"/>
+                  <a:pt x="120424" y="0"/>
+                  <a:pt x="268974" y="0"/>
+                </a:cubicBezTo>
+                <a:lnTo>
+                  <a:pt x="268974" y="975247"/>
+                </a:lnTo>
+                <a:close/>
+              </a:path>
+              <a:path w="268974" h="975247" fill="none">
+                <a:moveTo>
+                  <a:pt x="268974" y="975247"/>
+                </a:moveTo>
+                <a:cubicBezTo>
+                  <a:pt x="120424" y="975247"/>
+                  <a:pt x="0" y="756930"/>
+                  <a:pt x="0" y="487623"/>
+                </a:cubicBezTo>
+                <a:lnTo>
+                  <a:pt x="0" y="487624"/>
+                </a:lnTo>
+                <a:cubicBezTo>
+                  <a:pt x="0" y="218317"/>
+                  <a:pt x="54437" y="91126"/>
+                  <a:pt x="202987" y="37708"/>
+                </a:cubicBezTo>
+              </a:path>
+            </a:pathLst>
+          </a:custGeom>
+          <a:ln w="38100">
+            <a:solidFill>
+              <a:srgbClr val="7D0112"/>
+            </a:solidFill>
+          </a:ln>
+          <a:effectLst/>
+        </p:spPr>
+        <p:style>
+          <a:lnRef idx="2">
+            <a:schemeClr val="accent1"/>
+          </a:lnRef>
+          <a:fillRef idx="0">
+            <a:schemeClr val="accent1"/>
+          </a:fillRef>
+          <a:effectRef idx="1">
+            <a:schemeClr val="accent1"/>
+          </a:effectRef>
+          <a:fontRef idx="minor">
+            <a:schemeClr val="tx1"/>
+          </a:fontRef>
+        </p:style>
+        <p:txBody>
+          <a:bodyPr rtlCol="0" anchor="ctr"/>
+          <a:lstStyle/>
+          <a:p>
+            <a:pPr algn="ctr"/>
+            <a:endParaRPr lang="en-NL" dirty="0"/>
+          </a:p>
+        </p:txBody>
+      </p:sp>
+      <p:sp>
+        <p:nvSpPr>
+          <p:cNvPr id="30" name="Left Bracket 29">
+            <a:extLst>
+              <a:ext uri="{FF2B5EF4-FFF2-40B4-BE49-F238E27FC236}">
+                <a16:creationId xmlns:a16="http://schemas.microsoft.com/office/drawing/2014/main" id="{DFC44DDE-982D-48CC-074E-FEDFDFC5A2DF}"/>
+              </a:ext>
+            </a:extLst>
+          </p:cNvPr>
+          <p:cNvSpPr/>
+          <p:nvPr/>
+        </p:nvSpPr>
+        <p:spPr>
+          <a:xfrm rot="5400000" flipH="1">
+            <a:off x="2233489" y="2681566"/>
+            <a:ext cx="185708" cy="1180325"/>
+          </a:xfrm>
+          <a:custGeom>
+            <a:avLst/>
+            <a:gdLst>
+              <a:gd name="csX0" fmla="*/ 185708 w 185708"/>
+              <a:gd name="csY0" fmla="*/ 1180325 h 1180325"/>
+              <a:gd name="csX1" fmla="*/ 0 w 185708"/>
+              <a:gd name="csY1" fmla="*/ 590162 h 1180325"/>
+              <a:gd name="csX2" fmla="*/ 0 w 185708"/>
+              <a:gd name="csY2" fmla="*/ 590163 h 1180325"/>
+              <a:gd name="csX3" fmla="*/ 185708 w 185708"/>
+              <a:gd name="csY3" fmla="*/ 0 h 1180325"/>
+              <a:gd name="csX4" fmla="*/ 185708 w 185708"/>
+              <a:gd name="csY4" fmla="*/ 1180325 h 1180325"/>
+              <a:gd name="csX0" fmla="*/ 185708 w 185708"/>
+              <a:gd name="csY0" fmla="*/ 1180325 h 1180325"/>
+              <a:gd name="csX1" fmla="*/ 0 w 185708"/>
+              <a:gd name="csY1" fmla="*/ 590162 h 1180325"/>
+              <a:gd name="csX2" fmla="*/ 0 w 185708"/>
+              <a:gd name="csY2" fmla="*/ 590163 h 1180325"/>
+              <a:gd name="csX3" fmla="*/ 185708 w 185708"/>
+              <a:gd name="csY3" fmla="*/ 0 h 1180325"/>
+              <a:gd name="csX0" fmla="*/ 185708 w 185708"/>
+              <a:gd name="csY0" fmla="*/ 1180325 h 1180325"/>
+              <a:gd name="csX1" fmla="*/ 0 w 185708"/>
+              <a:gd name="csY1" fmla="*/ 590162 h 1180325"/>
+              <a:gd name="csX2" fmla="*/ 0 w 185708"/>
+              <a:gd name="csY2" fmla="*/ 590163 h 1180325"/>
+              <a:gd name="csX3" fmla="*/ 185708 w 185708"/>
+              <a:gd name="csY3" fmla="*/ 0 h 1180325"/>
+              <a:gd name="csX4" fmla="*/ 185708 w 185708"/>
+              <a:gd name="csY4" fmla="*/ 1180325 h 1180325"/>
+              <a:gd name="csX0" fmla="*/ 154286 w 185708"/>
+              <a:gd name="csY0" fmla="*/ 1180325 h 1180325"/>
+              <a:gd name="csX1" fmla="*/ 0 w 185708"/>
+              <a:gd name="csY1" fmla="*/ 590162 h 1180325"/>
+              <a:gd name="csX2" fmla="*/ 0 w 185708"/>
+              <a:gd name="csY2" fmla="*/ 590163 h 1180325"/>
+              <a:gd name="csX3" fmla="*/ 185708 w 185708"/>
+              <a:gd name="csY3" fmla="*/ 0 h 1180325"/>
+              <a:gd name="csX0" fmla="*/ 185708 w 185708"/>
+              <a:gd name="csY0" fmla="*/ 1180325 h 1180325"/>
+              <a:gd name="csX1" fmla="*/ 0 w 185708"/>
+              <a:gd name="csY1" fmla="*/ 590162 h 1180325"/>
+              <a:gd name="csX2" fmla="*/ 0 w 185708"/>
+              <a:gd name="csY2" fmla="*/ 590163 h 1180325"/>
+              <a:gd name="csX3" fmla="*/ 185708 w 185708"/>
+              <a:gd name="csY3" fmla="*/ 0 h 1180325"/>
+              <a:gd name="csX4" fmla="*/ 185708 w 185708"/>
+              <a:gd name="csY4" fmla="*/ 1180325 h 1180325"/>
+              <a:gd name="csX0" fmla="*/ 154286 w 185708"/>
+              <a:gd name="csY0" fmla="*/ 1180325 h 1180325"/>
+              <a:gd name="csX1" fmla="*/ 0 w 185708"/>
+              <a:gd name="csY1" fmla="*/ 590162 h 1180325"/>
+              <a:gd name="csX2" fmla="*/ 0 w 185708"/>
+              <a:gd name="csY2" fmla="*/ 590163 h 1180325"/>
+              <a:gd name="csX3" fmla="*/ 185708 w 185708"/>
+              <a:gd name="csY3" fmla="*/ 0 h 1180325"/>
+            </a:gdLst>
+            <a:ahLst/>
+            <a:cxnLst>
+              <a:cxn ang="0">
+                <a:pos x="csX0" y="csY0"/>
+              </a:cxn>
+              <a:cxn ang="0">
+                <a:pos x="csX1" y="csY1"/>
+              </a:cxn>
+              <a:cxn ang="0">
+                <a:pos x="csX2" y="csY2"/>
+              </a:cxn>
+              <a:cxn ang="0">
+                <a:pos x="csX3" y="csY3"/>
+              </a:cxn>
+            </a:cxnLst>
+            <a:rect l="l" t="t" r="r" b="b"/>
+            <a:pathLst>
+              <a:path w="185708" h="1180325" stroke="0" extrusionOk="0">
+                <a:moveTo>
+                  <a:pt x="185708" y="1180325"/>
+                </a:moveTo>
+                <a:cubicBezTo>
+                  <a:pt x="83144" y="1180325"/>
+                  <a:pt x="0" y="916100"/>
+                  <a:pt x="0" y="590162"/>
+                </a:cubicBezTo>
+                <a:lnTo>
+                  <a:pt x="0" y="590163"/>
+                </a:lnTo>
+                <a:cubicBezTo>
+                  <a:pt x="0" y="264225"/>
+                  <a:pt x="83144" y="0"/>
+                  <a:pt x="185708" y="0"/>
+                </a:cubicBezTo>
+                <a:lnTo>
+                  <a:pt x="185708" y="1180325"/>
+                </a:lnTo>
+                <a:close/>
+              </a:path>
+              <a:path w="185708" h="1180325" fill="none">
+                <a:moveTo>
+                  <a:pt x="154286" y="1180325"/>
+                </a:moveTo>
+                <a:cubicBezTo>
+                  <a:pt x="67433" y="1126906"/>
+                  <a:pt x="0" y="916100"/>
+                  <a:pt x="0" y="590162"/>
+                </a:cubicBezTo>
+                <a:lnTo>
+                  <a:pt x="0" y="590163"/>
+                </a:lnTo>
+                <a:cubicBezTo>
+                  <a:pt x="0" y="264225"/>
+                  <a:pt x="83144" y="0"/>
+                  <a:pt x="185708" y="0"/>
+                </a:cubicBezTo>
+              </a:path>
+            </a:pathLst>
+          </a:custGeom>
+          <a:ln w="38100">
+            <a:solidFill>
+              <a:srgbClr val="7D0112"/>
+            </a:solidFill>
+          </a:ln>
+          <a:effectLst/>
+        </p:spPr>
+        <p:style>
+          <a:lnRef idx="2">
+            <a:schemeClr val="accent1"/>
+          </a:lnRef>
+          <a:fillRef idx="0">
+            <a:schemeClr val="accent1"/>
+          </a:fillRef>
+          <a:effectRef idx="1">
+            <a:schemeClr val="accent1"/>
+          </a:effectRef>
+          <a:fontRef idx="minor">
+            <a:schemeClr val="tx1"/>
+          </a:fontRef>
+        </p:style>
+        <p:txBody>
+          <a:bodyPr rtlCol="0" anchor="ctr"/>
+          <a:lstStyle/>
+          <a:p>
+            <a:pPr algn="ctr"/>
+            <a:endParaRPr lang="en-NL" dirty="0"/>
+          </a:p>
+        </p:txBody>
+      </p:sp>
+      <p:sp>
+        <p:nvSpPr>
+          <p:cNvPr id="35" name="Left Bracket 34">
+            <a:extLst>
+              <a:ext uri="{FF2B5EF4-FFF2-40B4-BE49-F238E27FC236}">
+                <a16:creationId xmlns:a16="http://schemas.microsoft.com/office/drawing/2014/main" id="{D4CCF95F-A719-ADB6-4F64-416EF486E55D}"/>
+              </a:ext>
+            </a:extLst>
+          </p:cNvPr>
+          <p:cNvSpPr/>
+          <p:nvPr/>
+        </p:nvSpPr>
+        <p:spPr>
+          <a:xfrm rot="19896630">
+            <a:off x="1079865" y="3624373"/>
+            <a:ext cx="322790" cy="990860"/>
+          </a:xfrm>
+          <a:custGeom>
+            <a:avLst/>
+            <a:gdLst>
+              <a:gd name="csX0" fmla="*/ 322790 w 322790"/>
+              <a:gd name="csY0" fmla="*/ 975247 h 975247"/>
+              <a:gd name="csX1" fmla="*/ 0 w 322790"/>
+              <a:gd name="csY1" fmla="*/ 487623 h 975247"/>
+              <a:gd name="csX2" fmla="*/ 0 w 322790"/>
+              <a:gd name="csY2" fmla="*/ 487624 h 975247"/>
+              <a:gd name="csX3" fmla="*/ 322790 w 322790"/>
+              <a:gd name="csY3" fmla="*/ 0 h 975247"/>
+              <a:gd name="csX4" fmla="*/ 322790 w 322790"/>
+              <a:gd name="csY4" fmla="*/ 975247 h 975247"/>
+              <a:gd name="csX0" fmla="*/ 322790 w 322790"/>
+              <a:gd name="csY0" fmla="*/ 975247 h 975247"/>
+              <a:gd name="csX1" fmla="*/ 0 w 322790"/>
+              <a:gd name="csY1" fmla="*/ 487623 h 975247"/>
+              <a:gd name="csX2" fmla="*/ 0 w 322790"/>
+              <a:gd name="csY2" fmla="*/ 487624 h 975247"/>
+              <a:gd name="csX3" fmla="*/ 322790 w 322790"/>
+              <a:gd name="csY3" fmla="*/ 0 h 975247"/>
+              <a:gd name="csX0" fmla="*/ 322790 w 322790"/>
+              <a:gd name="csY0" fmla="*/ 975247 h 975247"/>
+              <a:gd name="csX1" fmla="*/ 0 w 322790"/>
+              <a:gd name="csY1" fmla="*/ 487623 h 975247"/>
+              <a:gd name="csX2" fmla="*/ 0 w 322790"/>
+              <a:gd name="csY2" fmla="*/ 487624 h 975247"/>
+              <a:gd name="csX3" fmla="*/ 322790 w 322790"/>
+              <a:gd name="csY3" fmla="*/ 0 h 975247"/>
+              <a:gd name="csX4" fmla="*/ 322790 w 322790"/>
+              <a:gd name="csY4" fmla="*/ 975247 h 975247"/>
+              <a:gd name="csX0" fmla="*/ 189206 w 322790"/>
+              <a:gd name="csY0" fmla="*/ 931623 h 975247"/>
+              <a:gd name="csX1" fmla="*/ 0 w 322790"/>
+              <a:gd name="csY1" fmla="*/ 487623 h 975247"/>
+              <a:gd name="csX2" fmla="*/ 0 w 322790"/>
+              <a:gd name="csY2" fmla="*/ 487624 h 975247"/>
+              <a:gd name="csX3" fmla="*/ 322790 w 322790"/>
+              <a:gd name="csY3" fmla="*/ 0 h 975247"/>
+              <a:gd name="csX0" fmla="*/ 322790 w 322790"/>
+              <a:gd name="csY0" fmla="*/ 975247 h 975247"/>
+              <a:gd name="csX1" fmla="*/ 0 w 322790"/>
+              <a:gd name="csY1" fmla="*/ 487623 h 975247"/>
+              <a:gd name="csX2" fmla="*/ 0 w 322790"/>
+              <a:gd name="csY2" fmla="*/ 487624 h 975247"/>
+              <a:gd name="csX3" fmla="*/ 322790 w 322790"/>
+              <a:gd name="csY3" fmla="*/ 0 h 975247"/>
+              <a:gd name="csX4" fmla="*/ 322790 w 322790"/>
+              <a:gd name="csY4" fmla="*/ 975247 h 975247"/>
+              <a:gd name="csX0" fmla="*/ 189206 w 322790"/>
+              <a:gd name="csY0" fmla="*/ 931623 h 975247"/>
+              <a:gd name="csX1" fmla="*/ 0 w 322790"/>
+              <a:gd name="csY1" fmla="*/ 487623 h 975247"/>
+              <a:gd name="csX2" fmla="*/ 0 w 322790"/>
+              <a:gd name="csY2" fmla="*/ 487624 h 975247"/>
+              <a:gd name="csX3" fmla="*/ 322790 w 322790"/>
+              <a:gd name="csY3" fmla="*/ 0 h 975247"/>
+              <a:gd name="csX0" fmla="*/ 322790 w 322790"/>
+              <a:gd name="csY0" fmla="*/ 990860 h 990860"/>
+              <a:gd name="csX1" fmla="*/ 0 w 322790"/>
+              <a:gd name="csY1" fmla="*/ 503236 h 990860"/>
+              <a:gd name="csX2" fmla="*/ 0 w 322790"/>
+              <a:gd name="csY2" fmla="*/ 503237 h 990860"/>
+              <a:gd name="csX3" fmla="*/ 322790 w 322790"/>
+              <a:gd name="csY3" fmla="*/ 15613 h 990860"/>
+              <a:gd name="csX4" fmla="*/ 322790 w 322790"/>
+              <a:gd name="csY4" fmla="*/ 990860 h 990860"/>
+              <a:gd name="csX0" fmla="*/ 189206 w 322790"/>
+              <a:gd name="csY0" fmla="*/ 947236 h 990860"/>
+              <a:gd name="csX1" fmla="*/ 0 w 322790"/>
+              <a:gd name="csY1" fmla="*/ 503236 h 990860"/>
+              <a:gd name="csX2" fmla="*/ 0 w 322790"/>
+              <a:gd name="csY2" fmla="*/ 503237 h 990860"/>
+              <a:gd name="csX3" fmla="*/ 206768 w 322790"/>
+              <a:gd name="csY3" fmla="*/ 0 h 990860"/>
+              <a:gd name="csX0" fmla="*/ 325826 w 325826"/>
+              <a:gd name="csY0" fmla="*/ 990860 h 990860"/>
+              <a:gd name="csX1" fmla="*/ 3036 w 325826"/>
+              <a:gd name="csY1" fmla="*/ 503236 h 990860"/>
+              <a:gd name="csX2" fmla="*/ 3036 w 325826"/>
+              <a:gd name="csY2" fmla="*/ 503237 h 990860"/>
+              <a:gd name="csX3" fmla="*/ 325826 w 325826"/>
+              <a:gd name="csY3" fmla="*/ 15613 h 990860"/>
+              <a:gd name="csX4" fmla="*/ 325826 w 325826"/>
+              <a:gd name="csY4" fmla="*/ 990860 h 990860"/>
+              <a:gd name="csX0" fmla="*/ 192242 w 325826"/>
+              <a:gd name="csY0" fmla="*/ 947236 h 990860"/>
+              <a:gd name="csX1" fmla="*/ 3036 w 325826"/>
+              <a:gd name="csY1" fmla="*/ 503236 h 990860"/>
+              <a:gd name="csX2" fmla="*/ 3036 w 325826"/>
+              <a:gd name="csY2" fmla="*/ 503237 h 990860"/>
+              <a:gd name="csX3" fmla="*/ 209804 w 325826"/>
+              <a:gd name="csY3" fmla="*/ 0 h 990860"/>
+              <a:gd name="csX0" fmla="*/ 322790 w 322790"/>
+              <a:gd name="csY0" fmla="*/ 990860 h 990860"/>
+              <a:gd name="csX1" fmla="*/ 0 w 322790"/>
+              <a:gd name="csY1" fmla="*/ 503236 h 990860"/>
+              <a:gd name="csX2" fmla="*/ 0 w 322790"/>
+              <a:gd name="csY2" fmla="*/ 503237 h 990860"/>
+              <a:gd name="csX3" fmla="*/ 322790 w 322790"/>
+              <a:gd name="csY3" fmla="*/ 15613 h 990860"/>
+              <a:gd name="csX4" fmla="*/ 322790 w 322790"/>
+              <a:gd name="csY4" fmla="*/ 990860 h 990860"/>
+              <a:gd name="csX0" fmla="*/ 189206 w 322790"/>
+              <a:gd name="csY0" fmla="*/ 947236 h 990860"/>
+              <a:gd name="csX1" fmla="*/ 0 w 322790"/>
+              <a:gd name="csY1" fmla="*/ 503236 h 990860"/>
+              <a:gd name="csX2" fmla="*/ 0 w 322790"/>
+              <a:gd name="csY2" fmla="*/ 503237 h 990860"/>
+              <a:gd name="csX3" fmla="*/ 206768 w 322790"/>
+              <a:gd name="csY3" fmla="*/ 0 h 990860"/>
+              <a:gd name="csX0" fmla="*/ 322790 w 322790"/>
+              <a:gd name="csY0" fmla="*/ 990860 h 990860"/>
+              <a:gd name="csX1" fmla="*/ 0 w 322790"/>
+              <a:gd name="csY1" fmla="*/ 503236 h 990860"/>
+              <a:gd name="csX2" fmla="*/ 0 w 322790"/>
+              <a:gd name="csY2" fmla="*/ 503237 h 990860"/>
+              <a:gd name="csX3" fmla="*/ 322790 w 322790"/>
+              <a:gd name="csY3" fmla="*/ 15613 h 990860"/>
+              <a:gd name="csX4" fmla="*/ 322790 w 322790"/>
+              <a:gd name="csY4" fmla="*/ 990860 h 990860"/>
+              <a:gd name="csX0" fmla="*/ 189206 w 322790"/>
+              <a:gd name="csY0" fmla="*/ 947236 h 990860"/>
+              <a:gd name="csX1" fmla="*/ 0 w 322790"/>
+              <a:gd name="csY1" fmla="*/ 503236 h 990860"/>
+              <a:gd name="csX2" fmla="*/ 0 w 322790"/>
+              <a:gd name="csY2" fmla="*/ 503237 h 990860"/>
+              <a:gd name="csX3" fmla="*/ 206768 w 322790"/>
+              <a:gd name="csY3" fmla="*/ 0 h 990860"/>
+            </a:gdLst>
+            <a:ahLst/>
+            <a:cxnLst>
+              <a:cxn ang="0">
+                <a:pos x="csX0" y="csY0"/>
+              </a:cxn>
+              <a:cxn ang="0">
+                <a:pos x="csX1" y="csY1"/>
+              </a:cxn>
+              <a:cxn ang="0">
+                <a:pos x="csX2" y="csY2"/>
+              </a:cxn>
+              <a:cxn ang="0">
+                <a:pos x="csX3" y="csY3"/>
+              </a:cxn>
+            </a:cxnLst>
+            <a:rect l="l" t="t" r="r" b="b"/>
+            <a:pathLst>
+              <a:path w="322790" h="990860" stroke="0" extrusionOk="0">
+                <a:moveTo>
+                  <a:pt x="322790" y="990860"/>
+                </a:moveTo>
+                <a:cubicBezTo>
+                  <a:pt x="144518" y="990860"/>
+                  <a:pt x="0" y="772543"/>
+                  <a:pt x="0" y="503236"/>
+                </a:cubicBezTo>
+                <a:lnTo>
+                  <a:pt x="0" y="503237"/>
+                </a:lnTo>
+                <a:cubicBezTo>
+                  <a:pt x="0" y="233930"/>
+                  <a:pt x="144518" y="15613"/>
+                  <a:pt x="322790" y="15613"/>
+                </a:cubicBezTo>
+                <a:lnTo>
+                  <a:pt x="322790" y="990860"/>
+                </a:lnTo>
+                <a:close/>
+              </a:path>
+              <a:path w="322790" h="990860" fill="none">
+                <a:moveTo>
+                  <a:pt x="189206" y="947236"/>
+                </a:moveTo>
+                <a:cubicBezTo>
+                  <a:pt x="44473" y="865352"/>
+                  <a:pt x="0" y="772543"/>
+                  <a:pt x="0" y="503236"/>
+                </a:cubicBezTo>
+                <a:lnTo>
+                  <a:pt x="0" y="503237"/>
+                </a:lnTo>
+                <a:cubicBezTo>
+                  <a:pt x="0" y="233930"/>
+                  <a:pt x="72619" y="111304"/>
+                  <a:pt x="206768" y="0"/>
+                </a:cubicBezTo>
+              </a:path>
+            </a:pathLst>
+          </a:custGeom>
+          <a:ln w="38100">
+            <a:solidFill>
+              <a:srgbClr val="09B0AC"/>
+            </a:solidFill>
+          </a:ln>
+          <a:effectLst/>
+        </p:spPr>
+        <p:style>
+          <a:lnRef idx="2">
+            <a:schemeClr val="accent1"/>
+          </a:lnRef>
+          <a:fillRef idx="0">
+            <a:schemeClr val="accent1"/>
+          </a:fillRef>
+          <a:effectRef idx="1">
+            <a:schemeClr val="accent1"/>
+          </a:effectRef>
+          <a:fontRef idx="minor">
+            <a:schemeClr val="tx1"/>
+          </a:fontRef>
+        </p:style>
+        <p:txBody>
+          <a:bodyPr rtlCol="0" anchor="ctr"/>
+          <a:lstStyle/>
+          <a:p>
+            <a:pPr algn="ctr"/>
+            <a:endParaRPr lang="en-NL"/>
+          </a:p>
+        </p:txBody>
+      </p:sp>
+      <p:sp>
+        <p:nvSpPr>
+          <p:cNvPr id="38" name="Left Bracket 37">
+            <a:extLst>
+              <a:ext uri="{FF2B5EF4-FFF2-40B4-BE49-F238E27FC236}">
+                <a16:creationId xmlns:a16="http://schemas.microsoft.com/office/drawing/2014/main" id="{920A1FC4-45AA-1703-DEE5-B7367A7D1472}"/>
+              </a:ext>
+            </a:extLst>
+          </p:cNvPr>
+          <p:cNvSpPr/>
+          <p:nvPr/>
+        </p:nvSpPr>
+        <p:spPr>
+          <a:xfrm rot="2188566">
+            <a:off x="2110700" y="831734"/>
+            <a:ext cx="244078" cy="2254284"/>
+          </a:xfrm>
+          <a:custGeom>
+            <a:avLst/>
+            <a:gdLst>
+              <a:gd name="csX0" fmla="*/ 244078 w 244078"/>
+              <a:gd name="csY0" fmla="*/ 2254284 h 2254284"/>
+              <a:gd name="csX1" fmla="*/ 0 w 244078"/>
+              <a:gd name="csY1" fmla="*/ 1364424 h 2254284"/>
+              <a:gd name="csX2" fmla="*/ 0 w 244078"/>
+              <a:gd name="csY2" fmla="*/ 889860 h 2254284"/>
+              <a:gd name="csX3" fmla="*/ 244078 w 244078"/>
+              <a:gd name="csY3" fmla="*/ 0 h 2254284"/>
+              <a:gd name="csX4" fmla="*/ 244078 w 244078"/>
+              <a:gd name="csY4" fmla="*/ 2254284 h 2254284"/>
+              <a:gd name="csX0" fmla="*/ 244078 w 244078"/>
+              <a:gd name="csY0" fmla="*/ 2254284 h 2254284"/>
+              <a:gd name="csX1" fmla="*/ 0 w 244078"/>
+              <a:gd name="csY1" fmla="*/ 1364424 h 2254284"/>
+              <a:gd name="csX2" fmla="*/ 0 w 244078"/>
+              <a:gd name="csY2" fmla="*/ 889860 h 2254284"/>
+              <a:gd name="csX3" fmla="*/ 244078 w 244078"/>
+              <a:gd name="csY3" fmla="*/ 0 h 2254284"/>
+              <a:gd name="csX0" fmla="*/ 244386 w 244386"/>
+              <a:gd name="csY0" fmla="*/ 2254284 h 2254284"/>
+              <a:gd name="csX1" fmla="*/ 308 w 244386"/>
+              <a:gd name="csY1" fmla="*/ 1364424 h 2254284"/>
+              <a:gd name="csX2" fmla="*/ 308 w 244386"/>
+              <a:gd name="csY2" fmla="*/ 889860 h 2254284"/>
+              <a:gd name="csX3" fmla="*/ 244386 w 244386"/>
+              <a:gd name="csY3" fmla="*/ 0 h 2254284"/>
+              <a:gd name="csX4" fmla="*/ 244386 w 244386"/>
+              <a:gd name="csY4" fmla="*/ 2254284 h 2254284"/>
+              <a:gd name="csX0" fmla="*/ 244386 w 244386"/>
+              <a:gd name="csY0" fmla="*/ 2254284 h 2254284"/>
+              <a:gd name="csX1" fmla="*/ 308 w 244386"/>
+              <a:gd name="csY1" fmla="*/ 1364424 h 2254284"/>
+              <a:gd name="csX2" fmla="*/ 308 w 244386"/>
+              <a:gd name="csY2" fmla="*/ 889860 h 2254284"/>
+              <a:gd name="csX3" fmla="*/ 122564 w 244386"/>
+              <a:gd name="csY3" fmla="*/ 168221 h 2254284"/>
+              <a:gd name="csX0" fmla="*/ 244909 w 244909"/>
+              <a:gd name="csY0" fmla="*/ 2254284 h 2254284"/>
+              <a:gd name="csX1" fmla="*/ 831 w 244909"/>
+              <a:gd name="csY1" fmla="*/ 1364424 h 2254284"/>
+              <a:gd name="csX2" fmla="*/ 831 w 244909"/>
+              <a:gd name="csY2" fmla="*/ 889860 h 2254284"/>
+              <a:gd name="csX3" fmla="*/ 244909 w 244909"/>
+              <a:gd name="csY3" fmla="*/ 0 h 2254284"/>
+              <a:gd name="csX4" fmla="*/ 244909 w 244909"/>
+              <a:gd name="csY4" fmla="*/ 2254284 h 2254284"/>
+              <a:gd name="csX0" fmla="*/ 244909 w 244909"/>
+              <a:gd name="csY0" fmla="*/ 2254284 h 2254284"/>
+              <a:gd name="csX1" fmla="*/ 831 w 244909"/>
+              <a:gd name="csY1" fmla="*/ 1364424 h 2254284"/>
+              <a:gd name="csX2" fmla="*/ 831 w 244909"/>
+              <a:gd name="csY2" fmla="*/ 889860 h 2254284"/>
+              <a:gd name="csX3" fmla="*/ 123087 w 244909"/>
+              <a:gd name="csY3" fmla="*/ 168221 h 2254284"/>
+              <a:gd name="csX0" fmla="*/ 244078 w 244078"/>
+              <a:gd name="csY0" fmla="*/ 2254284 h 2254284"/>
+              <a:gd name="csX1" fmla="*/ 0 w 244078"/>
+              <a:gd name="csY1" fmla="*/ 1364424 h 2254284"/>
+              <a:gd name="csX2" fmla="*/ 0 w 244078"/>
+              <a:gd name="csY2" fmla="*/ 889860 h 2254284"/>
+              <a:gd name="csX3" fmla="*/ 244078 w 244078"/>
+              <a:gd name="csY3" fmla="*/ 0 h 2254284"/>
+              <a:gd name="csX4" fmla="*/ 244078 w 244078"/>
+              <a:gd name="csY4" fmla="*/ 2254284 h 2254284"/>
+              <a:gd name="csX0" fmla="*/ 244078 w 244078"/>
+              <a:gd name="csY0" fmla="*/ 2254284 h 2254284"/>
+              <a:gd name="csX1" fmla="*/ 0 w 244078"/>
+              <a:gd name="csY1" fmla="*/ 1364424 h 2254284"/>
+              <a:gd name="csX2" fmla="*/ 0 w 244078"/>
+              <a:gd name="csY2" fmla="*/ 889860 h 2254284"/>
+              <a:gd name="csX3" fmla="*/ 122256 w 244078"/>
+              <a:gd name="csY3" fmla="*/ 168221 h 2254284"/>
+              <a:gd name="csX0" fmla="*/ 244480 w 244480"/>
+              <a:gd name="csY0" fmla="*/ 2254284 h 2254284"/>
+              <a:gd name="csX1" fmla="*/ 402 w 244480"/>
+              <a:gd name="csY1" fmla="*/ 1364424 h 2254284"/>
+              <a:gd name="csX2" fmla="*/ 402 w 244480"/>
+              <a:gd name="csY2" fmla="*/ 889860 h 2254284"/>
+              <a:gd name="csX3" fmla="*/ 244480 w 244480"/>
+              <a:gd name="csY3" fmla="*/ 0 h 2254284"/>
+              <a:gd name="csX4" fmla="*/ 244480 w 244480"/>
+              <a:gd name="csY4" fmla="*/ 2254284 h 2254284"/>
+              <a:gd name="csX0" fmla="*/ 244480 w 244480"/>
+              <a:gd name="csY0" fmla="*/ 2254284 h 2254284"/>
+              <a:gd name="csX1" fmla="*/ 402 w 244480"/>
+              <a:gd name="csY1" fmla="*/ 1364424 h 2254284"/>
+              <a:gd name="csX2" fmla="*/ 402 w 244480"/>
+              <a:gd name="csY2" fmla="*/ 889860 h 2254284"/>
+              <a:gd name="csX3" fmla="*/ 122658 w 244480"/>
+              <a:gd name="csY3" fmla="*/ 168221 h 2254284"/>
+              <a:gd name="csX0" fmla="*/ 246805 w 246805"/>
+              <a:gd name="csY0" fmla="*/ 2254284 h 2254284"/>
+              <a:gd name="csX1" fmla="*/ 2727 w 246805"/>
+              <a:gd name="csY1" fmla="*/ 1364424 h 2254284"/>
+              <a:gd name="csX2" fmla="*/ 2727 w 246805"/>
+              <a:gd name="csY2" fmla="*/ 889860 h 2254284"/>
+              <a:gd name="csX3" fmla="*/ 246805 w 246805"/>
+              <a:gd name="csY3" fmla="*/ 0 h 2254284"/>
+              <a:gd name="csX4" fmla="*/ 246805 w 246805"/>
+              <a:gd name="csY4" fmla="*/ 2254284 h 2254284"/>
+              <a:gd name="csX0" fmla="*/ 246805 w 246805"/>
+              <a:gd name="csY0" fmla="*/ 2254284 h 2254284"/>
+              <a:gd name="csX1" fmla="*/ 2727 w 246805"/>
+              <a:gd name="csY1" fmla="*/ 1364424 h 2254284"/>
+              <a:gd name="csX2" fmla="*/ 2727 w 246805"/>
+              <a:gd name="csY2" fmla="*/ 889860 h 2254284"/>
+              <a:gd name="csX3" fmla="*/ 109272 w 246805"/>
+              <a:gd name="csY3" fmla="*/ 168114 h 2254284"/>
+              <a:gd name="csX0" fmla="*/ 244350 w 244350"/>
+              <a:gd name="csY0" fmla="*/ 2254284 h 2254284"/>
+              <a:gd name="csX1" fmla="*/ 272 w 244350"/>
+              <a:gd name="csY1" fmla="*/ 1364424 h 2254284"/>
+              <a:gd name="csX2" fmla="*/ 272 w 244350"/>
+              <a:gd name="csY2" fmla="*/ 889860 h 2254284"/>
+              <a:gd name="csX3" fmla="*/ 244350 w 244350"/>
+              <a:gd name="csY3" fmla="*/ 0 h 2254284"/>
+              <a:gd name="csX4" fmla="*/ 244350 w 244350"/>
+              <a:gd name="csY4" fmla="*/ 2254284 h 2254284"/>
+              <a:gd name="csX0" fmla="*/ 244350 w 244350"/>
+              <a:gd name="csY0" fmla="*/ 2254284 h 2254284"/>
+              <a:gd name="csX1" fmla="*/ 272 w 244350"/>
+              <a:gd name="csY1" fmla="*/ 1364424 h 2254284"/>
+              <a:gd name="csX2" fmla="*/ 272 w 244350"/>
+              <a:gd name="csY2" fmla="*/ 889860 h 2254284"/>
+              <a:gd name="csX3" fmla="*/ 106817 w 244350"/>
+              <a:gd name="csY3" fmla="*/ 168114 h 2254284"/>
+              <a:gd name="csX0" fmla="*/ 244078 w 244078"/>
+              <a:gd name="csY0" fmla="*/ 2254284 h 2254284"/>
+              <a:gd name="csX1" fmla="*/ 0 w 244078"/>
+              <a:gd name="csY1" fmla="*/ 1364424 h 2254284"/>
+              <a:gd name="csX2" fmla="*/ 0 w 244078"/>
+              <a:gd name="csY2" fmla="*/ 889860 h 2254284"/>
+              <a:gd name="csX3" fmla="*/ 244078 w 244078"/>
+              <a:gd name="csY3" fmla="*/ 0 h 2254284"/>
+              <a:gd name="csX4" fmla="*/ 244078 w 244078"/>
+              <a:gd name="csY4" fmla="*/ 2254284 h 2254284"/>
+              <a:gd name="csX0" fmla="*/ 244078 w 244078"/>
+              <a:gd name="csY0" fmla="*/ 2254284 h 2254284"/>
+              <a:gd name="csX1" fmla="*/ 0 w 244078"/>
+              <a:gd name="csY1" fmla="*/ 1364424 h 2254284"/>
+              <a:gd name="csX2" fmla="*/ 0 w 244078"/>
+              <a:gd name="csY2" fmla="*/ 889860 h 2254284"/>
+              <a:gd name="csX3" fmla="*/ 106545 w 244078"/>
+              <a:gd name="csY3" fmla="*/ 168114 h 2254284"/>
+            </a:gdLst>
+            <a:ahLst/>
+            <a:cxnLst>
+              <a:cxn ang="0">
+                <a:pos x="csX0" y="csY0"/>
+              </a:cxn>
+              <a:cxn ang="0">
+                <a:pos x="csX1" y="csY1"/>
+              </a:cxn>
+              <a:cxn ang="0">
+                <a:pos x="csX2" y="csY2"/>
+              </a:cxn>
+              <a:cxn ang="0">
+                <a:pos x="csX3" y="csY3"/>
+              </a:cxn>
+            </a:cxnLst>
+            <a:rect l="l" t="t" r="r" b="b"/>
+            <a:pathLst>
+              <a:path w="244078" h="2254284" stroke="0" extrusionOk="0">
+                <a:moveTo>
+                  <a:pt x="244078" y="2254284"/>
+                </a:moveTo>
+                <a:cubicBezTo>
+                  <a:pt x="109277" y="2254284"/>
+                  <a:pt x="0" y="1855880"/>
+                  <a:pt x="0" y="1364424"/>
+                </a:cubicBezTo>
+                <a:lnTo>
+                  <a:pt x="0" y="889860"/>
+                </a:lnTo>
+                <a:cubicBezTo>
+                  <a:pt x="0" y="398404"/>
+                  <a:pt x="109277" y="0"/>
+                  <a:pt x="244078" y="0"/>
+                </a:cubicBezTo>
+                <a:lnTo>
+                  <a:pt x="244078" y="2254284"/>
+                </a:lnTo>
+                <a:close/>
+              </a:path>
+              <a:path w="244078" h="2254284" fill="none">
+                <a:moveTo>
+                  <a:pt x="244078" y="2254284"/>
+                </a:moveTo>
+                <a:cubicBezTo>
+                  <a:pt x="109277" y="2254284"/>
+                  <a:pt x="0" y="1855880"/>
+                  <a:pt x="0" y="1364424"/>
+                </a:cubicBezTo>
+                <a:lnTo>
+                  <a:pt x="0" y="889860"/>
+                </a:lnTo>
+                <a:cubicBezTo>
+                  <a:pt x="0" y="398404"/>
+                  <a:pt x="46908" y="296209"/>
+                  <a:pt x="106545" y="168114"/>
+                </a:cubicBezTo>
+              </a:path>
+            </a:pathLst>
+          </a:custGeom>
+          <a:ln w="38100">
+            <a:solidFill>
+              <a:srgbClr val="09B0AC"/>
+            </a:solidFill>
+          </a:ln>
+          <a:effectLst/>
+        </p:spPr>
+        <p:style>
+          <a:lnRef idx="2">
+            <a:schemeClr val="accent1"/>
+          </a:lnRef>
+          <a:fillRef idx="0">
+            <a:schemeClr val="accent1"/>
+          </a:fillRef>
+          <a:effectRef idx="1">
+            <a:schemeClr val="accent1"/>
+          </a:effectRef>
+          <a:fontRef idx="minor">
+            <a:schemeClr val="tx1"/>
+          </a:fontRef>
+        </p:style>
+        <p:txBody>
+          <a:bodyPr rtlCol="0" anchor="ctr"/>
+          <a:lstStyle/>
+          <a:p>
+            <a:pPr algn="ctr"/>
+            <a:endParaRPr lang="en-NL"/>
+          </a:p>
+        </p:txBody>
+      </p:sp>
+      <p:sp>
+        <p:nvSpPr>
+          <p:cNvPr id="7" name="Isosceles Triangle 6">
+            <a:extLst>
+              <a:ext uri="{FF2B5EF4-FFF2-40B4-BE49-F238E27FC236}">
+                <a16:creationId xmlns:a16="http://schemas.microsoft.com/office/drawing/2014/main" id="{F9D42AB0-81CA-469C-6F25-6C107BBB34CF}"/>
+              </a:ext>
+            </a:extLst>
+          </p:cNvPr>
+          <p:cNvSpPr/>
+          <p:nvPr/>
+        </p:nvSpPr>
+        <p:spPr>
+          <a:xfrm rot="18001017">
+            <a:off x="1326690" y="1377264"/>
+            <a:ext cx="149415" cy="134471"/>
+          </a:xfrm>
+          <a:prstGeom prst="triangle">
+            <a:avLst/>
+          </a:prstGeom>
+          <a:solidFill>
+            <a:srgbClr val="09B0AC"/>
+          </a:solidFill>
+          <a:ln>
+            <a:solidFill>
+              <a:srgbClr val="09B0AC"/>
+            </a:solidFill>
+          </a:ln>
+          <a:effectLst/>
+        </p:spPr>
+        <p:style>
+          <a:lnRef idx="1">
+            <a:schemeClr val="accent1"/>
+          </a:lnRef>
+          <a:fillRef idx="3">
+            <a:schemeClr val="accent1"/>
+          </a:fillRef>
+          <a:effectRef idx="2">
+            <a:schemeClr val="accent1"/>
+          </a:effectRef>
+          <a:fontRef idx="minor">
+            <a:schemeClr val="lt1"/>
+          </a:fontRef>
+        </p:style>
+        <p:txBody>
+          <a:bodyPr rtlCol="0" anchor="ctr"/>
+          <a:lstStyle/>
+          <a:p>
+            <a:pPr algn="ctr"/>
+            <a:endParaRPr lang="en-NL"/>
+          </a:p>
+        </p:txBody>
+      </p:sp>
+      <p:sp>
+        <p:nvSpPr>
+          <p:cNvPr id="10" name="Isosceles Triangle 9">
+            <a:extLst>
+              <a:ext uri="{FF2B5EF4-FFF2-40B4-BE49-F238E27FC236}">
+                <a16:creationId xmlns:a16="http://schemas.microsoft.com/office/drawing/2014/main" id="{BEF19BBE-0C09-6531-5D0F-8F81B59828E8}"/>
+              </a:ext>
+            </a:extLst>
+          </p:cNvPr>
+          <p:cNvSpPr/>
+          <p:nvPr/>
+        </p:nvSpPr>
+        <p:spPr>
+          <a:xfrm rot="3111262">
+            <a:off x="2733948" y="1095749"/>
+            <a:ext cx="149415" cy="134471"/>
+          </a:xfrm>
+          <a:prstGeom prst="triangle">
+            <a:avLst/>
+          </a:prstGeom>
+          <a:solidFill>
+            <a:srgbClr val="09B0AC"/>
+          </a:solidFill>
+          <a:ln>
+            <a:solidFill>
+              <a:srgbClr val="09B0AC"/>
+            </a:solidFill>
+          </a:ln>
+          <a:effectLst/>
+        </p:spPr>
+        <p:style>
+          <a:lnRef idx="1">
+            <a:schemeClr val="accent1"/>
+          </a:lnRef>
+          <a:fillRef idx="3">
+            <a:schemeClr val="accent1"/>
+          </a:fillRef>
+          <a:effectRef idx="2">
+            <a:schemeClr val="accent1"/>
+          </a:effectRef>
+          <a:fontRef idx="minor">
+            <a:schemeClr val="lt1"/>
+          </a:fontRef>
+        </p:style>
+        <p:txBody>
+          <a:bodyPr rtlCol="0" anchor="ctr"/>
+          <a:lstStyle/>
+          <a:p>
+            <a:pPr algn="ctr"/>
+            <a:endParaRPr lang="en-NL"/>
+          </a:p>
+        </p:txBody>
+      </p:sp>
+      <p:sp>
+        <p:nvSpPr>
+          <p:cNvPr id="11" name="Isosceles Triangle 10">
+            <a:extLst>
+              <a:ext uri="{FF2B5EF4-FFF2-40B4-BE49-F238E27FC236}">
+                <a16:creationId xmlns:a16="http://schemas.microsoft.com/office/drawing/2014/main" id="{9E989940-31AC-1265-F4DE-23F0F3E0E0B8}"/>
+              </a:ext>
+            </a:extLst>
+          </p:cNvPr>
+          <p:cNvSpPr/>
+          <p:nvPr/>
+        </p:nvSpPr>
+        <p:spPr>
+          <a:xfrm rot="18902611">
+            <a:off x="1651528" y="3129274"/>
+            <a:ext cx="149415" cy="134471"/>
+          </a:xfrm>
+          <a:prstGeom prst="triangle">
+            <a:avLst/>
+          </a:prstGeom>
+          <a:solidFill>
+            <a:srgbClr val="7D0112"/>
+          </a:solidFill>
+          <a:ln>
+            <a:solidFill>
+              <a:srgbClr val="7D0112"/>
+            </a:solidFill>
+          </a:ln>
+          <a:effectLst/>
+        </p:spPr>
+        <p:style>
+          <a:lnRef idx="1">
+            <a:schemeClr val="accent1"/>
+          </a:lnRef>
+          <a:fillRef idx="3">
+            <a:schemeClr val="accent1"/>
+          </a:fillRef>
+          <a:effectRef idx="2">
+            <a:schemeClr val="accent1"/>
+          </a:effectRef>
+          <a:fontRef idx="minor">
+            <a:schemeClr val="lt1"/>
+          </a:fontRef>
+        </p:style>
+        <p:txBody>
+          <a:bodyPr rtlCol="0" anchor="ctr"/>
+          <a:lstStyle/>
+          <a:p>
+            <a:pPr algn="ctr"/>
+            <a:endParaRPr lang="en-NL"/>
+          </a:p>
+        </p:txBody>
+      </p:sp>
+      <p:sp>
+        <p:nvSpPr>
+          <p:cNvPr id="3" name="Isosceles Triangle 2">
+            <a:extLst>
+              <a:ext uri="{FF2B5EF4-FFF2-40B4-BE49-F238E27FC236}">
+                <a16:creationId xmlns:a16="http://schemas.microsoft.com/office/drawing/2014/main" id="{D799E0D9-4E59-6609-D71B-E4AAF657DC3B}"/>
+              </a:ext>
+            </a:extLst>
+          </p:cNvPr>
+          <p:cNvSpPr/>
+          <p:nvPr/>
+        </p:nvSpPr>
+        <p:spPr>
+          <a:xfrm rot="6705178">
+            <a:off x="543676" y="2295494"/>
+            <a:ext cx="149415" cy="134471"/>
+          </a:xfrm>
+          <a:prstGeom prst="triangle">
+            <a:avLst/>
+          </a:prstGeom>
+          <a:solidFill>
+            <a:srgbClr val="09B0AC"/>
+          </a:solidFill>
+          <a:ln>
+            <a:solidFill>
+              <a:srgbClr val="09B0AC"/>
+            </a:solidFill>
+          </a:ln>
+          <a:effectLst/>
+        </p:spPr>
+        <p:style>
+          <a:lnRef idx="1">
+            <a:schemeClr val="accent1"/>
+          </a:lnRef>
+          <a:fillRef idx="3">
+            <a:schemeClr val="accent1"/>
+          </a:fillRef>
+          <a:effectRef idx="2">
+            <a:schemeClr val="accent1"/>
+          </a:effectRef>
+          <a:fontRef idx="minor">
+            <a:schemeClr val="lt1"/>
+          </a:fontRef>
+        </p:style>
+        <p:txBody>
+          <a:bodyPr rtlCol="0" anchor="ctr"/>
+          <a:lstStyle/>
+          <a:p>
+            <a:pPr algn="ctr"/>
+            <a:endParaRPr lang="en-NL"/>
+          </a:p>
+        </p:txBody>
+      </p:sp>
+      <p:sp>
+        <p:nvSpPr>
+          <p:cNvPr id="8" name="Isosceles Triangle 7">
+            <a:extLst>
+              <a:ext uri="{FF2B5EF4-FFF2-40B4-BE49-F238E27FC236}">
+                <a16:creationId xmlns:a16="http://schemas.microsoft.com/office/drawing/2014/main" id="{0561AFF8-F110-FB7B-A287-72075484219C}"/>
+              </a:ext>
+            </a:extLst>
+          </p:cNvPr>
+          <p:cNvSpPr/>
+          <p:nvPr/>
+        </p:nvSpPr>
+        <p:spPr>
+          <a:xfrm rot="17755380">
+            <a:off x="1580264" y="1124626"/>
+            <a:ext cx="149415" cy="134471"/>
+          </a:xfrm>
+          <a:prstGeom prst="triangle">
+            <a:avLst/>
+          </a:prstGeom>
+          <a:solidFill>
+            <a:srgbClr val="7D0112"/>
+          </a:solidFill>
+          <a:ln>
+            <a:solidFill>
+              <a:srgbClr val="7D0112"/>
+            </a:solidFill>
+          </a:ln>
+          <a:effectLst/>
+        </p:spPr>
+        <p:style>
+          <a:lnRef idx="1">
+            <a:schemeClr val="accent1"/>
+          </a:lnRef>
+          <a:fillRef idx="3">
+            <a:schemeClr val="accent1"/>
+          </a:fillRef>
+          <a:effectRef idx="2">
+            <a:schemeClr val="accent1"/>
+          </a:effectRef>
+          <a:fontRef idx="minor">
+            <a:schemeClr val="lt1"/>
+          </a:fontRef>
+        </p:style>
+        <p:txBody>
+          <a:bodyPr rtlCol="0" anchor="ctr"/>
+          <a:lstStyle/>
+          <a:p>
+            <a:pPr algn="ctr"/>
+            <a:endParaRPr lang="en-NL"/>
+          </a:p>
+        </p:txBody>
+      </p:sp>
+      <p:sp>
+        <p:nvSpPr>
+          <p:cNvPr id="28" name="Isosceles Triangle 27">
+            <a:extLst>
+              <a:ext uri="{FF2B5EF4-FFF2-40B4-BE49-F238E27FC236}">
+                <a16:creationId xmlns:a16="http://schemas.microsoft.com/office/drawing/2014/main" id="{F3D56479-A609-7741-617F-CDCE28BFD520}"/>
+              </a:ext>
+            </a:extLst>
+          </p:cNvPr>
+          <p:cNvSpPr/>
+          <p:nvPr/>
+        </p:nvSpPr>
+        <p:spPr>
+          <a:xfrm rot="18226892">
+            <a:off x="3786001" y="1388479"/>
+            <a:ext cx="149415" cy="134471"/>
+          </a:xfrm>
+          <a:prstGeom prst="triangle">
+            <a:avLst/>
+          </a:prstGeom>
+          <a:solidFill>
+            <a:srgbClr val="7D0112"/>
+          </a:solidFill>
+          <a:ln>
+            <a:solidFill>
+              <a:srgbClr val="7D0112"/>
+            </a:solidFill>
+          </a:ln>
+          <a:effectLst/>
+        </p:spPr>
+        <p:style>
+          <a:lnRef idx="1">
+            <a:schemeClr val="accent1"/>
+          </a:lnRef>
+          <a:fillRef idx="3">
+            <a:schemeClr val="accent1"/>
+          </a:fillRef>
+          <a:effectRef idx="2">
+            <a:schemeClr val="accent1"/>
+          </a:effectRef>
+          <a:fontRef idx="minor">
+            <a:schemeClr val="lt1"/>
+          </a:fontRef>
+        </p:style>
+        <p:txBody>
+          <a:bodyPr rtlCol="0" anchor="ctr"/>
+          <a:lstStyle/>
+          <a:p>
+            <a:pPr algn="ctr"/>
+            <a:endParaRPr lang="en-NL"/>
+          </a:p>
+        </p:txBody>
+      </p:sp>
+      <p:sp>
+        <p:nvSpPr>
+          <p:cNvPr id="29" name="Isosceles Triangle 28">
+            <a:extLst>
+              <a:ext uri="{FF2B5EF4-FFF2-40B4-BE49-F238E27FC236}">
+                <a16:creationId xmlns:a16="http://schemas.microsoft.com/office/drawing/2014/main" id="{0C158919-5676-0186-C027-D547F055F72D}"/>
+              </a:ext>
+            </a:extLst>
+          </p:cNvPr>
+          <p:cNvSpPr/>
+          <p:nvPr/>
+        </p:nvSpPr>
+        <p:spPr>
+          <a:xfrm rot="6965398">
+            <a:off x="3003282" y="2308160"/>
+            <a:ext cx="149415" cy="134471"/>
+          </a:xfrm>
+          <a:prstGeom prst="triangle">
+            <a:avLst/>
+          </a:prstGeom>
+          <a:solidFill>
+            <a:srgbClr val="7D0112"/>
+          </a:solidFill>
+          <a:ln>
+            <a:solidFill>
+              <a:srgbClr val="7D0112"/>
+            </a:solidFill>
+          </a:ln>
+          <a:effectLst/>
+        </p:spPr>
+        <p:style>
+          <a:lnRef idx="1">
+            <a:schemeClr val="accent1"/>
+          </a:lnRef>
+          <a:fillRef idx="3">
+            <a:schemeClr val="accent1"/>
+          </a:fillRef>
+          <a:effectRef idx="2">
+            <a:schemeClr val="accent1"/>
+          </a:effectRef>
+          <a:fontRef idx="minor">
+            <a:schemeClr val="lt1"/>
+          </a:fontRef>
+        </p:style>
+        <p:txBody>
+          <a:bodyPr rtlCol="0" anchor="ctr"/>
+          <a:lstStyle/>
+          <a:p>
+            <a:pPr algn="ctr"/>
+            <a:endParaRPr lang="en-NL"/>
+          </a:p>
+        </p:txBody>
+      </p:sp>
+      <p:sp>
+        <p:nvSpPr>
+          <p:cNvPr id="34" name="Isosceles Triangle 33">
+            <a:extLst>
+              <a:ext uri="{FF2B5EF4-FFF2-40B4-BE49-F238E27FC236}">
+                <a16:creationId xmlns:a16="http://schemas.microsoft.com/office/drawing/2014/main" id="{20C1D9DF-6F68-17EE-0916-3F53A50A9FE5}"/>
+              </a:ext>
+            </a:extLst>
+          </p:cNvPr>
+          <p:cNvSpPr/>
+          <p:nvPr/>
+        </p:nvSpPr>
+        <p:spPr>
+          <a:xfrm rot="5718717">
+            <a:off x="1415485" y="4430925"/>
+            <a:ext cx="149415" cy="134471"/>
+          </a:xfrm>
+          <a:prstGeom prst="triangle">
+            <a:avLst/>
+          </a:prstGeom>
+          <a:solidFill>
+            <a:srgbClr val="09B0AC"/>
+          </a:solidFill>
+          <a:ln>
+            <a:solidFill>
+              <a:srgbClr val="09B0AC"/>
+            </a:solidFill>
+          </a:ln>
+          <a:effectLst/>
+        </p:spPr>
+        <p:style>
+          <a:lnRef idx="1">
+            <a:schemeClr val="accent1"/>
+          </a:lnRef>
+          <a:fillRef idx="3">
+            <a:schemeClr val="accent1"/>
+          </a:fillRef>
+          <a:effectRef idx="2">
+            <a:schemeClr val="accent1"/>
+          </a:effectRef>
+          <a:fontRef idx="minor">
+            <a:schemeClr val="lt1"/>
+          </a:fontRef>
+        </p:style>
+        <p:txBody>
+          <a:bodyPr rtlCol="0" anchor="ctr"/>
+          <a:lstStyle/>
+          <a:p>
+            <a:pPr algn="ctr"/>
+            <a:endParaRPr lang="en-NL"/>
+          </a:p>
+        </p:txBody>
+      </p:sp>
+      <p:sp>
+        <p:nvSpPr>
+          <p:cNvPr id="39" name="TextBox 38">
+            <a:extLst>
+              <a:ext uri="{FF2B5EF4-FFF2-40B4-BE49-F238E27FC236}">
+                <a16:creationId xmlns:a16="http://schemas.microsoft.com/office/drawing/2014/main" id="{25272641-A539-A402-5C94-67B00CCA7A40}"/>
+              </a:ext>
+            </a:extLst>
+          </p:cNvPr>
+          <p:cNvSpPr txBox="1"/>
+          <p:nvPr/>
+        </p:nvSpPr>
+        <p:spPr>
+          <a:xfrm>
+            <a:off x="89506" y="2127424"/>
+            <a:ext cx="400595" cy="584775"/>
+          </a:xfrm>
+          <a:prstGeom prst="rect">
+            <a:avLst/>
+          </a:prstGeom>
+          <a:noFill/>
+        </p:spPr>
+        <p:txBody>
+          <a:bodyPr wrap="square" rtlCol="0">
+            <a:spAutoFit/>
+          </a:bodyPr>
+          <a:lstStyle/>
+          <a:p>
+            <a:r>
+              <a:rPr lang="en-US" sz="3200" dirty="0">
+                <a:solidFill>
+                  <a:srgbClr val="09B0AC"/>
+                </a:solidFill>
+                <a:latin typeface="Lato Light" panose="020F0502020204030203" pitchFamily="34" charset="0"/>
+                <a:ea typeface="Lato Light" panose="020F0502020204030203" pitchFamily="34" charset="0"/>
+                <a:cs typeface="Lato Light" panose="020F0502020204030203" pitchFamily="34" charset="0"/>
+              </a:rPr>
+              <a:t>+</a:t>
+            </a:r>
+            <a:endParaRPr lang="en-NL" sz="3200" dirty="0">
+              <a:solidFill>
+                <a:srgbClr val="09B0AC"/>
+              </a:solidFill>
+              <a:latin typeface="Lato Light" panose="020F0502020204030203" pitchFamily="34" charset="0"/>
+              <a:ea typeface="Lato Light" panose="020F0502020204030203" pitchFamily="34" charset="0"/>
+              <a:cs typeface="Lato Light" panose="020F0502020204030203" pitchFamily="34" charset="0"/>
+            </a:endParaRPr>
+          </a:p>
+        </p:txBody>
+      </p:sp>
+      <p:sp>
+        <p:nvSpPr>
+          <p:cNvPr id="41" name="TextBox 40">
+            <a:extLst>
+              <a:ext uri="{FF2B5EF4-FFF2-40B4-BE49-F238E27FC236}">
+                <a16:creationId xmlns:a16="http://schemas.microsoft.com/office/drawing/2014/main" id="{96C6EDA8-801A-CA11-32FA-BEA4C06FED72}"/>
+              </a:ext>
+            </a:extLst>
+          </p:cNvPr>
+          <p:cNvSpPr txBox="1"/>
+          <p:nvPr/>
+        </p:nvSpPr>
+        <p:spPr>
+          <a:xfrm>
+            <a:off x="1676850" y="690259"/>
+            <a:ext cx="465102" cy="584775"/>
+          </a:xfrm>
+          <a:prstGeom prst="rect">
+            <a:avLst/>
+          </a:prstGeom>
+          <a:noFill/>
+          <a:effectLst/>
+        </p:spPr>
+        <p:txBody>
+          <a:bodyPr wrap="square" rtlCol="0">
+            <a:spAutoFit/>
+          </a:bodyPr>
+          <a:lstStyle/>
+          <a:p>
+            <a:r>
+              <a:rPr lang="en-NL" sz="2400" dirty="0">
+                <a:solidFill>
+                  <a:srgbClr val="7D0112"/>
+                </a:solidFill>
+                <a:latin typeface="Lato" panose="020F0502020204030203" pitchFamily="34" charset="0"/>
+                <a:ea typeface="Lato" panose="020F0502020204030203" pitchFamily="34" charset="0"/>
+                <a:cs typeface="Lato" panose="020F0502020204030203" pitchFamily="34" charset="0"/>
+              </a:rPr>
+              <a:t>—</a:t>
+            </a:r>
+            <a:r>
+              <a:rPr lang="en-US" sz="3200" dirty="0">
+                <a:solidFill>
+                  <a:srgbClr val="7D0112"/>
+                </a:solidFill>
+                <a:latin typeface="Lato Light" panose="020F0502020204030203" pitchFamily="34" charset="0"/>
+                <a:ea typeface="Lato Light" panose="020F0502020204030203" pitchFamily="34" charset="0"/>
+                <a:cs typeface="Lato Light" panose="020F0502020204030203" pitchFamily="34" charset="0"/>
+              </a:rPr>
+              <a:t> </a:t>
+            </a:r>
+            <a:endParaRPr lang="en-NL" sz="3200" dirty="0">
+              <a:solidFill>
+                <a:srgbClr val="7D0112"/>
+              </a:solidFill>
+              <a:latin typeface="Lato Light" panose="020F0502020204030203" pitchFamily="34" charset="0"/>
+              <a:ea typeface="Lato Light" panose="020F0502020204030203" pitchFamily="34" charset="0"/>
+              <a:cs typeface="Lato Light" panose="020F0502020204030203" pitchFamily="34" charset="0"/>
+            </a:endParaRPr>
+          </a:p>
+        </p:txBody>
+      </p:sp>
+      <p:sp>
+        <p:nvSpPr>
+          <p:cNvPr id="43" name="TextBox 42">
+            <a:extLst>
+              <a:ext uri="{FF2B5EF4-FFF2-40B4-BE49-F238E27FC236}">
+                <a16:creationId xmlns:a16="http://schemas.microsoft.com/office/drawing/2014/main" id="{A14D5C61-5F12-7800-FF58-A537533EE72D}"/>
+              </a:ext>
+            </a:extLst>
+          </p:cNvPr>
+          <p:cNvSpPr txBox="1"/>
+          <p:nvPr/>
+        </p:nvSpPr>
+        <p:spPr>
+          <a:xfrm>
+            <a:off x="2658616" y="2141876"/>
+            <a:ext cx="400595" cy="584775"/>
+          </a:xfrm>
+          <a:prstGeom prst="rect">
+            <a:avLst/>
+          </a:prstGeom>
+          <a:noFill/>
+        </p:spPr>
+        <p:txBody>
+          <a:bodyPr wrap="square" rtlCol="0">
+            <a:spAutoFit/>
+          </a:bodyPr>
+          <a:lstStyle/>
+          <a:p>
+            <a:r>
+              <a:rPr lang="en-US" sz="3200" dirty="0">
+                <a:solidFill>
+                  <a:srgbClr val="7D0112"/>
+                </a:solidFill>
+                <a:latin typeface="Lato Light" panose="020F0502020204030203" pitchFamily="34" charset="0"/>
+                <a:ea typeface="Lato Light" panose="020F0502020204030203" pitchFamily="34" charset="0"/>
+                <a:cs typeface="Lato Light" panose="020F0502020204030203" pitchFamily="34" charset="0"/>
+              </a:rPr>
+              <a:t>+</a:t>
+            </a:r>
+            <a:endParaRPr lang="en-NL" sz="3200" dirty="0">
+              <a:solidFill>
+                <a:srgbClr val="7D0112"/>
+              </a:solidFill>
+              <a:latin typeface="Lato Light" panose="020F0502020204030203" pitchFamily="34" charset="0"/>
+              <a:ea typeface="Lato Light" panose="020F0502020204030203" pitchFamily="34" charset="0"/>
+              <a:cs typeface="Lato Light" panose="020F0502020204030203" pitchFamily="34" charset="0"/>
+            </a:endParaRPr>
+          </a:p>
+        </p:txBody>
+      </p:sp>
+      <p:sp>
+        <p:nvSpPr>
+          <p:cNvPr id="44" name="TextBox 43">
+            <a:extLst>
+              <a:ext uri="{FF2B5EF4-FFF2-40B4-BE49-F238E27FC236}">
+                <a16:creationId xmlns:a16="http://schemas.microsoft.com/office/drawing/2014/main" id="{95FA244C-0E78-A9B3-019B-D058571B753C}"/>
+              </a:ext>
+            </a:extLst>
+          </p:cNvPr>
+          <p:cNvSpPr txBox="1"/>
+          <p:nvPr/>
+        </p:nvSpPr>
+        <p:spPr>
+          <a:xfrm>
+            <a:off x="3925283" y="1137204"/>
+            <a:ext cx="400595" cy="584775"/>
+          </a:xfrm>
+          <a:prstGeom prst="rect">
+            <a:avLst/>
+          </a:prstGeom>
+          <a:noFill/>
+        </p:spPr>
+        <p:txBody>
+          <a:bodyPr wrap="square" rtlCol="0">
+            <a:spAutoFit/>
+          </a:bodyPr>
+          <a:lstStyle/>
+          <a:p>
+            <a:r>
+              <a:rPr lang="en-US" sz="3200" dirty="0">
+                <a:solidFill>
+                  <a:srgbClr val="7D0112"/>
+                </a:solidFill>
+                <a:latin typeface="Lato Light" panose="020F0502020204030203" pitchFamily="34" charset="0"/>
+                <a:ea typeface="Lato Light" panose="020F0502020204030203" pitchFamily="34" charset="0"/>
+                <a:cs typeface="Lato Light" panose="020F0502020204030203" pitchFamily="34" charset="0"/>
+              </a:rPr>
+              <a:t>+</a:t>
+            </a:r>
+            <a:endParaRPr lang="en-NL" sz="3200" dirty="0">
+              <a:solidFill>
+                <a:srgbClr val="7D0112"/>
+              </a:solidFill>
+              <a:latin typeface="Lato Light" panose="020F0502020204030203" pitchFamily="34" charset="0"/>
+              <a:ea typeface="Lato Light" panose="020F0502020204030203" pitchFamily="34" charset="0"/>
+              <a:cs typeface="Lato Light" panose="020F0502020204030203" pitchFamily="34" charset="0"/>
+            </a:endParaRPr>
+          </a:p>
+        </p:txBody>
+      </p:sp>
+      <p:sp>
+        <p:nvSpPr>
+          <p:cNvPr id="46" name="TextBox 45">
+            <a:extLst>
+              <a:ext uri="{FF2B5EF4-FFF2-40B4-BE49-F238E27FC236}">
+                <a16:creationId xmlns:a16="http://schemas.microsoft.com/office/drawing/2014/main" id="{ADF0FED2-336F-970C-1A3A-5039CD76E598}"/>
+              </a:ext>
+            </a:extLst>
+          </p:cNvPr>
+          <p:cNvSpPr txBox="1"/>
+          <p:nvPr/>
+        </p:nvSpPr>
+        <p:spPr>
+          <a:xfrm>
+            <a:off x="1252869" y="3924787"/>
+            <a:ext cx="400595" cy="584775"/>
+          </a:xfrm>
+          <a:prstGeom prst="rect">
+            <a:avLst/>
+          </a:prstGeom>
+          <a:noFill/>
+        </p:spPr>
+        <p:txBody>
+          <a:bodyPr wrap="square" rtlCol="0">
+            <a:spAutoFit/>
+          </a:bodyPr>
+          <a:lstStyle/>
+          <a:p>
+            <a:r>
+              <a:rPr lang="en-US" sz="3200" dirty="0">
+                <a:solidFill>
+                  <a:srgbClr val="09B0AC"/>
+                </a:solidFill>
+                <a:latin typeface="Lato Light" panose="020F0502020204030203" pitchFamily="34" charset="0"/>
+                <a:ea typeface="Lato Light" panose="020F0502020204030203" pitchFamily="34" charset="0"/>
+                <a:cs typeface="Lato Light" panose="020F0502020204030203" pitchFamily="34" charset="0"/>
+              </a:rPr>
+              <a:t>+</a:t>
+            </a:r>
+            <a:endParaRPr lang="en-NL" sz="3200" dirty="0">
+              <a:solidFill>
+                <a:srgbClr val="09B0AC"/>
+              </a:solidFill>
+              <a:latin typeface="Lato Light" panose="020F0502020204030203" pitchFamily="34" charset="0"/>
+              <a:ea typeface="Lato Light" panose="020F0502020204030203" pitchFamily="34" charset="0"/>
+              <a:cs typeface="Lato Light" panose="020F0502020204030203" pitchFamily="34" charset="0"/>
+            </a:endParaRPr>
+          </a:p>
+        </p:txBody>
+      </p:sp>
+      <p:sp>
+        <p:nvSpPr>
+          <p:cNvPr id="48" name="TextBox 47">
+            <a:extLst>
+              <a:ext uri="{FF2B5EF4-FFF2-40B4-BE49-F238E27FC236}">
+                <a16:creationId xmlns:a16="http://schemas.microsoft.com/office/drawing/2014/main" id="{EF7E0274-5551-7687-6A7B-44C33E25B529}"/>
+              </a:ext>
+            </a:extLst>
+          </p:cNvPr>
+          <p:cNvSpPr txBox="1"/>
+          <p:nvPr/>
+        </p:nvSpPr>
+        <p:spPr>
+          <a:xfrm>
+            <a:off x="2402402" y="689358"/>
+            <a:ext cx="465102" cy="584775"/>
+          </a:xfrm>
+          <a:prstGeom prst="rect">
+            <a:avLst/>
+          </a:prstGeom>
+          <a:noFill/>
+        </p:spPr>
+        <p:txBody>
+          <a:bodyPr wrap="square" rtlCol="0">
+            <a:spAutoFit/>
+          </a:bodyPr>
+          <a:lstStyle/>
+          <a:p>
+            <a:r>
+              <a:rPr lang="en-NL" sz="2400" dirty="0">
+                <a:solidFill>
+                  <a:srgbClr val="09B0AC"/>
+                </a:solidFill>
+                <a:latin typeface="Lato" panose="020F0502020204030203" pitchFamily="34" charset="0"/>
+                <a:ea typeface="Lato" panose="020F0502020204030203" pitchFamily="34" charset="0"/>
+                <a:cs typeface="Lato" panose="020F0502020204030203" pitchFamily="34" charset="0"/>
+              </a:rPr>
+              <a:t>—</a:t>
+            </a:r>
+            <a:r>
+              <a:rPr lang="en-US" sz="3200" dirty="0">
+                <a:solidFill>
+                  <a:srgbClr val="7D0112"/>
+                </a:solidFill>
+                <a:latin typeface="Lato Light" panose="020F0502020204030203" pitchFamily="34" charset="0"/>
+                <a:ea typeface="Lato Light" panose="020F0502020204030203" pitchFamily="34" charset="0"/>
+                <a:cs typeface="Lato Light" panose="020F0502020204030203" pitchFamily="34" charset="0"/>
+              </a:rPr>
+              <a:t> </a:t>
+            </a:r>
+            <a:endParaRPr lang="en-NL" sz="3200" dirty="0">
+              <a:solidFill>
+                <a:srgbClr val="7D0112"/>
+              </a:solidFill>
+              <a:latin typeface="Lato Light" panose="020F0502020204030203" pitchFamily="34" charset="0"/>
+              <a:ea typeface="Lato Light" panose="020F0502020204030203" pitchFamily="34" charset="0"/>
+              <a:cs typeface="Lato Light" panose="020F0502020204030203" pitchFamily="34" charset="0"/>
+            </a:endParaRPr>
+          </a:p>
+        </p:txBody>
+      </p:sp>
+      <p:sp>
+        <p:nvSpPr>
+          <p:cNvPr id="49" name="TextBox 48">
+            <a:extLst>
+              <a:ext uri="{FF2B5EF4-FFF2-40B4-BE49-F238E27FC236}">
+                <a16:creationId xmlns:a16="http://schemas.microsoft.com/office/drawing/2014/main" id="{9B7DB700-D48B-38DC-E0BB-D2338A9B396F}"/>
+              </a:ext>
+            </a:extLst>
+          </p:cNvPr>
+          <p:cNvSpPr txBox="1"/>
+          <p:nvPr/>
+        </p:nvSpPr>
+        <p:spPr>
+          <a:xfrm>
+            <a:off x="2814151" y="3871838"/>
+            <a:ext cx="465102" cy="584775"/>
+          </a:xfrm>
+          <a:prstGeom prst="rect">
+            <a:avLst/>
+          </a:prstGeom>
+          <a:noFill/>
+        </p:spPr>
+        <p:txBody>
+          <a:bodyPr wrap="square" rtlCol="0">
+            <a:spAutoFit/>
+          </a:bodyPr>
+          <a:lstStyle/>
+          <a:p>
+            <a:r>
+              <a:rPr lang="en-NL" sz="2400" b="1" dirty="0">
+                <a:solidFill>
+                  <a:srgbClr val="7D0112"/>
+                </a:solidFill>
+                <a:latin typeface="Lato" panose="020F0502020204030203" pitchFamily="34" charset="0"/>
+                <a:ea typeface="Lato" panose="020F0502020204030203" pitchFamily="34" charset="0"/>
+                <a:cs typeface="Lato" panose="020F0502020204030203" pitchFamily="34" charset="0"/>
+              </a:rPr>
+              <a:t>—</a:t>
+            </a:r>
+            <a:r>
+              <a:rPr lang="en-US" sz="3200" dirty="0">
+                <a:solidFill>
+                  <a:srgbClr val="7D0112"/>
+                </a:solidFill>
+                <a:latin typeface="Lato" panose="020F0502020204030203" pitchFamily="34" charset="0"/>
+                <a:ea typeface="Lato" panose="020F0502020204030203" pitchFamily="34" charset="0"/>
+                <a:cs typeface="Lato" panose="020F0502020204030203" pitchFamily="34" charset="0"/>
+              </a:rPr>
+              <a:t> </a:t>
+            </a:r>
+            <a:endParaRPr lang="en-NL" sz="3200" dirty="0">
+              <a:solidFill>
+                <a:srgbClr val="7D0112"/>
+              </a:solidFill>
+              <a:latin typeface="Lato" panose="020F0502020204030203" pitchFamily="34" charset="0"/>
+              <a:ea typeface="Lato" panose="020F0502020204030203" pitchFamily="34" charset="0"/>
+              <a:cs typeface="Lato" panose="020F0502020204030203" pitchFamily="34" charset="0"/>
+            </a:endParaRPr>
+          </a:p>
+        </p:txBody>
+      </p:sp>
+      <p:sp>
+        <p:nvSpPr>
+          <p:cNvPr id="50" name="TextBox 49">
+            <a:extLst>
+              <a:ext uri="{FF2B5EF4-FFF2-40B4-BE49-F238E27FC236}">
+                <a16:creationId xmlns:a16="http://schemas.microsoft.com/office/drawing/2014/main" id="{F14FB793-DDC1-221E-B6B5-289DD2D49C4D}"/>
+              </a:ext>
+            </a:extLst>
+          </p:cNvPr>
+          <p:cNvSpPr txBox="1"/>
+          <p:nvPr/>
+        </p:nvSpPr>
+        <p:spPr>
+          <a:xfrm>
+            <a:off x="1673919" y="2658422"/>
+            <a:ext cx="465102" cy="584775"/>
+          </a:xfrm>
+          <a:prstGeom prst="rect">
+            <a:avLst/>
+          </a:prstGeom>
+          <a:noFill/>
+        </p:spPr>
+        <p:txBody>
+          <a:bodyPr wrap="square" rtlCol="0">
+            <a:spAutoFit/>
+          </a:bodyPr>
+          <a:lstStyle/>
+          <a:p>
+            <a:r>
+              <a:rPr lang="en-NL" sz="2400" dirty="0">
+                <a:solidFill>
+                  <a:srgbClr val="7D0112"/>
+                </a:solidFill>
+                <a:latin typeface="Lato" panose="020F0502020204030203" pitchFamily="34" charset="0"/>
+                <a:ea typeface="Lato" panose="020F0502020204030203" pitchFamily="34" charset="0"/>
+                <a:cs typeface="Lato" panose="020F0502020204030203" pitchFamily="34" charset="0"/>
+              </a:rPr>
+              <a:t>—</a:t>
+            </a:r>
+            <a:r>
+              <a:rPr lang="en-US" sz="3200" dirty="0">
+                <a:solidFill>
+                  <a:srgbClr val="7D0112"/>
+                </a:solidFill>
+                <a:latin typeface="Lato Light" panose="020F0502020204030203" pitchFamily="34" charset="0"/>
+                <a:ea typeface="Lato Light" panose="020F0502020204030203" pitchFamily="34" charset="0"/>
+                <a:cs typeface="Lato Light" panose="020F0502020204030203" pitchFamily="34" charset="0"/>
+              </a:rPr>
+              <a:t> </a:t>
+            </a:r>
+            <a:endParaRPr lang="en-NL" sz="3200" dirty="0">
+              <a:solidFill>
+                <a:srgbClr val="7D0112"/>
+              </a:solidFill>
+              <a:latin typeface="Lato Light" panose="020F0502020204030203" pitchFamily="34" charset="0"/>
+              <a:ea typeface="Lato Light" panose="020F0502020204030203" pitchFamily="34" charset="0"/>
+              <a:cs typeface="Lato Light" panose="020F0502020204030203" pitchFamily="34" charset="0"/>
+            </a:endParaRPr>
+          </a:p>
+        </p:txBody>
+      </p:sp>
+      <p:sp>
+        <p:nvSpPr>
+          <p:cNvPr id="51" name="Left Bracket 50">
+            <a:extLst>
+              <a:ext uri="{FF2B5EF4-FFF2-40B4-BE49-F238E27FC236}">
+                <a16:creationId xmlns:a16="http://schemas.microsoft.com/office/drawing/2014/main" id="{FB1F1BEE-2A54-F094-25F2-CF535A7C8FF9}"/>
+              </a:ext>
+            </a:extLst>
+          </p:cNvPr>
+          <p:cNvSpPr/>
+          <p:nvPr/>
+        </p:nvSpPr>
+        <p:spPr>
+          <a:xfrm rot="1703370" flipH="1">
+            <a:off x="3109204" y="3643571"/>
+            <a:ext cx="322790" cy="996209"/>
+          </a:xfrm>
+          <a:custGeom>
+            <a:avLst/>
+            <a:gdLst>
+              <a:gd name="csX0" fmla="*/ 322790 w 322790"/>
+              <a:gd name="csY0" fmla="*/ 975247 h 975247"/>
+              <a:gd name="csX1" fmla="*/ 0 w 322790"/>
+              <a:gd name="csY1" fmla="*/ 487623 h 975247"/>
+              <a:gd name="csX2" fmla="*/ 0 w 322790"/>
+              <a:gd name="csY2" fmla="*/ 487624 h 975247"/>
+              <a:gd name="csX3" fmla="*/ 322790 w 322790"/>
+              <a:gd name="csY3" fmla="*/ 0 h 975247"/>
+              <a:gd name="csX4" fmla="*/ 322790 w 322790"/>
+              <a:gd name="csY4" fmla="*/ 975247 h 975247"/>
+              <a:gd name="csX0" fmla="*/ 322790 w 322790"/>
+              <a:gd name="csY0" fmla="*/ 975247 h 975247"/>
+              <a:gd name="csX1" fmla="*/ 0 w 322790"/>
+              <a:gd name="csY1" fmla="*/ 487623 h 975247"/>
+              <a:gd name="csX2" fmla="*/ 0 w 322790"/>
+              <a:gd name="csY2" fmla="*/ 487624 h 975247"/>
+              <a:gd name="csX3" fmla="*/ 322790 w 322790"/>
+              <a:gd name="csY3" fmla="*/ 0 h 975247"/>
+              <a:gd name="csX0" fmla="*/ 322790 w 322790"/>
+              <a:gd name="csY0" fmla="*/ 975247 h 975247"/>
+              <a:gd name="csX1" fmla="*/ 0 w 322790"/>
+              <a:gd name="csY1" fmla="*/ 487623 h 975247"/>
+              <a:gd name="csX2" fmla="*/ 0 w 322790"/>
+              <a:gd name="csY2" fmla="*/ 487624 h 975247"/>
+              <a:gd name="csX3" fmla="*/ 322790 w 322790"/>
+              <a:gd name="csY3" fmla="*/ 0 h 975247"/>
+              <a:gd name="csX4" fmla="*/ 322790 w 322790"/>
+              <a:gd name="csY4" fmla="*/ 975247 h 975247"/>
+              <a:gd name="csX0" fmla="*/ 244941 w 322790"/>
+              <a:gd name="csY0" fmla="*/ 947460 h 975247"/>
+              <a:gd name="csX1" fmla="*/ 0 w 322790"/>
+              <a:gd name="csY1" fmla="*/ 487623 h 975247"/>
+              <a:gd name="csX2" fmla="*/ 0 w 322790"/>
+              <a:gd name="csY2" fmla="*/ 487624 h 975247"/>
+              <a:gd name="csX3" fmla="*/ 322790 w 322790"/>
+              <a:gd name="csY3" fmla="*/ 0 h 975247"/>
+              <a:gd name="csX0" fmla="*/ 322790 w 322790"/>
+              <a:gd name="csY0" fmla="*/ 975247 h 975247"/>
+              <a:gd name="csX1" fmla="*/ 0 w 322790"/>
+              <a:gd name="csY1" fmla="*/ 487623 h 975247"/>
+              <a:gd name="csX2" fmla="*/ 0 w 322790"/>
+              <a:gd name="csY2" fmla="*/ 487624 h 975247"/>
+              <a:gd name="csX3" fmla="*/ 322790 w 322790"/>
+              <a:gd name="csY3" fmla="*/ 0 h 975247"/>
+              <a:gd name="csX4" fmla="*/ 322790 w 322790"/>
+              <a:gd name="csY4" fmla="*/ 975247 h 975247"/>
+              <a:gd name="csX0" fmla="*/ 244941 w 322790"/>
+              <a:gd name="csY0" fmla="*/ 947460 h 975247"/>
+              <a:gd name="csX1" fmla="*/ 0 w 322790"/>
+              <a:gd name="csY1" fmla="*/ 487623 h 975247"/>
+              <a:gd name="csX2" fmla="*/ 0 w 322790"/>
+              <a:gd name="csY2" fmla="*/ 487624 h 975247"/>
+              <a:gd name="csX3" fmla="*/ 322790 w 322790"/>
+              <a:gd name="csY3" fmla="*/ 0 h 975247"/>
+              <a:gd name="csX0" fmla="*/ 322790 w 322790"/>
+              <a:gd name="csY0" fmla="*/ 996209 h 996209"/>
+              <a:gd name="csX1" fmla="*/ 0 w 322790"/>
+              <a:gd name="csY1" fmla="*/ 508585 h 996209"/>
+              <a:gd name="csX2" fmla="*/ 0 w 322790"/>
+              <a:gd name="csY2" fmla="*/ 508586 h 996209"/>
+              <a:gd name="csX3" fmla="*/ 322790 w 322790"/>
+              <a:gd name="csY3" fmla="*/ 20962 h 996209"/>
+              <a:gd name="csX4" fmla="*/ 322790 w 322790"/>
+              <a:gd name="csY4" fmla="*/ 996209 h 996209"/>
+              <a:gd name="csX0" fmla="*/ 244941 w 322790"/>
+              <a:gd name="csY0" fmla="*/ 968422 h 996209"/>
+              <a:gd name="csX1" fmla="*/ 0 w 322790"/>
+              <a:gd name="csY1" fmla="*/ 508585 h 996209"/>
+              <a:gd name="csX2" fmla="*/ 0 w 322790"/>
+              <a:gd name="csY2" fmla="*/ 508586 h 996209"/>
+              <a:gd name="csX3" fmla="*/ 246661 w 322790"/>
+              <a:gd name="csY3" fmla="*/ 0 h 996209"/>
+              <a:gd name="csX0" fmla="*/ 322790 w 322790"/>
+              <a:gd name="csY0" fmla="*/ 996209 h 996209"/>
+              <a:gd name="csX1" fmla="*/ 0 w 322790"/>
+              <a:gd name="csY1" fmla="*/ 508585 h 996209"/>
+              <a:gd name="csX2" fmla="*/ 0 w 322790"/>
+              <a:gd name="csY2" fmla="*/ 508586 h 996209"/>
+              <a:gd name="csX3" fmla="*/ 322790 w 322790"/>
+              <a:gd name="csY3" fmla="*/ 20962 h 996209"/>
+              <a:gd name="csX4" fmla="*/ 322790 w 322790"/>
+              <a:gd name="csY4" fmla="*/ 996209 h 996209"/>
+              <a:gd name="csX0" fmla="*/ 244941 w 322790"/>
+              <a:gd name="csY0" fmla="*/ 968422 h 996209"/>
+              <a:gd name="csX1" fmla="*/ 0 w 322790"/>
+              <a:gd name="csY1" fmla="*/ 508585 h 996209"/>
+              <a:gd name="csX2" fmla="*/ 0 w 322790"/>
+              <a:gd name="csY2" fmla="*/ 508586 h 996209"/>
+              <a:gd name="csX3" fmla="*/ 246661 w 322790"/>
+              <a:gd name="csY3" fmla="*/ 0 h 996209"/>
+            </a:gdLst>
+            <a:ahLst/>
+            <a:cxnLst>
+              <a:cxn ang="0">
+                <a:pos x="csX0" y="csY0"/>
+              </a:cxn>
+              <a:cxn ang="0">
+                <a:pos x="csX1" y="csY1"/>
+              </a:cxn>
+              <a:cxn ang="0">
+                <a:pos x="csX2" y="csY2"/>
+              </a:cxn>
+              <a:cxn ang="0">
+                <a:pos x="csX3" y="csY3"/>
+              </a:cxn>
+            </a:cxnLst>
+            <a:rect l="l" t="t" r="r" b="b"/>
+            <a:pathLst>
+              <a:path w="322790" h="996209" stroke="0" extrusionOk="0">
+                <a:moveTo>
+                  <a:pt x="322790" y="996209"/>
+                </a:moveTo>
+                <a:cubicBezTo>
+                  <a:pt x="144518" y="996209"/>
+                  <a:pt x="0" y="777892"/>
+                  <a:pt x="0" y="508585"/>
+                </a:cubicBezTo>
+                <a:lnTo>
+                  <a:pt x="0" y="508586"/>
+                </a:lnTo>
+                <a:cubicBezTo>
+                  <a:pt x="0" y="239279"/>
+                  <a:pt x="144518" y="20962"/>
+                  <a:pt x="322790" y="20962"/>
+                </a:cubicBezTo>
+                <a:lnTo>
+                  <a:pt x="322790" y="996209"/>
+                </a:lnTo>
+                <a:close/>
+              </a:path>
+              <a:path w="322790" h="996209" fill="none">
+                <a:moveTo>
+                  <a:pt x="244941" y="968422"/>
+                </a:moveTo>
+                <a:cubicBezTo>
+                  <a:pt x="98268" y="903348"/>
+                  <a:pt x="0" y="777892"/>
+                  <a:pt x="0" y="508585"/>
+                </a:cubicBezTo>
+                <a:lnTo>
+                  <a:pt x="0" y="508586"/>
+                </a:lnTo>
+                <a:cubicBezTo>
+                  <a:pt x="0" y="239279"/>
+                  <a:pt x="83520" y="65361"/>
+                  <a:pt x="246661" y="0"/>
+                </a:cubicBezTo>
+              </a:path>
+            </a:pathLst>
+          </a:custGeom>
+          <a:ln w="38100">
+            <a:solidFill>
+              <a:srgbClr val="7D0112"/>
+            </a:solidFill>
+          </a:ln>
+          <a:effectLst/>
+        </p:spPr>
+        <p:style>
+          <a:lnRef idx="2">
+            <a:schemeClr val="accent1"/>
+          </a:lnRef>
+          <a:fillRef idx="0">
+            <a:schemeClr val="accent1"/>
+          </a:fillRef>
+          <a:effectRef idx="1">
+            <a:schemeClr val="accent1"/>
+          </a:effectRef>
+          <a:fontRef idx="minor">
+            <a:schemeClr val="tx1"/>
+          </a:fontRef>
+        </p:style>
+        <p:txBody>
+          <a:bodyPr rtlCol="0" anchor="ctr"/>
+          <a:lstStyle/>
+          <a:p>
+            <a:pPr algn="ctr"/>
+            <a:endParaRPr lang="en-NL"/>
+          </a:p>
+        </p:txBody>
+      </p:sp>
+      <p:sp>
+        <p:nvSpPr>
+          <p:cNvPr id="36" name="Isosceles Triangle 35">
+            <a:extLst>
+              <a:ext uri="{FF2B5EF4-FFF2-40B4-BE49-F238E27FC236}">
+                <a16:creationId xmlns:a16="http://schemas.microsoft.com/office/drawing/2014/main" id="{A72AF958-0D09-761A-46AC-5C9873159CF6}"/>
+              </a:ext>
+            </a:extLst>
+          </p:cNvPr>
+          <p:cNvSpPr/>
+          <p:nvPr/>
+        </p:nvSpPr>
+        <p:spPr>
+          <a:xfrm rot="16200000" flipH="1">
+            <a:off x="2876678" y="4447823"/>
+            <a:ext cx="149415" cy="134471"/>
+          </a:xfrm>
+          <a:prstGeom prst="triangle">
+            <a:avLst/>
+          </a:prstGeom>
+          <a:solidFill>
+            <a:srgbClr val="7D0112"/>
+          </a:solidFill>
+          <a:ln>
+            <a:solidFill>
+              <a:srgbClr val="7D0112"/>
+            </a:solidFill>
+          </a:ln>
+          <a:effectLst/>
+        </p:spPr>
+        <p:style>
+          <a:lnRef idx="1">
+            <a:schemeClr val="accent1"/>
+          </a:lnRef>
+          <a:fillRef idx="3">
+            <a:schemeClr val="accent1"/>
+          </a:fillRef>
+          <a:effectRef idx="2">
+            <a:schemeClr val="accent1"/>
+          </a:effectRef>
+          <a:fontRef idx="minor">
+            <a:schemeClr val="lt1"/>
+          </a:fontRef>
+        </p:style>
+        <p:txBody>
+          <a:bodyPr rtlCol="0" anchor="ctr"/>
+          <a:lstStyle/>
+          <a:p>
+            <a:pPr algn="ctr"/>
+            <a:endParaRPr lang="en-NL"/>
+          </a:p>
+        </p:txBody>
+      </p:sp>
+      <p:sp>
+        <p:nvSpPr>
+          <p:cNvPr id="86" name="Oval 85">
+            <a:extLst>
+              <a:ext uri="{FF2B5EF4-FFF2-40B4-BE49-F238E27FC236}">
+                <a16:creationId xmlns:a16="http://schemas.microsoft.com/office/drawing/2014/main" id="{BD29C2B3-4DEF-B114-CD24-07B891890F2A}"/>
+              </a:ext>
+            </a:extLst>
+          </p:cNvPr>
+          <p:cNvSpPr>
+            <a:spLocks noChangeAspect="1"/>
+          </p:cNvSpPr>
+          <p:nvPr/>
+        </p:nvSpPr>
+        <p:spPr>
+          <a:xfrm>
+            <a:off x="2790544" y="2319810"/>
+            <a:ext cx="1380565" cy="1380565"/>
+          </a:xfrm>
+          <a:prstGeom prst="ellipse">
+            <a:avLst/>
+          </a:prstGeom>
+          <a:solidFill>
+            <a:srgbClr val="7D0112"/>
+          </a:solidFill>
+          <a:ln w="19050">
+            <a:solidFill>
+              <a:srgbClr val="7D0112"/>
+            </a:solidFill>
+          </a:ln>
+          <a:effectLst/>
+        </p:spPr>
+        <p:style>
+          <a:lnRef idx="1">
+            <a:schemeClr val="accent1"/>
+          </a:lnRef>
+          <a:fillRef idx="3">
+            <a:schemeClr val="accent1"/>
+          </a:fillRef>
+          <a:effectRef idx="2">
+            <a:schemeClr val="accent1"/>
+          </a:effectRef>
+          <a:fontRef idx="minor">
+            <a:schemeClr val="lt1"/>
+          </a:fontRef>
+        </p:style>
+        <p:txBody>
+          <a:bodyPr wrap="none" lIns="0" tIns="0" rIns="0" bIns="0" rtlCol="0" anchor="ctr"/>
+          <a:lstStyle/>
+          <a:p>
+            <a:pPr algn="ctr"/>
+            <a:r>
+              <a:rPr lang="en-US" dirty="0">
+                <a:latin typeface="Lato" panose="020F0502020204030203" pitchFamily="34" charset="0"/>
+                <a:ea typeface="Lato" panose="020F0502020204030203" pitchFamily="34" charset="0"/>
+                <a:cs typeface="Lato" panose="020F0502020204030203" pitchFamily="34" charset="0"/>
+              </a:rPr>
+              <a:t>Exhaustion</a:t>
+            </a:r>
+            <a:endParaRPr lang="en-NL" dirty="0">
+              <a:latin typeface="Lato" panose="020F0502020204030203" pitchFamily="34" charset="0"/>
+              <a:ea typeface="Lato" panose="020F0502020204030203" pitchFamily="34" charset="0"/>
+              <a:cs typeface="Lato" panose="020F0502020204030203" pitchFamily="34" charset="0"/>
+            </a:endParaRPr>
+          </a:p>
+        </p:txBody>
+      </p:sp>
+      <p:sp>
+        <p:nvSpPr>
+          <p:cNvPr id="32" name="Oval 31">
+            <a:extLst>
+              <a:ext uri="{FF2B5EF4-FFF2-40B4-BE49-F238E27FC236}">
+                <a16:creationId xmlns:a16="http://schemas.microsoft.com/office/drawing/2014/main" id="{EDC20456-EDF5-D3A3-33B7-34B58C9065E5}"/>
+              </a:ext>
+            </a:extLst>
+          </p:cNvPr>
+          <p:cNvSpPr>
+            <a:spLocks noChangeAspect="1"/>
+          </p:cNvSpPr>
+          <p:nvPr/>
+        </p:nvSpPr>
+        <p:spPr>
+          <a:xfrm>
+            <a:off x="307559" y="117482"/>
+            <a:ext cx="1380565" cy="1380565"/>
+          </a:xfrm>
+          <a:prstGeom prst="ellipse">
+            <a:avLst/>
+          </a:prstGeom>
+          <a:solidFill>
+            <a:srgbClr val="09B0AC"/>
+          </a:solidFill>
+          <a:ln w="19050">
+            <a:solidFill>
+              <a:srgbClr val="09B0AC"/>
+            </a:solidFill>
+          </a:ln>
+          <a:effectLst/>
+        </p:spPr>
+        <p:style>
+          <a:lnRef idx="1">
+            <a:schemeClr val="accent1"/>
+          </a:lnRef>
+          <a:fillRef idx="3">
+            <a:schemeClr val="accent1"/>
+          </a:fillRef>
+          <a:effectRef idx="2">
+            <a:schemeClr val="accent1"/>
+          </a:effectRef>
+          <a:fontRef idx="minor">
+            <a:schemeClr val="lt1"/>
+          </a:fontRef>
+        </p:style>
+        <p:txBody>
+          <a:bodyPr wrap="none" lIns="0" tIns="0" rIns="0" bIns="0" rtlCol="0" anchor="ctr"/>
+          <a:lstStyle/>
+          <a:p>
+            <a:pPr algn="ctr"/>
+            <a:r>
+              <a:rPr lang="en-US" dirty="0">
+                <a:latin typeface="Lato" panose="020F0502020204030203" pitchFamily="34" charset="0"/>
+                <a:ea typeface="Lato" panose="020F0502020204030203" pitchFamily="34" charset="0"/>
+                <a:cs typeface="Lato" panose="020F0502020204030203" pitchFamily="34" charset="0"/>
+              </a:rPr>
+              <a:t>Job </a:t>
+            </a:r>
+            <a:br>
+              <a:rPr lang="en-US" dirty="0">
+                <a:latin typeface="Lato" panose="020F0502020204030203" pitchFamily="34" charset="0"/>
+                <a:ea typeface="Lato" panose="020F0502020204030203" pitchFamily="34" charset="0"/>
+                <a:cs typeface="Lato" panose="020F0502020204030203" pitchFamily="34" charset="0"/>
+              </a:rPr>
+            </a:br>
+            <a:r>
+              <a:rPr lang="en-US" dirty="0">
+                <a:latin typeface="Lato" panose="020F0502020204030203" pitchFamily="34" charset="0"/>
+                <a:ea typeface="Lato" panose="020F0502020204030203" pitchFamily="34" charset="0"/>
+                <a:cs typeface="Lato" panose="020F0502020204030203" pitchFamily="34" charset="0"/>
+              </a:rPr>
+              <a:t>Resources</a:t>
+            </a:r>
+            <a:endParaRPr lang="en-NL" dirty="0">
+              <a:latin typeface="Lato" panose="020F0502020204030203" pitchFamily="34" charset="0"/>
+              <a:ea typeface="Lato" panose="020F0502020204030203" pitchFamily="34" charset="0"/>
+              <a:cs typeface="Lato" panose="020F0502020204030203" pitchFamily="34" charset="0"/>
+            </a:endParaRPr>
+          </a:p>
+        </p:txBody>
+      </p:sp>
+      <p:sp>
+        <p:nvSpPr>
+          <p:cNvPr id="33" name="Oval 32">
+            <a:extLst>
+              <a:ext uri="{FF2B5EF4-FFF2-40B4-BE49-F238E27FC236}">
+                <a16:creationId xmlns:a16="http://schemas.microsoft.com/office/drawing/2014/main" id="{AA34AF3D-141F-5B1B-57D8-612AEDC58F1B}"/>
+              </a:ext>
+            </a:extLst>
+          </p:cNvPr>
+          <p:cNvSpPr>
+            <a:spLocks noChangeAspect="1"/>
+          </p:cNvSpPr>
+          <p:nvPr/>
+        </p:nvSpPr>
+        <p:spPr>
+          <a:xfrm>
+            <a:off x="307559" y="2319811"/>
+            <a:ext cx="1380565" cy="1380565"/>
+          </a:xfrm>
+          <a:prstGeom prst="ellipse">
+            <a:avLst/>
+          </a:prstGeom>
+          <a:solidFill>
+            <a:srgbClr val="09B0AC"/>
+          </a:solidFill>
+          <a:ln w="19050">
+            <a:solidFill>
+              <a:srgbClr val="09B0AC"/>
+            </a:solidFill>
+          </a:ln>
+          <a:effectLst/>
+        </p:spPr>
+        <p:style>
+          <a:lnRef idx="1">
+            <a:schemeClr val="accent1"/>
+          </a:lnRef>
+          <a:fillRef idx="3">
+            <a:schemeClr val="accent1"/>
+          </a:fillRef>
+          <a:effectRef idx="2">
+            <a:schemeClr val="accent1"/>
+          </a:effectRef>
+          <a:fontRef idx="minor">
+            <a:schemeClr val="lt1"/>
+          </a:fontRef>
+        </p:style>
+        <p:txBody>
+          <a:bodyPr wrap="none" lIns="0" tIns="0" rIns="0" bIns="0" rtlCol="0" anchor="ctr"/>
+          <a:lstStyle/>
+          <a:p>
+            <a:pPr algn="ctr"/>
+            <a:r>
+              <a:rPr lang="en-US" dirty="0">
+                <a:latin typeface="Lato" panose="020F0502020204030203" pitchFamily="34" charset="0"/>
+                <a:ea typeface="Lato" panose="020F0502020204030203" pitchFamily="34" charset="0"/>
+                <a:cs typeface="Lato" panose="020F0502020204030203" pitchFamily="34" charset="0"/>
+              </a:rPr>
+              <a:t>Engagement</a:t>
+            </a:r>
+            <a:endParaRPr lang="en-NL" dirty="0">
+              <a:latin typeface="Lato" panose="020F0502020204030203" pitchFamily="34" charset="0"/>
+              <a:ea typeface="Lato" panose="020F0502020204030203" pitchFamily="34" charset="0"/>
+              <a:cs typeface="Lato" panose="020F0502020204030203" pitchFamily="34" charset="0"/>
+            </a:endParaRPr>
+          </a:p>
+        </p:txBody>
+      </p:sp>
+      <p:sp>
+        <p:nvSpPr>
+          <p:cNvPr id="31" name="Oval 30">
+            <a:extLst>
+              <a:ext uri="{FF2B5EF4-FFF2-40B4-BE49-F238E27FC236}">
+                <a16:creationId xmlns:a16="http://schemas.microsoft.com/office/drawing/2014/main" id="{AEA9D42D-A84E-C670-B808-F2675095D298}"/>
+              </a:ext>
+            </a:extLst>
+          </p:cNvPr>
+          <p:cNvSpPr>
+            <a:spLocks noChangeAspect="1"/>
+          </p:cNvSpPr>
+          <p:nvPr/>
+        </p:nvSpPr>
+        <p:spPr>
+          <a:xfrm>
+            <a:off x="1533116" y="4016076"/>
+            <a:ext cx="1380565" cy="1380565"/>
+          </a:xfrm>
+          <a:prstGeom prst="ellipse">
+            <a:avLst/>
+          </a:prstGeom>
+          <a:solidFill>
+            <a:srgbClr val="B4771A"/>
+          </a:solidFill>
+          <a:ln w="19050">
+            <a:solidFill>
+              <a:srgbClr val="B4771A"/>
+            </a:solidFill>
+          </a:ln>
+          <a:effectLst/>
+        </p:spPr>
+        <p:style>
+          <a:lnRef idx="1">
+            <a:schemeClr val="accent1"/>
+          </a:lnRef>
+          <a:fillRef idx="3">
+            <a:schemeClr val="accent1"/>
+          </a:fillRef>
+          <a:effectRef idx="2">
+            <a:schemeClr val="accent1"/>
+          </a:effectRef>
+          <a:fontRef idx="minor">
+            <a:schemeClr val="lt1"/>
+          </a:fontRef>
+        </p:style>
+        <p:txBody>
+          <a:bodyPr wrap="none" lIns="0" tIns="0" rIns="0" bIns="0" rtlCol="0" anchor="ctr"/>
+          <a:lstStyle/>
+          <a:p>
+            <a:pPr algn="ctr"/>
+            <a:r>
+              <a:rPr lang="en-US" sz="1700" dirty="0">
+                <a:latin typeface="Lato" panose="020F0502020204030203" pitchFamily="34" charset="0"/>
+                <a:ea typeface="Lato" panose="020F0502020204030203" pitchFamily="34" charset="0"/>
+                <a:cs typeface="Lato" panose="020F0502020204030203" pitchFamily="34" charset="0"/>
+              </a:rPr>
+              <a:t>Job </a:t>
+            </a:r>
+            <a:br>
+              <a:rPr lang="en-US" sz="1700" dirty="0">
+                <a:latin typeface="Lato" panose="020F0502020204030203" pitchFamily="34" charset="0"/>
+                <a:ea typeface="Lato" panose="020F0502020204030203" pitchFamily="34" charset="0"/>
+                <a:cs typeface="Lato" panose="020F0502020204030203" pitchFamily="34" charset="0"/>
+              </a:rPr>
+            </a:br>
+            <a:r>
+              <a:rPr lang="en-US" sz="1700" dirty="0">
+                <a:latin typeface="Lato" panose="020F0502020204030203" pitchFamily="34" charset="0"/>
+                <a:ea typeface="Lato" panose="020F0502020204030203" pitchFamily="34" charset="0"/>
+                <a:cs typeface="Lato" panose="020F0502020204030203" pitchFamily="34" charset="0"/>
+              </a:rPr>
+              <a:t>Performance</a:t>
+            </a:r>
+            <a:endParaRPr lang="en-NL" sz="1700" dirty="0">
+              <a:latin typeface="Lato" panose="020F0502020204030203" pitchFamily="34" charset="0"/>
+              <a:ea typeface="Lato" panose="020F0502020204030203" pitchFamily="34" charset="0"/>
+              <a:cs typeface="Lato" panose="020F0502020204030203" pitchFamily="34" charset="0"/>
+            </a:endParaRPr>
+          </a:p>
+        </p:txBody>
+      </p:sp>
+      <p:sp>
+        <p:nvSpPr>
+          <p:cNvPr id="85" name="Oval 84">
+            <a:extLst>
+              <a:ext uri="{FF2B5EF4-FFF2-40B4-BE49-F238E27FC236}">
+                <a16:creationId xmlns:a16="http://schemas.microsoft.com/office/drawing/2014/main" id="{3FB2EE0A-4F9B-0322-B077-D70D9BC719FE}"/>
+              </a:ext>
+            </a:extLst>
+          </p:cNvPr>
+          <p:cNvSpPr>
+            <a:spLocks noChangeAspect="1"/>
+          </p:cNvSpPr>
+          <p:nvPr/>
+        </p:nvSpPr>
+        <p:spPr>
+          <a:xfrm>
+            <a:off x="2790544" y="117481"/>
+            <a:ext cx="1380565" cy="1380565"/>
+          </a:xfrm>
+          <a:prstGeom prst="ellipse">
+            <a:avLst/>
+          </a:prstGeom>
+          <a:solidFill>
+            <a:srgbClr val="7D0112"/>
+          </a:solidFill>
+          <a:ln w="19050">
+            <a:solidFill>
+              <a:srgbClr val="7D0112"/>
+            </a:solidFill>
+          </a:ln>
+          <a:effectLst/>
+        </p:spPr>
+        <p:style>
+          <a:lnRef idx="1">
+            <a:schemeClr val="accent1"/>
+          </a:lnRef>
+          <a:fillRef idx="3">
+            <a:schemeClr val="accent1"/>
+          </a:fillRef>
+          <a:effectRef idx="2">
+            <a:schemeClr val="accent1"/>
+          </a:effectRef>
+          <a:fontRef idx="minor">
+            <a:schemeClr val="lt1"/>
+          </a:fontRef>
+        </p:style>
+        <p:txBody>
+          <a:bodyPr wrap="none" lIns="0" tIns="0" rIns="0" bIns="0" rtlCol="0" anchor="ctr"/>
+          <a:lstStyle/>
+          <a:p>
+            <a:pPr algn="ctr"/>
+            <a:r>
+              <a:rPr lang="en-US" dirty="0">
+                <a:latin typeface="Lato" panose="020F0502020204030203" pitchFamily="34" charset="0"/>
+                <a:ea typeface="Lato" panose="020F0502020204030203" pitchFamily="34" charset="0"/>
+                <a:cs typeface="Lato" panose="020F0502020204030203" pitchFamily="34" charset="0"/>
+              </a:rPr>
+              <a:t>Job </a:t>
+            </a:r>
+            <a:br>
+              <a:rPr lang="en-US" dirty="0">
+                <a:latin typeface="Lato" panose="020F0502020204030203" pitchFamily="34" charset="0"/>
+                <a:ea typeface="Lato" panose="020F0502020204030203" pitchFamily="34" charset="0"/>
+                <a:cs typeface="Lato" panose="020F0502020204030203" pitchFamily="34" charset="0"/>
+              </a:rPr>
+            </a:br>
+            <a:r>
+              <a:rPr lang="en-US" dirty="0">
+                <a:latin typeface="Lato" panose="020F0502020204030203" pitchFamily="34" charset="0"/>
+                <a:ea typeface="Lato" panose="020F0502020204030203" pitchFamily="34" charset="0"/>
+                <a:cs typeface="Lato" panose="020F0502020204030203" pitchFamily="34" charset="0"/>
+              </a:rPr>
+              <a:t>Demands</a:t>
+            </a:r>
+            <a:endParaRPr lang="en-NL" dirty="0">
+              <a:latin typeface="Lato" panose="020F0502020204030203" pitchFamily="34" charset="0"/>
+              <a:ea typeface="Lato" panose="020F0502020204030203" pitchFamily="34" charset="0"/>
+              <a:cs typeface="Lato" panose="020F0502020204030203" pitchFamily="34" charset="0"/>
+            </a:endParaRPr>
+          </a:p>
+        </p:txBody>
+      </p:sp>
+    </p:spTree>
+    <p:extLst>
+      <p:ext uri="{BB962C8B-B14F-4D97-AF65-F5344CB8AC3E}">
+        <p14:creationId xmlns:p14="http://schemas.microsoft.com/office/powerpoint/2010/main" val="1293223303"/>
+      </p:ext>
+    </p:extLst>
+  </p:cSld>
+  <p:clrMapOvr>
+    <a:masterClrMapping/>
+  </p:clrMapOvr>
+</p:sld>
+</file>
+
+<file path=ppt/slides/slide8.xml><?xml version="1.0" encoding="utf-8"?>
+<p:sld xmlns:a="http://schemas.openxmlformats.org/drawingml/2006/main" xmlns:r="http://schemas.openxmlformats.org/officeDocument/2006/relationships" xmlns:p="http://schemas.openxmlformats.org/presentationml/2006/main" show="0">
   <p:cSld>
     <p:spTree>
       <p:nvGrpSpPr>

--- a/vignettes/articles/figs_jdr/sdbuildR_paper.pptx
+++ b/vignettes/articles/figs_jdr/sdbuildR_paper.pptx
@@ -309,7 +309,7 @@
           <a:p>
             <a:fld id="{5BCAD085-E8A6-8845-BD4E-CB4CCA059FC4}" type="datetimeFigureOut">
               <a:rPr lang="en-US" smtClean="0"/>
-              <a:t>5/7/2026</a:t>
+              <a:t>5/15/2026</a:t>
             </a:fld>
             <a:endParaRPr lang="en-US"/>
           </a:p>
@@ -477,7 +477,7 @@
           <a:p>
             <a:fld id="{5BCAD085-E8A6-8845-BD4E-CB4CCA059FC4}" type="datetimeFigureOut">
               <a:rPr lang="en-US" smtClean="0"/>
-              <a:t>5/7/2026</a:t>
+              <a:t>5/15/2026</a:t>
             </a:fld>
             <a:endParaRPr lang="en-US"/>
           </a:p>
@@ -655,7 +655,7 @@
           <a:p>
             <a:fld id="{5BCAD085-E8A6-8845-BD4E-CB4CCA059FC4}" type="datetimeFigureOut">
               <a:rPr lang="en-US" smtClean="0"/>
-              <a:t>5/7/2026</a:t>
+              <a:t>5/15/2026</a:t>
             </a:fld>
             <a:endParaRPr lang="en-US"/>
           </a:p>
@@ -823,7 +823,7 @@
           <a:p>
             <a:fld id="{5BCAD085-E8A6-8845-BD4E-CB4CCA059FC4}" type="datetimeFigureOut">
               <a:rPr lang="en-US" smtClean="0"/>
-              <a:t>5/7/2026</a:t>
+              <a:t>5/15/2026</a:t>
             </a:fld>
             <a:endParaRPr lang="en-US"/>
           </a:p>
@@ -1068,7 +1068,7 @@
           <a:p>
             <a:fld id="{5BCAD085-E8A6-8845-BD4E-CB4CCA059FC4}" type="datetimeFigureOut">
               <a:rPr lang="en-US" smtClean="0"/>
-              <a:t>5/7/2026</a:t>
+              <a:t>5/15/2026</a:t>
             </a:fld>
             <a:endParaRPr lang="en-US"/>
           </a:p>
@@ -1353,7 +1353,7 @@
           <a:p>
             <a:fld id="{5BCAD085-E8A6-8845-BD4E-CB4CCA059FC4}" type="datetimeFigureOut">
               <a:rPr lang="en-US" smtClean="0"/>
-              <a:t>5/7/2026</a:t>
+              <a:t>5/15/2026</a:t>
             </a:fld>
             <a:endParaRPr lang="en-US"/>
           </a:p>
@@ -1772,7 +1772,7 @@
           <a:p>
             <a:fld id="{5BCAD085-E8A6-8845-BD4E-CB4CCA059FC4}" type="datetimeFigureOut">
               <a:rPr lang="en-US" smtClean="0"/>
-              <a:t>5/7/2026</a:t>
+              <a:t>5/15/2026</a:t>
             </a:fld>
             <a:endParaRPr lang="en-US"/>
           </a:p>
@@ -1889,7 +1889,7 @@
           <a:p>
             <a:fld id="{5BCAD085-E8A6-8845-BD4E-CB4CCA059FC4}" type="datetimeFigureOut">
               <a:rPr lang="en-US" smtClean="0"/>
-              <a:t>5/7/2026</a:t>
+              <a:t>5/15/2026</a:t>
             </a:fld>
             <a:endParaRPr lang="en-US"/>
           </a:p>
@@ -1984,7 +1984,7 @@
           <a:p>
             <a:fld id="{5BCAD085-E8A6-8845-BD4E-CB4CCA059FC4}" type="datetimeFigureOut">
               <a:rPr lang="en-US" smtClean="0"/>
-              <a:t>5/7/2026</a:t>
+              <a:t>5/15/2026</a:t>
             </a:fld>
             <a:endParaRPr lang="en-US"/>
           </a:p>
@@ -2259,7 +2259,7 @@
           <a:p>
             <a:fld id="{5BCAD085-E8A6-8845-BD4E-CB4CCA059FC4}" type="datetimeFigureOut">
               <a:rPr lang="en-US" smtClean="0"/>
-              <a:t>5/7/2026</a:t>
+              <a:t>5/15/2026</a:t>
             </a:fld>
             <a:endParaRPr lang="en-US"/>
           </a:p>
@@ -2511,7 +2511,7 @@
           <a:p>
             <a:fld id="{5BCAD085-E8A6-8845-BD4E-CB4CCA059FC4}" type="datetimeFigureOut">
               <a:rPr lang="en-US" smtClean="0"/>
-              <a:t>5/7/2026</a:t>
+              <a:t>5/15/2026</a:t>
             </a:fld>
             <a:endParaRPr lang="en-US"/>
           </a:p>
@@ -2722,7 +2722,7 @@
           <a:p>
             <a:fld id="{5BCAD085-E8A6-8845-BD4E-CB4CCA059FC4}" type="datetimeFigureOut">
               <a:rPr lang="en-US" smtClean="0"/>
-              <a:t>5/7/2026</a:t>
+              <a:t>5/15/2026</a:t>
             </a:fld>
             <a:endParaRPr lang="en-US"/>
           </a:p>
@@ -8400,7 +8400,7 @@
                 <a:ea typeface="Lato" panose="020F0502020204030203" pitchFamily="34" charset="0"/>
                 <a:cs typeface="Lato" panose="020F0502020204030203" pitchFamily="34" charset="0"/>
               </a:rPr>
-              <a:t>Energy</a:t>
+              <a:t>Engagement</a:t>
             </a:r>
             <a:br>
               <a:rPr lang="en-US" dirty="0">
@@ -8502,7 +8502,7 @@
                 <a:ea typeface="Lato" panose="020F0502020204030203" pitchFamily="34" charset="0"/>
                 <a:cs typeface="Lato" panose="020F0502020204030203" pitchFamily="34" charset="0"/>
               </a:rPr>
-              <a:t>Energy</a:t>
+              <a:t>Engagement</a:t>
             </a:r>
             <a:br>
               <a:rPr lang="en-US" dirty="0">
@@ -9045,7 +9045,7 @@
                 <a:ea typeface="Lato" panose="020F0502020204030203" pitchFamily="34" charset="0"/>
                 <a:cs typeface="Lato" panose="020F0502020204030203" pitchFamily="34" charset="0"/>
               </a:rPr>
-              <a:t>1.34</a:t>
+              <a:t>0.70</a:t>
             </a:r>
             <a:endParaRPr lang="en-NL" dirty="0">
               <a:solidFill>
@@ -9095,7 +9095,7 @@
                 <a:ea typeface="Lato" panose="020F0502020204030203" pitchFamily="34" charset="0"/>
                 <a:cs typeface="Lato" panose="020F0502020204030203" pitchFamily="34" charset="0"/>
               </a:rPr>
-              <a:t>1.34</a:t>
+              <a:t>0.01</a:t>
             </a:r>
             <a:endParaRPr lang="en-NL" dirty="0">
               <a:solidFill>
@@ -9145,7 +9145,7 @@
                 <a:ea typeface="Lato" panose="020F0502020204030203" pitchFamily="34" charset="0"/>
                 <a:cs typeface="Lato" panose="020F0502020204030203" pitchFamily="34" charset="0"/>
               </a:rPr>
-              <a:t>1.34</a:t>
+              <a:t>0.48</a:t>
             </a:r>
             <a:endParaRPr lang="en-NL" dirty="0">
               <a:solidFill>
@@ -9172,8 +9172,8 @@
         </p:nvSpPr>
         <p:spPr>
           <a:xfrm>
-            <a:off x="1905668" y="1646828"/>
-            <a:ext cx="740228" cy="369332"/>
+            <a:off x="1816749" y="1646828"/>
+            <a:ext cx="829147" cy="369332"/>
           </a:xfrm>
           <a:prstGeom prst="rect">
             <a:avLst/>
@@ -9195,7 +9195,7 @@
                 <a:ea typeface="Lato" panose="020F0502020204030203" pitchFamily="34" charset="0"/>
                 <a:cs typeface="Lato" panose="020F0502020204030203" pitchFamily="34" charset="0"/>
               </a:rPr>
-              <a:t>1.34</a:t>
+              <a:t>-0.21</a:t>
             </a:r>
             <a:endParaRPr lang="en-NL" dirty="0">
               <a:solidFill>
